--- a/Prezentare_OffByOne_Scurta.pptx
+++ b/Prezentare_OffByOne_Scurta.pptx
@@ -4,6 +4,9 @@
   <p:sldMasterIdLst>
     <p:sldMasterId id="2147483648" r:id="rId1"/>
   </p:sldMasterIdLst>
+  <p:notesMasterIdLst>
+    <p:notesMasterId r:id="rId9"/>
+  </p:notesMasterIdLst>
   <p:sldIdLst>
     <p:sldId id="256" r:id="rId2"/>
     <p:sldId id="257" r:id="rId3"/>
@@ -11,12 +14,8 @@
     <p:sldId id="259" r:id="rId5"/>
     <p:sldId id="260" r:id="rId6"/>
     <p:sldId id="261" r:id="rId7"/>
-    <p:sldId id="262" r:id="rId8"/>
-    <p:sldId id="263" r:id="rId9"/>
+    <p:sldId id="263" r:id="rId8"/>
   </p:sldIdLst>
-  <p:notesMasterIdLst>
-    <p:notesMasterId r:id="rId10"/>
-  </p:notesMasterIdLst>
   <p:sldSz cx="12192000" cy="6858000"/>
   <p:notesSz cx="6858000" cy="12192000"/>
   <p:defaultTextStyle>
@@ -111,6 +110,11 @@
       </a:defRPr>
     </a:lvl9pPr>
   </p:defaultTextStyle>
+  <p:extLst>
+    <p:ext uri="{EFAFB233-063F-42B5-8137-9DF3F51BA10A}">
+      <p15:sldGuideLst xmlns:p15="http://schemas.microsoft.com/office/powerpoint/2012/main"/>
+    </p:ext>
+  </p:extLst>
 </p:presentation>
 </file>
 
@@ -136,234 +140,10 @@
           <a:chExt cx="0" cy="0"/>
         </a:xfrm>
       </p:grpSpPr>
-      <p:sp>
-        <p:nvSpPr>
-          <p:cNvPr id="2" name="Header Placeholder 1"/>
-          <p:cNvSpPr>
-            <a:spLocks noGrp="1"/>
-          </p:cNvSpPr>
-          <p:nvPr>
-            <p:ph type="hdr" sz="quarter"/>
-          </p:nvPr>
-        </p:nvSpPr>
-        <p:spPr>
-          <a:xfrm>
-            <a:off x="0" y="0"/>
-            <a:ext cx="2971800" cy="458788"/>
-          </a:xfrm>
-          <a:prstGeom prst="rect">
-            <a:avLst/>
-          </a:prstGeom>
-        </p:spPr>
-        <p:txBody>
-          <a:bodyPr vert="horz" lIns="91440" tIns="45720" rIns="91440" bIns="45720" rtlCol="0"/>
-          <a:lstStyle>
-            <a:lvl1pPr algn="l">
-              <a:defRPr sz="1200"/>
-            </a:lvl1pPr>
-          </a:lstStyle>
-          <a:p>
-            <a:endParaRPr lang="en-US"/>
-          </a:p>
-        </p:txBody>
-      </p:sp>
-      <p:sp>
-        <p:nvSpPr>
-          <p:cNvPr id="3" name="Date Placeholder 2"/>
-          <p:cNvSpPr>
-            <a:spLocks noGrp="1"/>
-          </p:cNvSpPr>
-          <p:nvPr>
-            <p:ph type="dt" idx="1"/>
-          </p:nvPr>
-        </p:nvSpPr>
-        <p:spPr>
-          <a:xfrm>
-            <a:off x="3884613" y="0"/>
-            <a:ext cx="2971800" cy="458788"/>
-          </a:xfrm>
-          <a:prstGeom prst="rect">
-            <a:avLst/>
-          </a:prstGeom>
-        </p:spPr>
-        <p:txBody>
-          <a:bodyPr vert="horz" lIns="91440" tIns="45720" rIns="91440" bIns="45720" rtlCol="0"/>
-          <a:lstStyle>
-            <a:lvl1pPr algn="r">
-              <a:defRPr sz="1200"/>
-            </a:lvl1pPr>
-          </a:lstStyle>
-          <a:p>
-            <a:fld id="{5282F153-3F37-0F45-9E97-73ACFA13230C}" type="datetimeFigureOut">
-              <a:rPr lang="en-US"/>
-              <a:t>7/23/19</a:t>
-            </a:fld>
-            <a:endParaRPr lang="en-US"/>
-          </a:p>
-        </p:txBody>
-      </p:sp>
-      <p:sp>
-        <p:nvSpPr>
-          <p:cNvPr id="4" name="Slide Image Placeholder 3"/>
-          <p:cNvSpPr>
-            <a:spLocks noGrp="1" noRot="1" noChangeAspect="1"/>
-          </p:cNvSpPr>
-          <p:nvPr>
-            <p:ph type="sldImg" idx="2"/>
-          </p:nvPr>
-        </p:nvSpPr>
-        <p:spPr>
-          <a:xfrm>
-            <a:off x="685800" y="1143000"/>
-            <a:ext cx="5486400" cy="3086100"/>
-          </a:xfrm>
-          <a:prstGeom prst="rect">
-            <a:avLst/>
-          </a:prstGeom>
-          <a:noFill/>
-          <a:ln w="12700">
-            <a:solidFill>
-              <a:prstClr val="black"/>
-            </a:solidFill>
-          </a:ln>
-        </p:spPr>
-        <p:txBody>
-          <a:bodyPr vert="horz" lIns="91440" tIns="45720" rIns="91440" bIns="45720" rtlCol="0" anchor="ctr"/>
-          <a:lstStyle/>
-          <a:p>
-            <a:endParaRPr lang="en-US"/>
-          </a:p>
-        </p:txBody>
-      </p:sp>
-      <p:sp>
-        <p:nvSpPr>
-          <p:cNvPr id="5" name="Notes Placeholder 4"/>
-          <p:cNvSpPr>
-            <a:spLocks noGrp="1"/>
-          </p:cNvSpPr>
-          <p:nvPr>
-            <p:ph type="body" sz="quarter" idx="3"/>
-          </p:nvPr>
-        </p:nvSpPr>
-        <p:spPr>
-          <a:xfrm>
-            <a:off x="685800" y="4400550"/>
-            <a:ext cx="5486400" cy="3600450"/>
-          </a:xfrm>
-          <a:prstGeom prst="rect">
-            <a:avLst/>
-          </a:prstGeom>
-        </p:spPr>
-        <p:txBody>
-          <a:bodyPr vert="horz" lIns="91440" tIns="45720" rIns="91440" bIns="45720" rtlCol="0"/>
-          <a:lstStyle/>
-          <a:p>
-            <a:pPr lvl="0"/>
-            <a:r>
-              <a:rPr lang="en-US"/>
-              <a:t>Click to edit Master text styles</a:t>
-            </a:r>
-          </a:p>
-          <a:p>
-            <a:pPr lvl="1"/>
-            <a:r>
-              <a:rPr lang="en-US"/>
-              <a:t>Second level</a:t>
-            </a:r>
-          </a:p>
-          <a:p>
-            <a:pPr lvl="2"/>
-            <a:r>
-              <a:rPr lang="en-US"/>
-              <a:t>Third level</a:t>
-            </a:r>
-          </a:p>
-          <a:p>
-            <a:pPr lvl="3"/>
-            <a:r>
-              <a:rPr lang="en-US"/>
-              <a:t>Fourth level</a:t>
-            </a:r>
-          </a:p>
-          <a:p>
-            <a:pPr lvl="4"/>
-            <a:r>
-              <a:rPr lang="en-US"/>
-              <a:t>Fifth level</a:t>
-            </a:r>
-          </a:p>
-        </p:txBody>
-      </p:sp>
-      <p:sp>
-        <p:nvSpPr>
-          <p:cNvPr id="6" name="Footer Placeholder 5"/>
-          <p:cNvSpPr>
-            <a:spLocks noGrp="1"/>
-          </p:cNvSpPr>
-          <p:nvPr>
-            <p:ph type="ftr" sz="quarter" idx="4"/>
-          </p:nvPr>
-        </p:nvSpPr>
-        <p:spPr>
-          <a:xfrm>
-            <a:off x="0" y="8685213"/>
-            <a:ext cx="2971800" cy="458787"/>
-          </a:xfrm>
-          <a:prstGeom prst="rect">
-            <a:avLst/>
-          </a:prstGeom>
-        </p:spPr>
-        <p:txBody>
-          <a:bodyPr vert="horz" lIns="91440" tIns="45720" rIns="91440" bIns="45720" rtlCol="0" anchor="b"/>
-          <a:lstStyle>
-            <a:lvl1pPr algn="l">
-              <a:defRPr sz="1200"/>
-            </a:lvl1pPr>
-          </a:lstStyle>
-          <a:p>
-            <a:endParaRPr lang="en-US"/>
-          </a:p>
-        </p:txBody>
-      </p:sp>
-      <p:sp>
-        <p:nvSpPr>
-          <p:cNvPr id="7" name="Slide Number Placeholder 6"/>
-          <p:cNvSpPr>
-            <a:spLocks noGrp="1"/>
-          </p:cNvSpPr>
-          <p:nvPr>
-            <p:ph type="sldNum" sz="quarter" idx="5"/>
-          </p:nvPr>
-        </p:nvSpPr>
-        <p:spPr>
-          <a:xfrm>
-            <a:off x="3884613" y="8685213"/>
-            <a:ext cx="2971800" cy="458787"/>
-          </a:xfrm>
-          <a:prstGeom prst="rect">
-            <a:avLst/>
-          </a:prstGeom>
-        </p:spPr>
-        <p:txBody>
-          <a:bodyPr vert="horz" lIns="91440" tIns="45720" rIns="91440" bIns="45720" rtlCol="0" anchor="b"/>
-          <a:lstStyle>
-            <a:lvl1pPr algn="r">
-              <a:defRPr sz="1200"/>
-            </a:lvl1pPr>
-          </a:lstStyle>
-          <a:p>
-            <a:fld id="{CE5E9CC1-C706-0F49-92D6-E571CC5EEA8F}" type="slidenum">
-              <a:rPr lang="en-US"/>
-              <a:t>‹#›</a:t>
-            </a:fld>
-            <a:endParaRPr lang="en-US"/>
-          </a:p>
-        </p:txBody>
-      </p:sp>
     </p:spTree>
     <p:extLst>
       <p:ext uri="{BB962C8B-B14F-4D97-AF65-F5344CB8AC3E}">
-        <p14:creationId xmlns:p14="http://schemas.microsoft.com/office/powerpoint/2010/main" val="1024086991"/>
+        <p14:creationId xmlns:p14="http://schemas.microsoft.com/office/powerpoint/2010/main" val="2627685771"/>
       </p:ext>
     </p:extLst>
   </p:cSld>
@@ -507,10 +287,6 @@
           <a:bodyPr/>
           <a:lstStyle/>
           <a:p>
-            <a:r>
-              <a:rPr lang="en-US" dirty="0"/>
-              <a:t/>
-            </a:r>
             <a:endParaRPr lang="en-US" dirty="0"/>
           </a:p>
         </p:txBody>
@@ -595,10 +371,6 @@
           <a:bodyPr/>
           <a:lstStyle/>
           <a:p>
-            <a:r>
-              <a:rPr lang="en-US" dirty="0"/>
-              <a:t/>
-            </a:r>
             <a:endParaRPr lang="en-US" dirty="0"/>
           </a:p>
         </p:txBody>
@@ -683,10 +455,6 @@
           <a:bodyPr/>
           <a:lstStyle/>
           <a:p>
-            <a:r>
-              <a:rPr lang="en-US" dirty="0"/>
-              <a:t/>
-            </a:r>
             <a:endParaRPr lang="en-US" dirty="0"/>
           </a:p>
         </p:txBody>
@@ -771,10 +539,6 @@
           <a:bodyPr/>
           <a:lstStyle/>
           <a:p>
-            <a:r>
-              <a:rPr lang="en-US" dirty="0"/>
-              <a:t/>
-            </a:r>
             <a:endParaRPr lang="en-US" dirty="0"/>
           </a:p>
         </p:txBody>
@@ -859,10 +623,6 @@
           <a:bodyPr/>
           <a:lstStyle/>
           <a:p>
-            <a:r>
-              <a:rPr lang="en-US" dirty="0"/>
-              <a:t/>
-            </a:r>
             <a:endParaRPr lang="en-US" dirty="0"/>
           </a:p>
         </p:txBody>
@@ -947,10 +707,6 @@
           <a:bodyPr/>
           <a:lstStyle/>
           <a:p>
-            <a:r>
-              <a:rPr lang="en-US" dirty="0"/>
-              <a:t/>
-            </a:r>
             <a:endParaRPr lang="en-US" dirty="0"/>
           </a:p>
         </p:txBody>
@@ -1035,10 +791,6 @@
           <a:bodyPr/>
           <a:lstStyle/>
           <a:p>
-            <a:r>
-              <a:rPr lang="en-US" dirty="0"/>
-              <a:t/>
-            </a:r>
             <a:endParaRPr lang="en-US" dirty="0"/>
           </a:p>
         </p:txBody>
@@ -1061,94 +813,6 @@
             <a:fld id="{F7021451-1387-4CA6-816F-3879F97B5CBC}" type="slidenum">
               <a:rPr lang="en-US"/>
               <a:t>7</a:t>
-            </a:fld>
-            <a:endParaRPr lang="en-US"/>
-          </a:p>
-        </p:txBody>
-      </p:sp>
-    </p:spTree>
-    <p:extLst>
-      <p:ext uri="{BB962C8B-B14F-4D97-AF65-F5344CB8AC3E}">
-        <p14:creationId xmlns:p14="http://schemas.microsoft.com/office/powerpoint/2010/main" val="1024086991"/>
-      </p:ext>
-    </p:extLst>
-  </p:cSld>
-  <p:clrMapOvr>
-    <a:masterClrMapping/>
-  </p:clrMapOvr>
-</p:notes>
-</file>
-
-<file path=ppt/notesSlides/notesSlide8.xml><?xml version="1.0" encoding="utf-8"?>
-<p:notes xmlns:a="http://schemas.openxmlformats.org/drawingml/2006/main" xmlns:r="http://schemas.openxmlformats.org/officeDocument/2006/relationships" xmlns:p="http://schemas.openxmlformats.org/presentationml/2006/main">
-  <p:cSld>
-    <p:spTree>
-      <p:nvGrpSpPr>
-        <p:cNvPr id="1" name=""/>
-        <p:cNvGrpSpPr/>
-        <p:nvPr/>
-      </p:nvGrpSpPr>
-      <p:grpSpPr>
-        <a:xfrm>
-          <a:off x="0" y="0"/>
-          <a:ext cx="0" cy="0"/>
-          <a:chOff x="0" y="0"/>
-          <a:chExt cx="0" cy="0"/>
-        </a:xfrm>
-      </p:grpSpPr>
-      <p:sp>
-        <p:nvSpPr>
-          <p:cNvPr id="2" name="Slide Image Placeholder 1"/>
-          <p:cNvSpPr>
-            <a:spLocks noGrp="1" noRot="1" noChangeAspect="1"/>
-          </p:cNvSpPr>
-          <p:nvPr>
-            <p:ph type="sldImg"/>
-          </p:nvPr>
-        </p:nvSpPr>
-        <p:spPr/>
-      </p:sp>
-      <p:sp>
-        <p:nvSpPr>
-          <p:cNvPr id="3" name="Notes Placeholder 2"/>
-          <p:cNvSpPr>
-            <a:spLocks noGrp="1"/>
-          </p:cNvSpPr>
-          <p:nvPr>
-            <p:ph type="body" idx="1"/>
-          </p:nvPr>
-        </p:nvSpPr>
-        <p:spPr/>
-        <p:txBody>
-          <a:bodyPr/>
-          <a:lstStyle/>
-          <a:p>
-            <a:r>
-              <a:rPr lang="en-US" dirty="0"/>
-              <a:t/>
-            </a:r>
-            <a:endParaRPr lang="en-US" dirty="0"/>
-          </a:p>
-        </p:txBody>
-      </p:sp>
-      <p:sp>
-        <p:nvSpPr>
-          <p:cNvPr id="4" name="Slide Number Placeholder 3"/>
-          <p:cNvSpPr>
-            <a:spLocks noGrp="1"/>
-          </p:cNvSpPr>
-          <p:nvPr>
-            <p:ph type="sldNum" sz="quarter" idx="10"/>
-          </p:nvPr>
-        </p:nvSpPr>
-        <p:spPr/>
-        <p:txBody>
-          <a:bodyPr/>
-          <a:lstStyle/>
-          <a:p>
-            <a:fld id="{F7021451-1387-4CA6-816F-3879F97B5CBC}" type="slidenum">
-              <a:rPr lang="en-US"/>
-              <a:t>8</a:t>
             </a:fld>
             <a:endParaRPr lang="en-US"/>
           </a:p>
@@ -1200,6 +864,11 @@
 <file path=ppt/slideMasters/slideMaster1.xml><?xml version="1.0" encoding="utf-8"?>
 <p:sldMaster xmlns:a="http://schemas.openxmlformats.org/drawingml/2006/main" xmlns:r="http://schemas.openxmlformats.org/officeDocument/2006/relationships" xmlns:p="http://schemas.openxmlformats.org/presentationml/2006/main">
   <p:cSld>
+    <p:bg>
+      <p:bgRef idx="1001">
+        <a:schemeClr val="bg1"/>
+      </p:bgRef>
+    </p:bg>
     <p:spTree>
       <p:nvGrpSpPr>
         <p:cNvPr id="1" name=""/>
@@ -1482,6 +1151,7 @@
         <a:solidFill>
           <a:srgbClr val="0F1023"/>
         </a:solidFill>
+        <a:effectLst/>
       </p:bgPr>
     </p:bg>
     <p:spTree>
@@ -1583,11 +1253,11 @@
           <a:bodyPr wrap="square" lIns="0" tIns="0" rIns="0" bIns="0" rtlCol="0" anchor="ctr"/>
           <a:lstStyle/>
           <a:p>
-            <a:pPr indent="0" marL="0">
-              <a:buNone/>
-            </a:pPr>
-            <a:r>
-              <a:rPr lang="en-US" sz="1300" b="1" spc="800" kern="0" dirty="0">
+            <a:pPr marL="0" indent="0">
+              <a:buNone/>
+            </a:pPr>
+            <a:r>
+              <a:rPr lang="en-US" sz="1300" b="1" kern="0" spc="800">
                 <a:solidFill>
                   <a:srgbClr val="06B6D4"/>
                 </a:solidFill>
@@ -1595,7 +1265,7 @@
                 <a:ea typeface="Calibri" pitchFamily="34" charset="-122"/>
                 <a:cs typeface="Calibri" pitchFamily="34" charset="-120"/>
               </a:rPr>
-              <a:t>SIMPOZION STIINTIFIC STUDENTESC</a:t>
+              <a:t>SIMPOZION ȘTIINȚIFIC STUDENȚESC</a:t>
             </a:r>
             <a:endParaRPr lang="en-US" sz="1300" dirty="0"/>
           </a:p>
@@ -1622,7 +1292,7 @@
           <a:bodyPr wrap="square" lIns="0" tIns="0" rIns="0" bIns="0" rtlCol="0" anchor="ctr"/>
           <a:lstStyle/>
           <a:p>
-            <a:pPr indent="0" marL="0">
+            <a:pPr marL="0" indent="0">
               <a:buNone/>
             </a:pPr>
             <a:r>
@@ -1661,11 +1331,11 @@
           <a:bodyPr wrap="square" lIns="0" tIns="0" rIns="0" bIns="0" rtlCol="0" anchor="ctr"/>
           <a:lstStyle/>
           <a:p>
-            <a:pPr indent="0" marL="0">
-              <a:buNone/>
-            </a:pPr>
-            <a:r>
-              <a:rPr lang="en-US" sz="2200" i="1" dirty="0">
+            <a:pPr marL="0" indent="0">
+              <a:buNone/>
+            </a:pPr>
+            <a:r>
+              <a:rPr lang="en-US" sz="2200" i="1">
                 <a:solidFill>
                   <a:srgbClr val="E5E7EB"/>
                 </a:solidFill>
@@ -1673,7 +1343,7 @@
                 <a:ea typeface="Calibri" pitchFamily="34" charset="-122"/>
                 <a:cs typeface="Calibri" pitchFamily="34" charset="-120"/>
               </a:rPr>
-              <a:t>Platforma web interactiva pentru studiul algoritmilor de sortare</a:t>
+              <a:t>Platformă web interactivă pentru studiul algoritmilor de sortare</a:t>
             </a:r>
             <a:endParaRPr lang="en-US" sz="2200" dirty="0"/>
           </a:p>
@@ -1720,11 +1390,11 @@
           <a:bodyPr wrap="square" lIns="0" tIns="0" rIns="0" bIns="0" rtlCol="0" anchor="ctr"/>
           <a:lstStyle/>
           <a:p>
-            <a:pPr indent="0" marL="0">
-              <a:buNone/>
-            </a:pPr>
-            <a:r>
-              <a:rPr lang="en-US" sz="1000" b="1" spc="400" kern="0" dirty="0">
+            <a:pPr marL="0" indent="0">
+              <a:buNone/>
+            </a:pPr>
+            <a:r>
+              <a:rPr lang="en-US" sz="1000" b="1" kern="0" spc="400" dirty="0">
                 <a:solidFill>
                   <a:srgbClr val="06B6D4"/>
                 </a:solidFill>
@@ -1759,11 +1429,11 @@
           <a:bodyPr wrap="square" lIns="0" tIns="0" rIns="0" bIns="0" rtlCol="0" anchor="ctr"/>
           <a:lstStyle/>
           <a:p>
-            <a:pPr indent="0" marL="0">
-              <a:buNone/>
-            </a:pPr>
-            <a:r>
-              <a:rPr lang="en-US" sz="1800" b="1" dirty="0">
+            <a:pPr marL="0" indent="0">
+              <a:buNone/>
+            </a:pPr>
+            <a:r>
+              <a:rPr lang="en-US" sz="1800" b="1">
                 <a:solidFill>
                   <a:srgbClr val="FFFFFF"/>
                 </a:solidFill>
@@ -1771,7 +1441,7 @@
                 <a:ea typeface="Calibri" pitchFamily="34" charset="-122"/>
                 <a:cs typeface="Calibri" pitchFamily="34" charset="-120"/>
               </a:rPr>
-              <a:t>Sortan Eduard-Catalin   ·   Baloi Dorian-Liviu</a:t>
+              <a:t>Șortan Eduard-Cătălin   ·   Băloi Dorian-Liviu</a:t>
             </a:r>
             <a:endParaRPr lang="en-US" sz="1800" dirty="0"/>
           </a:p>
@@ -1798,11 +1468,11 @@
           <a:bodyPr wrap="square" lIns="0" tIns="0" rIns="0" bIns="0" rtlCol="0" anchor="ctr"/>
           <a:lstStyle/>
           <a:p>
-            <a:pPr indent="0" marL="0">
-              <a:buNone/>
-            </a:pPr>
-            <a:r>
-              <a:rPr lang="en-US" sz="1000" b="1" spc="400" kern="0" dirty="0">
+            <a:pPr marL="0" indent="0">
+              <a:buNone/>
+            </a:pPr>
+            <a:r>
+              <a:rPr lang="en-US" sz="1000" b="1" kern="0" spc="400" dirty="0">
                 <a:solidFill>
                   <a:srgbClr val="06B6D4"/>
                 </a:solidFill>
@@ -1837,11 +1507,11 @@
           <a:bodyPr wrap="square" lIns="0" tIns="0" rIns="0" bIns="0" rtlCol="0" anchor="ctr"/>
           <a:lstStyle/>
           <a:p>
-            <a:pPr indent="0" marL="0">
-              <a:buNone/>
-            </a:pPr>
-            <a:r>
-              <a:rPr lang="en-US" sz="1500" dirty="0">
+            <a:pPr marL="0" indent="0">
+              <a:buNone/>
+            </a:pPr>
+            <a:r>
+              <a:rPr lang="pt-BR" sz="1500">
                 <a:solidFill>
                   <a:srgbClr val="E5E7EB"/>
                 </a:solidFill>
@@ -1849,7 +1519,7 @@
                 <a:ea typeface="Calibri" pitchFamily="34" charset="-122"/>
                 <a:cs typeface="Calibri" pitchFamily="34" charset="-120"/>
               </a:rPr>
-              <a:t>Conf. Dr. Muscalagiu Ionel   ·   As. Dr. Ing. Rat Cezara-Liliana</a:t>
+              <a:t>Conf. dr. Ionel Muscalagiu   ·   As. dr. ing. Cezara-Liliana Raț</a:t>
             </a:r>
             <a:endParaRPr lang="en-US" sz="1500" dirty="0"/>
           </a:p>
@@ -1876,11 +1546,11 @@
           <a:bodyPr wrap="square" lIns="0" tIns="0" rIns="0" bIns="0" rtlCol="0" anchor="ctr"/>
           <a:lstStyle/>
           <a:p>
-            <a:pPr indent="0" marL="0">
-              <a:buNone/>
-            </a:pPr>
-            <a:r>
-              <a:rPr lang="en-US" sz="1200" i="1" dirty="0">
+            <a:pPr marL="0" indent="0">
+              <a:buNone/>
+            </a:pPr>
+            <a:r>
+              <a:rPr lang="en-US" sz="1200" i="1">
                 <a:solidFill>
                   <a:srgbClr val="64748B"/>
                 </a:solidFill>
@@ -1888,7 +1558,7 @@
                 <a:ea typeface="Calibri" pitchFamily="34" charset="-122"/>
                 <a:cs typeface="Calibri" pitchFamily="34" charset="-120"/>
               </a:rPr>
-              <a:t>Universitatea Politehnica Timisoara - Facultatea de Inginerie Hunedoara</a:t>
+              <a:t>Universitatea Politehnica Timișoara - Facultatea de Inginerie Hunedoara</a:t>
             </a:r>
             <a:endParaRPr lang="en-US" sz="1200" dirty="0"/>
           </a:p>
@@ -1910,6 +1580,7 @@
         <a:solidFill>
           <a:srgbClr val="F8F9FB"/>
         </a:solidFill>
+        <a:effectLst/>
       </p:bgPr>
     </p:bg>
     <p:spTree>
@@ -1967,11 +1638,11 @@
           <a:bodyPr wrap="square" lIns="0" tIns="0" rIns="0" bIns="0" rtlCol="0" anchor="ctr"/>
           <a:lstStyle/>
           <a:p>
-            <a:pPr indent="0" marL="0">
-              <a:buNone/>
-            </a:pPr>
-            <a:r>
-              <a:rPr lang="en-US" sz="1100" b="1" spc="400" kern="0" dirty="0">
+            <a:pPr marL="0" indent="0">
+              <a:buNone/>
+            </a:pPr>
+            <a:r>
+              <a:rPr lang="en-US" sz="1100" b="1" kern="0" spc="400" dirty="0">
                 <a:solidFill>
                   <a:srgbClr val="6E56CF"/>
                 </a:solidFill>
@@ -2006,11 +1677,11 @@
           <a:bodyPr wrap="square" lIns="0" tIns="0" rIns="0" bIns="0" rtlCol="0" anchor="ctr"/>
           <a:lstStyle/>
           <a:p>
-            <a:pPr indent="0" marL="0">
-              <a:buNone/>
-            </a:pPr>
-            <a:r>
-              <a:rPr lang="en-US" sz="3600" b="1" dirty="0">
+            <a:pPr marL="0" indent="0">
+              <a:buNone/>
+            </a:pPr>
+            <a:r>
+              <a:rPr lang="en-US" sz="3600" b="1">
                 <a:solidFill>
                   <a:srgbClr val="0F172A"/>
                 </a:solidFill>
@@ -2018,7 +1689,7 @@
                 <a:ea typeface="Calibri" pitchFamily="34" charset="-122"/>
                 <a:cs typeface="Calibri" pitchFamily="34" charset="-120"/>
               </a:rPr>
-              <a:t>Problema didactica si solutia noastra</a:t>
+              <a:t>Problema didactică și soluția noastră</a:t>
             </a:r>
             <a:endParaRPr lang="en-US" sz="3600" dirty="0"/>
           </a:p>
@@ -2092,11 +1763,11 @@
           <a:bodyPr wrap="square" lIns="0" tIns="0" rIns="0" bIns="0" rtlCol="0" anchor="ctr"/>
           <a:lstStyle/>
           <a:p>
-            <a:pPr indent="0" marL="0">
-              <a:buNone/>
-            </a:pPr>
-            <a:r>
-              <a:rPr lang="en-US" sz="1300" b="1" spc="400" kern="0" dirty="0">
+            <a:pPr marL="0" indent="0">
+              <a:buNone/>
+            </a:pPr>
+            <a:r>
+              <a:rPr lang="en-US" sz="1300" b="1" kern="0" spc="400" dirty="0">
                 <a:solidFill>
                   <a:srgbClr val="FFFFFF"/>
                 </a:solidFill>
@@ -2131,11 +1802,11 @@
           <a:bodyPr wrap="square" lIns="0" tIns="0" rIns="0" bIns="0" rtlCol="0" anchor="ctr"/>
           <a:lstStyle/>
           <a:p>
-            <a:pPr indent="0" marL="0">
-              <a:buNone/>
-            </a:pPr>
-            <a:r>
-              <a:rPr lang="en-US" sz="2000" b="1" dirty="0">
+            <a:pPr marL="0" indent="0">
+              <a:buNone/>
+            </a:pPr>
+            <a:r>
+              <a:rPr lang="pt-BR" sz="2000" b="1">
                 <a:solidFill>
                   <a:srgbClr val="0F172A"/>
                 </a:solidFill>
@@ -2143,7 +1814,7 @@
                 <a:ea typeface="Calibri" pitchFamily="34" charset="-122"/>
                 <a:cs typeface="Calibri" pitchFamily="34" charset="-120"/>
               </a:rPr>
-              <a:t>De ce e greu sa inveti algoritmi?</a:t>
+              <a:t>De ce e greu să înveți algoritmi?</a:t>
             </a:r>
             <a:endParaRPr lang="en-US" sz="2000" dirty="0"/>
           </a:p>
@@ -2170,7 +1841,7 @@
           <a:bodyPr wrap="square" lIns="0" tIns="0" rIns="0" bIns="0" rtlCol="0" anchor="ctr"/>
           <a:lstStyle/>
           <a:p>
-            <a:pPr indent="0" marL="0">
+            <a:pPr marL="0" indent="0">
               <a:buNone/>
             </a:pPr>
             <a:r>
@@ -2209,11 +1880,11 @@
           <a:bodyPr wrap="square" lIns="0" tIns="0" rIns="0" bIns="0" rtlCol="0" anchor="ctr"/>
           <a:lstStyle/>
           <a:p>
-            <a:pPr indent="0" marL="0">
-              <a:buNone/>
-            </a:pPr>
-            <a:r>
-              <a:rPr lang="en-US" sz="1400" b="1" dirty="0">
+            <a:pPr marL="0" indent="0">
+              <a:buNone/>
+            </a:pPr>
+            <a:r>
+              <a:rPr lang="en-US" sz="1400" b="1">
                 <a:solidFill>
                   <a:srgbClr val="0F172A"/>
                 </a:solidFill>
@@ -2221,7 +1892,7 @@
                 <a:ea typeface="Calibri" pitchFamily="34" charset="-122"/>
                 <a:cs typeface="Calibri" pitchFamily="34" charset="-120"/>
               </a:rPr>
-              <a:t>Abstractizare excesiva</a:t>
+              <a:t>Abstractizare excesivă</a:t>
             </a:r>
             <a:endParaRPr lang="en-US" sz="1400" dirty="0"/>
           </a:p>
@@ -2248,11 +1919,11 @@
           <a:bodyPr wrap="square" lIns="0" tIns="0" rIns="0" bIns="0" rtlCol="0" anchor="ctr"/>
           <a:lstStyle/>
           <a:p>
-            <a:pPr indent="0" marL="0">
-              <a:buNone/>
-            </a:pPr>
-            <a:r>
-              <a:rPr lang="en-US" sz="1100" dirty="0">
+            <a:pPr marL="0" indent="0">
+              <a:buNone/>
+            </a:pPr>
+            <a:r>
+              <a:rPr lang="en-US" sz="1100">
                 <a:solidFill>
                   <a:srgbClr val="64748B"/>
                 </a:solidFill>
@@ -2260,7 +1931,7 @@
                 <a:ea typeface="Calibri" pitchFamily="34" charset="-122"/>
                 <a:cs typeface="Calibri" pitchFamily="34" charset="-120"/>
               </a:rPr>
-              <a:t>Pseudocod si diagrame statice nu transmit dinamica pasilor.</a:t>
+              <a:t>Pseudocodul și diagramele statice nu transmit dinamica pașilor.</a:t>
             </a:r>
             <a:endParaRPr lang="en-US" sz="1100" dirty="0"/>
           </a:p>
@@ -2287,7 +1958,7 @@
           <a:bodyPr wrap="square" lIns="0" tIns="0" rIns="0" bIns="0" rtlCol="0" anchor="ctr"/>
           <a:lstStyle/>
           <a:p>
-            <a:pPr indent="0" marL="0">
+            <a:pPr marL="0" indent="0">
               <a:buNone/>
             </a:pPr>
             <a:r>
@@ -2326,11 +1997,11 @@
           <a:bodyPr wrap="square" lIns="0" tIns="0" rIns="0" bIns="0" rtlCol="0" anchor="ctr"/>
           <a:lstStyle/>
           <a:p>
-            <a:pPr indent="0" marL="0">
-              <a:buNone/>
-            </a:pPr>
-            <a:r>
-              <a:rPr lang="en-US" sz="1400" b="1" dirty="0">
+            <a:pPr marL="0" indent="0">
+              <a:buNone/>
+            </a:pPr>
+            <a:r>
+              <a:rPr lang="en-US" sz="1400" b="1">
                 <a:solidFill>
                   <a:srgbClr val="0F172A"/>
                 </a:solidFill>
@@ -2338,7 +2009,7 @@
                 <a:ea typeface="Calibri" pitchFamily="34" charset="-122"/>
                 <a:cs typeface="Calibri" pitchFamily="34" charset="-120"/>
               </a:rPr>
-              <a:t>Feedback intarziat</a:t>
+              <a:t>Feedback întârziat</a:t>
             </a:r>
             <a:endParaRPr lang="en-US" sz="1400" dirty="0"/>
           </a:p>
@@ -2365,11 +2036,11 @@
           <a:bodyPr wrap="square" lIns="0" tIns="0" rIns="0" bIns="0" rtlCol="0" anchor="ctr"/>
           <a:lstStyle/>
           <a:p>
-            <a:pPr indent="0" marL="0">
-              <a:buNone/>
-            </a:pPr>
-            <a:r>
-              <a:rPr lang="en-US" sz="1100" dirty="0">
+            <a:pPr marL="0" indent="0">
+              <a:buNone/>
+            </a:pPr>
+            <a:r>
+              <a:rPr lang="en-US" sz="1100">
                 <a:solidFill>
                   <a:srgbClr val="64748B"/>
                 </a:solidFill>
@@ -2377,7 +2048,7 @@
                 <a:ea typeface="Calibri" pitchFamily="34" charset="-122"/>
                 <a:cs typeface="Calibri" pitchFamily="34" charset="-120"/>
               </a:rPr>
-              <a:t>Corectarea vine saptamani mai tarziu, nu imediat.</a:t>
+              <a:t>Corectarea vine săptămâni mai târziu, nu imediat.</a:t>
             </a:r>
             <a:endParaRPr lang="en-US" sz="1100" dirty="0"/>
           </a:p>
@@ -2404,7 +2075,7 @@
           <a:bodyPr wrap="square" lIns="0" tIns="0" rIns="0" bIns="0" rtlCol="0" anchor="ctr"/>
           <a:lstStyle/>
           <a:p>
-            <a:pPr indent="0" marL="0">
+            <a:pPr marL="0" indent="0">
               <a:buNone/>
             </a:pPr>
             <a:r>
@@ -2443,11 +2114,11 @@
           <a:bodyPr wrap="square" lIns="0" tIns="0" rIns="0" bIns="0" rtlCol="0" anchor="ctr"/>
           <a:lstStyle/>
           <a:p>
-            <a:pPr indent="0" marL="0">
-              <a:buNone/>
-            </a:pPr>
-            <a:r>
-              <a:rPr lang="en-US" sz="1400" b="1" dirty="0">
+            <a:pPr marL="0" indent="0">
+              <a:buNone/>
+            </a:pPr>
+            <a:r>
+              <a:rPr lang="en-US" sz="1400" b="1">
                 <a:solidFill>
                   <a:srgbClr val="0F172A"/>
                 </a:solidFill>
@@ -2455,7 +2126,7 @@
                 <a:ea typeface="Calibri" pitchFamily="34" charset="-122"/>
                 <a:cs typeface="Calibri" pitchFamily="34" charset="-120"/>
               </a:rPr>
-              <a:t>Motivatie scazuta</a:t>
+              <a:t>Motivație scăzută</a:t>
             </a:r>
             <a:endParaRPr lang="en-US" sz="1400" dirty="0"/>
           </a:p>
@@ -2482,11 +2153,11 @@
           <a:bodyPr wrap="square" lIns="0" tIns="0" rIns="0" bIns="0" rtlCol="0" anchor="ctr"/>
           <a:lstStyle/>
           <a:p>
-            <a:pPr indent="0" marL="0">
-              <a:buNone/>
-            </a:pPr>
-            <a:r>
-              <a:rPr lang="en-US" sz="1100" dirty="0">
+            <a:pPr marL="0" indent="0">
+              <a:buNone/>
+            </a:pPr>
+            <a:r>
+              <a:rPr lang="en-US" sz="1100">
                 <a:solidFill>
                   <a:srgbClr val="64748B"/>
                 </a:solidFill>
@@ -2494,7 +2165,7 @@
                 <a:ea typeface="Calibri" pitchFamily="34" charset="-122"/>
                 <a:cs typeface="Calibri" pitchFamily="34" charset="-120"/>
               </a:rPr>
-              <a:t>Fara recompensare imediata, abandonul vine repede.</a:t>
+              <a:t>Fără recompensare imediată, abandonul vine repede.</a:t>
             </a:r>
             <a:endParaRPr lang="en-US" sz="1100" dirty="0"/>
           </a:p>
@@ -2568,11 +2239,11 @@
           <a:bodyPr wrap="square" lIns="0" tIns="0" rIns="0" bIns="0" rtlCol="0" anchor="ctr"/>
           <a:lstStyle/>
           <a:p>
-            <a:pPr indent="0" marL="0">
-              <a:buNone/>
-            </a:pPr>
-            <a:r>
-              <a:rPr lang="en-US" sz="1300" b="1" spc="400" kern="0" dirty="0">
+            <a:pPr marL="0" indent="0">
+              <a:buNone/>
+            </a:pPr>
+            <a:r>
+              <a:rPr lang="en-US" sz="1300" b="1" kern="0" spc="400">
                 <a:solidFill>
                   <a:srgbClr val="FFFFFF"/>
                 </a:solidFill>
@@ -2580,7 +2251,7 @@
                 <a:ea typeface="Calibri" pitchFamily="34" charset="-122"/>
                 <a:cs typeface="Calibri" pitchFamily="34" charset="-120"/>
               </a:rPr>
-              <a:t>SOLUTIA OFFBYONE</a:t>
+              <a:t>SOLUȚIA OFFBYONE</a:t>
             </a:r>
             <a:endParaRPr lang="en-US" sz="1300" dirty="0"/>
           </a:p>
@@ -2607,11 +2278,11 @@
           <a:bodyPr wrap="square" lIns="0" tIns="0" rIns="0" bIns="0" rtlCol="0" anchor="ctr"/>
           <a:lstStyle/>
           <a:p>
-            <a:pPr indent="0" marL="0">
-              <a:buNone/>
-            </a:pPr>
-            <a:r>
-              <a:rPr lang="en-US" sz="2000" b="1" dirty="0">
+            <a:pPr marL="0" indent="0">
+              <a:buNone/>
+            </a:pPr>
+            <a:r>
+              <a:rPr lang="en-US" sz="2000" b="1">
                 <a:solidFill>
                   <a:srgbClr val="0F172A"/>
                 </a:solidFill>
@@ -2619,7 +2290,7 @@
                 <a:ea typeface="Calibri" pitchFamily="34" charset="-122"/>
                 <a:cs typeface="Calibri" pitchFamily="34" charset="-120"/>
               </a:rPr>
-              <a:t>O singura platforma, totul integrat</a:t>
+              <a:t>O singură platformă, totul integrat</a:t>
             </a:r>
             <a:endParaRPr lang="en-US" sz="2000" dirty="0"/>
           </a:p>
@@ -2666,7 +2337,7 @@
           <a:bodyPr wrap="square" lIns="0" tIns="0" rIns="0" bIns="0" rtlCol="0" anchor="ctr"/>
           <a:lstStyle/>
           <a:p>
-            <a:pPr algn="ctr" indent="0" marL="0">
+            <a:pPr marL="0" indent="0" algn="ctr">
               <a:buNone/>
             </a:pPr>
             <a:r>
@@ -2705,11 +2376,11 @@
           <a:bodyPr wrap="square" lIns="0" tIns="0" rIns="0" bIns="0" rtlCol="0" anchor="ctr"/>
           <a:lstStyle/>
           <a:p>
-            <a:pPr indent="0" marL="0">
-              <a:buNone/>
-            </a:pPr>
-            <a:r>
-              <a:rPr lang="en-US" sz="1400" dirty="0">
+            <a:pPr marL="0" indent="0">
+              <a:buNone/>
+            </a:pPr>
+            <a:r>
+              <a:rPr lang="en-US" sz="1400">
                 <a:solidFill>
                   <a:srgbClr val="0F172A"/>
                 </a:solidFill>
@@ -2717,7 +2388,7 @@
                 <a:ea typeface="Calibri" pitchFamily="34" charset="-122"/>
                 <a:cs typeface="Calibri" pitchFamily="34" charset="-120"/>
               </a:rPr>
-              <a:t>Teorie + cod sursa C++</a:t>
+              <a:t>Teorie + cod sursă C++</a:t>
             </a:r>
             <a:endParaRPr lang="en-US" sz="1400" dirty="0"/>
           </a:p>
@@ -2764,7 +2435,7 @@
           <a:bodyPr wrap="square" lIns="0" tIns="0" rIns="0" bIns="0" rtlCol="0" anchor="ctr"/>
           <a:lstStyle/>
           <a:p>
-            <a:pPr algn="ctr" indent="0" marL="0">
+            <a:pPr marL="0" indent="0" algn="ctr">
               <a:buNone/>
             </a:pPr>
             <a:r>
@@ -2803,7 +2474,7 @@
           <a:bodyPr wrap="square" lIns="0" tIns="0" rIns="0" bIns="0" rtlCol="0" anchor="ctr"/>
           <a:lstStyle/>
           <a:p>
-            <a:pPr indent="0" marL="0">
+            <a:pPr marL="0" indent="0">
               <a:buNone/>
             </a:pPr>
             <a:r>
@@ -2862,7 +2533,7 @@
           <a:bodyPr wrap="square" lIns="0" tIns="0" rIns="0" bIns="0" rtlCol="0" anchor="ctr"/>
           <a:lstStyle/>
           <a:p>
-            <a:pPr algn="ctr" indent="0" marL="0">
+            <a:pPr marL="0" indent="0" algn="ctr">
               <a:buNone/>
             </a:pPr>
             <a:r>
@@ -2901,11 +2572,11 @@
           <a:bodyPr wrap="square" lIns="0" tIns="0" rIns="0" bIns="0" rtlCol="0" anchor="ctr"/>
           <a:lstStyle/>
           <a:p>
-            <a:pPr indent="0" marL="0">
-              <a:buNone/>
-            </a:pPr>
-            <a:r>
-              <a:rPr lang="en-US" sz="1400" dirty="0">
+            <a:pPr marL="0" indent="0">
+              <a:buNone/>
+            </a:pPr>
+            <a:r>
+              <a:rPr lang="en-US" sz="1400">
                 <a:solidFill>
                   <a:srgbClr val="0F172A"/>
                 </a:solidFill>
@@ -2913,7 +2584,7 @@
                 <a:ea typeface="Calibri" pitchFamily="34" charset="-122"/>
                 <a:cs typeface="Calibri" pitchFamily="34" charset="-120"/>
               </a:rPr>
-              <a:t>Grile cu evaluare automata</a:t>
+              <a:t>Grile cu evaluare automată</a:t>
             </a:r>
             <a:endParaRPr lang="en-US" sz="1400" dirty="0"/>
           </a:p>
@@ -2960,7 +2631,7 @@
           <a:bodyPr wrap="square" lIns="0" tIns="0" rIns="0" bIns="0" rtlCol="0" anchor="ctr"/>
           <a:lstStyle/>
           <a:p>
-            <a:pPr algn="ctr" indent="0" marL="0">
+            <a:pPr marL="0" indent="0" algn="ctr">
               <a:buNone/>
             </a:pPr>
             <a:r>
@@ -2999,7 +2670,7 @@
           <a:bodyPr wrap="square" lIns="0" tIns="0" rIns="0" bIns="0" rtlCol="0" anchor="ctr"/>
           <a:lstStyle/>
           <a:p>
-            <a:pPr indent="0" marL="0">
+            <a:pPr marL="0" indent="0">
               <a:buNone/>
             </a:pPr>
             <a:r>
@@ -3058,7 +2729,7 @@
           <a:bodyPr wrap="square" lIns="0" tIns="0" rIns="0" bIns="0" rtlCol="0" anchor="ctr"/>
           <a:lstStyle/>
           <a:p>
-            <a:pPr algn="ctr" indent="0" marL="0">
+            <a:pPr marL="0" indent="0" algn="ctr">
               <a:buNone/>
             </a:pPr>
             <a:r>
@@ -3097,7 +2768,7 @@
           <a:bodyPr wrap="square" lIns="0" tIns="0" rIns="0" bIns="0" rtlCol="0" anchor="ctr"/>
           <a:lstStyle/>
           <a:p>
-            <a:pPr indent="0" marL="0">
+            <a:pPr marL="0" indent="0">
               <a:buNone/>
             </a:pPr>
             <a:r>
@@ -3156,7 +2827,7 @@
           <a:bodyPr wrap="square" lIns="0" tIns="0" rIns="0" bIns="0" rtlCol="0" anchor="ctr"/>
           <a:lstStyle/>
           <a:p>
-            <a:pPr algn="ctr" indent="0" marL="0">
+            <a:pPr marL="0" indent="0" algn="ctr">
               <a:buNone/>
             </a:pPr>
             <a:r>
@@ -3195,11 +2866,11 @@
           <a:bodyPr wrap="square" lIns="0" tIns="0" rIns="0" bIns="0" rtlCol="0" anchor="ctr"/>
           <a:lstStyle/>
           <a:p>
-            <a:pPr indent="0" marL="0">
-              <a:buNone/>
-            </a:pPr>
-            <a:r>
-              <a:rPr lang="en-US" sz="1400" dirty="0">
+            <a:pPr marL="0" indent="0">
+              <a:buNone/>
+            </a:pPr>
+            <a:r>
+              <a:rPr lang="en-US" sz="1400">
                 <a:solidFill>
                   <a:srgbClr val="0F172A"/>
                 </a:solidFill>
@@ -3207,7 +2878,7 @@
                 <a:ea typeface="Calibri" pitchFamily="34" charset="-122"/>
                 <a:cs typeface="Calibri" pitchFamily="34" charset="-120"/>
               </a:rPr>
-              <a:t>PWA pentru utilizare offline</a:t>
+              <a:t>Parcursuri de învățare ghidate</a:t>
             </a:r>
             <a:endParaRPr lang="en-US" sz="1400" dirty="0"/>
           </a:p>
@@ -3234,7 +2905,7 @@
           <a:bodyPr wrap="square" lIns="0" tIns="0" rIns="0" bIns="0" rtlCol="0" anchor="ctr"/>
           <a:lstStyle/>
           <a:p>
-            <a:pPr indent="0" marL="0">
+            <a:pPr marL="0" indent="0">
               <a:buNone/>
             </a:pPr>
             <a:r>
@@ -3273,7 +2944,7 @@
           <a:bodyPr wrap="square" lIns="0" tIns="0" rIns="0" bIns="0" rtlCol="0" anchor="ctr"/>
           <a:lstStyle/>
           <a:p>
-            <a:pPr algn="r" indent="0" marL="0">
+            <a:pPr marL="0" indent="0" algn="r">
               <a:buNone/>
             </a:pPr>
             <a:r>
@@ -3307,6 +2978,7 @@
         <a:solidFill>
           <a:srgbClr val="F8F9FB"/>
         </a:solidFill>
+        <a:effectLst/>
       </p:bgPr>
     </p:bg>
     <p:spTree>
@@ -3364,11 +3036,11 @@
           <a:bodyPr wrap="square" lIns="0" tIns="0" rIns="0" bIns="0" rtlCol="0" anchor="ctr"/>
           <a:lstStyle/>
           <a:p>
-            <a:pPr indent="0" marL="0">
-              <a:buNone/>
-            </a:pPr>
-            <a:r>
-              <a:rPr lang="en-US" sz="1100" b="1" spc="400" kern="0" dirty="0">
+            <a:pPr marL="0" indent="0">
+              <a:buNone/>
+            </a:pPr>
+            <a:r>
+              <a:rPr lang="en-US" sz="1100" b="1" kern="0" spc="400" dirty="0">
                 <a:solidFill>
                   <a:srgbClr val="6E56CF"/>
                 </a:solidFill>
@@ -3403,11 +3075,11 @@
           <a:bodyPr wrap="square" lIns="0" tIns="0" rIns="0" bIns="0" rtlCol="0" anchor="ctr"/>
           <a:lstStyle/>
           <a:p>
-            <a:pPr indent="0" marL="0">
-              <a:buNone/>
-            </a:pPr>
-            <a:r>
-              <a:rPr lang="en-US" sz="3600" b="1" dirty="0">
+            <a:pPr marL="0" indent="0">
+              <a:buNone/>
+            </a:pPr>
+            <a:r>
+              <a:rPr lang="en-US" sz="3600" b="1">
                 <a:solidFill>
                   <a:srgbClr val="0F172A"/>
                 </a:solidFill>
@@ -3415,7 +3087,7 @@
                 <a:ea typeface="Calibri" pitchFamily="34" charset="-122"/>
                 <a:cs typeface="Calibri" pitchFamily="34" charset="-120"/>
               </a:rPr>
-              <a:t>Stack-ul aplicatiei OffByOne Academy</a:t>
+              <a:t>Stack-ul aplicației OffByOne Academy</a:t>
             </a:r>
             <a:endParaRPr lang="en-US" sz="3600" dirty="0"/>
           </a:p>
@@ -3445,7 +3117,7 @@
             <a:prstDash val="solid"/>
           </a:ln>
           <a:effectLst>
-            <a:outerShdw sx="100000" sy="100000" kx="0" ky="0" algn="bl" rotWithShape="0" blurRad="127000" dist="38100" dir="5400000">
+            <a:outerShdw blurRad="127000" dist="38100" dir="5400000" algn="bl" rotWithShape="0">
               <a:srgbClr val="000000">
                 <a:alpha val="8000"/>
               </a:srgbClr>
@@ -3494,7 +3166,7 @@
           <a:bodyPr wrap="square" lIns="0" tIns="0" rIns="0" bIns="0" rtlCol="0" anchor="ctr"/>
           <a:lstStyle/>
           <a:p>
-            <a:pPr indent="0" marL="0">
+            <a:pPr marL="0" indent="0">
               <a:buNone/>
             </a:pPr>
             <a:r>
@@ -3533,7 +3205,7 @@
           <a:bodyPr wrap="square" rtlCol="0" anchor="t"/>
           <a:lstStyle/>
           <a:p>
-            <a:pPr indent="0" marL="0">
+            <a:pPr marL="0" indent="0">
               <a:spcAft>
                 <a:spcPts val="800"/>
               </a:spcAft>
@@ -3553,7 +3225,7 @@
             <a:endParaRPr lang="en-US" sz="1300" dirty="0"/>
           </a:p>
           <a:p>
-            <a:pPr indent="0" marL="0">
+            <a:pPr marL="0" indent="0">
               <a:spcAft>
                 <a:spcPts val="800"/>
               </a:spcAft>
@@ -3568,12 +3240,45 @@
                 <a:ea typeface="Calibri" pitchFamily="34" charset="-122"/>
                 <a:cs typeface="Calibri" pitchFamily="34" charset="-120"/>
               </a:rPr>
-              <a:t>MySQL 8.0 InnoDB relational</a:t>
+              <a:t>MySQL 8.0 </a:t>
+            </a:r>
+            <a:r>
+              <a:rPr lang="en-US" sz="1300" dirty="0" err="1">
+                <a:solidFill>
+                  <a:srgbClr val="0F172A"/>
+                </a:solidFill>
+                <a:latin typeface="Calibri" pitchFamily="34" charset="0"/>
+                <a:ea typeface="Calibri" pitchFamily="34" charset="-122"/>
+                <a:cs typeface="Calibri" pitchFamily="34" charset="-120"/>
+              </a:rPr>
+              <a:t>InnoDB</a:t>
+            </a:r>
+            <a:r>
+              <a:rPr lang="en-US" sz="1300" dirty="0">
+                <a:solidFill>
+                  <a:srgbClr val="0F172A"/>
+                </a:solidFill>
+                <a:latin typeface="Calibri" pitchFamily="34" charset="0"/>
+                <a:ea typeface="Calibri" pitchFamily="34" charset="-122"/>
+                <a:cs typeface="Calibri" pitchFamily="34" charset="-120"/>
+              </a:rPr>
+              <a:t> </a:t>
+            </a:r>
+            <a:r>
+              <a:rPr lang="en-US" sz="1300" dirty="0" err="1">
+                <a:solidFill>
+                  <a:srgbClr val="0F172A"/>
+                </a:solidFill>
+                <a:latin typeface="Calibri" pitchFamily="34" charset="0"/>
+                <a:ea typeface="Calibri" pitchFamily="34" charset="-122"/>
+                <a:cs typeface="Calibri" pitchFamily="34" charset="-120"/>
+              </a:rPr>
+              <a:t>relațional</a:t>
             </a:r>
             <a:endParaRPr lang="en-US" sz="1300" dirty="0"/>
           </a:p>
           <a:p>
-            <a:pPr indent="0" marL="0">
+            <a:pPr marL="0" indent="0">
               <a:spcAft>
                 <a:spcPts val="800"/>
               </a:spcAft>
@@ -3593,7 +3298,7 @@
             <a:endParaRPr lang="en-US" sz="1300" dirty="0"/>
           </a:p>
           <a:p>
-            <a:pPr indent="0" marL="0">
+            <a:pPr marL="0" indent="0">
               <a:spcAft>
                 <a:spcPts val="800"/>
               </a:spcAft>
@@ -3638,7 +3343,7 @@
             <a:prstDash val="solid"/>
           </a:ln>
           <a:effectLst>
-            <a:outerShdw sx="100000" sy="100000" kx="0" ky="0" algn="bl" rotWithShape="0" blurRad="127000" dist="38100" dir="5400000">
+            <a:outerShdw blurRad="127000" dist="38100" dir="5400000" algn="bl" rotWithShape="0">
               <a:srgbClr val="000000">
                 <a:alpha val="8000"/>
               </a:srgbClr>
@@ -3687,7 +3392,7 @@
           <a:bodyPr wrap="square" lIns="0" tIns="0" rIns="0" bIns="0" rtlCol="0" anchor="ctr"/>
           <a:lstStyle/>
           <a:p>
-            <a:pPr indent="0" marL="0">
+            <a:pPr marL="0" indent="0">
               <a:buNone/>
             </a:pPr>
             <a:r>
@@ -3726,7 +3431,7 @@
           <a:bodyPr wrap="square" rtlCol="0" anchor="t"/>
           <a:lstStyle/>
           <a:p>
-            <a:pPr indent="0" marL="0">
+            <a:pPr marL="0" indent="0">
               <a:spcAft>
                 <a:spcPts val="800"/>
               </a:spcAft>
@@ -3746,7 +3451,7 @@
             <a:endParaRPr lang="en-US" sz="1300" dirty="0"/>
           </a:p>
           <a:p>
-            <a:pPr indent="0" marL="0">
+            <a:pPr marL="0" indent="0">
               <a:spcAft>
                 <a:spcPts val="800"/>
               </a:spcAft>
@@ -3766,7 +3471,7 @@
             <a:endParaRPr lang="en-US" sz="1300" dirty="0"/>
           </a:p>
           <a:p>
-            <a:pPr indent="0" marL="0">
+            <a:pPr marL="0" indent="0">
               <a:spcAft>
                 <a:spcPts val="800"/>
               </a:spcAft>
@@ -3786,13 +3491,24 @@
             <a:endParaRPr lang="en-US" sz="1300" dirty="0"/>
           </a:p>
           <a:p>
-            <a:pPr indent="0" marL="0">
+            <a:pPr marL="0" indent="0">
               <a:spcAft>
                 <a:spcPts val="800"/>
               </a:spcAft>
               <a:buNone/>
             </a:pPr>
             <a:r>
+              <a:rPr lang="en-US" sz="1300" dirty="0" err="1">
+                <a:solidFill>
+                  <a:srgbClr val="0F172A"/>
+                </a:solidFill>
+                <a:latin typeface="Calibri" pitchFamily="34" charset="0"/>
+                <a:ea typeface="Calibri" pitchFamily="34" charset="-122"/>
+                <a:cs typeface="Calibri" pitchFamily="34" charset="-120"/>
+              </a:rPr>
+              <a:t>Interfață</a:t>
+            </a:r>
+            <a:r>
               <a:rPr lang="en-US" sz="1300" dirty="0">
                 <a:solidFill>
                   <a:srgbClr val="0F172A"/>
@@ -3801,7 +3517,7 @@
                 <a:ea typeface="Calibri" pitchFamily="34" charset="-122"/>
                 <a:cs typeface="Calibri" pitchFamily="34" charset="-120"/>
               </a:rPr>
-              <a:t>PWA + Service Worker</a:t>
+              <a:t> responsive light/dark</a:t>
             </a:r>
             <a:endParaRPr lang="en-US" sz="1300" dirty="0"/>
           </a:p>
@@ -3831,7 +3547,7 @@
             <a:prstDash val="solid"/>
           </a:ln>
           <a:effectLst>
-            <a:outerShdw sx="100000" sy="100000" kx="0" ky="0" algn="bl" rotWithShape="0" blurRad="127000" dist="38100" dir="5400000">
+            <a:outerShdw blurRad="127000" dist="38100" dir="5400000" algn="bl" rotWithShape="0">
               <a:srgbClr val="000000">
                 <a:alpha val="8000"/>
               </a:srgbClr>
@@ -3880,7 +3596,7 @@
           <a:bodyPr wrap="square" lIns="0" tIns="0" rIns="0" bIns="0" rtlCol="0" anchor="ctr"/>
           <a:lstStyle/>
           <a:p>
-            <a:pPr indent="0" marL="0">
+            <a:pPr marL="0" indent="0">
               <a:buNone/>
             </a:pPr>
             <a:r>
@@ -3919,14 +3635,14 @@
           <a:bodyPr wrap="square" rtlCol="0" anchor="t"/>
           <a:lstStyle/>
           <a:p>
-            <a:pPr indent="0" marL="0">
+            <a:pPr marL="0" indent="0">
               <a:spcAft>
                 <a:spcPts val="800"/>
               </a:spcAft>
               <a:buNone/>
             </a:pPr>
             <a:r>
-              <a:rPr lang="en-US" sz="1300" dirty="0">
+              <a:rPr lang="en-US" sz="1300">
                 <a:solidFill>
                   <a:srgbClr val="0F172A"/>
                 </a:solidFill>
@@ -3934,12 +3650,12 @@
                 <a:ea typeface="Calibri" pitchFamily="34" charset="-122"/>
                 <a:cs typeface="Calibri" pitchFamily="34" charset="-120"/>
               </a:rPr>
-              <a:t>Groq Cloud (latente sub 1s)</a:t>
+              <a:t>Groq Cloud (latențe sub 1s)</a:t>
             </a:r>
             <a:endParaRPr lang="en-US" sz="1300" dirty="0"/>
           </a:p>
           <a:p>
-            <a:pPr indent="0" marL="0">
+            <a:pPr marL="0" indent="0">
               <a:spcAft>
                 <a:spcPts val="800"/>
               </a:spcAft>
@@ -3959,7 +3675,7 @@
             <a:endParaRPr lang="en-US" sz="1300" dirty="0"/>
           </a:p>
           <a:p>
-            <a:pPr indent="0" marL="0">
+            <a:pPr marL="0" indent="0">
               <a:spcAft>
                 <a:spcPts val="800"/>
               </a:spcAft>
@@ -3979,14 +3695,14 @@
             <a:endParaRPr lang="en-US" sz="1300" dirty="0"/>
           </a:p>
           <a:p>
-            <a:pPr indent="0" marL="0">
+            <a:pPr marL="0" indent="0">
               <a:spcAft>
                 <a:spcPts val="800"/>
               </a:spcAft>
               <a:buNone/>
             </a:pPr>
             <a:r>
-              <a:rPr lang="en-US" sz="1300" dirty="0">
+              <a:rPr lang="en-US" sz="1300">
                 <a:solidFill>
                   <a:srgbClr val="0F172A"/>
                 </a:solidFill>
@@ -3994,7 +3710,7 @@
                 <a:ea typeface="Calibri" pitchFamily="34" charset="-122"/>
                 <a:cs typeface="Calibri" pitchFamily="34" charset="-120"/>
               </a:rPr>
-              <a:t>Rate-limiting diferentiat</a:t>
+              <a:t>Rate-limiting diferențiat</a:t>
             </a:r>
             <a:endParaRPr lang="en-US" sz="1300" dirty="0"/>
           </a:p>
@@ -4024,7 +3740,7 @@
             <a:prstDash val="solid"/>
           </a:ln>
           <a:effectLst>
-            <a:outerShdw sx="100000" sy="100000" kx="0" ky="0" algn="bl" rotWithShape="0" blurRad="127000" dist="38100" dir="5400000">
+            <a:outerShdw blurRad="127000" dist="38100" dir="5400000" algn="bl" rotWithShape="0">
               <a:srgbClr val="000000">
                 <a:alpha val="8000"/>
               </a:srgbClr>
@@ -4073,11 +3789,11 @@
           <a:bodyPr wrap="square" lIns="0" tIns="0" rIns="0" bIns="0" rtlCol="0" anchor="ctr"/>
           <a:lstStyle/>
           <a:p>
-            <a:pPr indent="0" marL="0">
-              <a:buNone/>
-            </a:pPr>
-            <a:r>
-              <a:rPr lang="en-US" sz="1600" b="1" dirty="0">
+            <a:pPr marL="0" indent="0">
+              <a:buNone/>
+            </a:pPr>
+            <a:r>
+              <a:rPr lang="en-US" sz="1600" b="1">
                 <a:solidFill>
                   <a:srgbClr val="FFFFFF"/>
                 </a:solidFill>
@@ -4085,7 +3801,7 @@
                 <a:ea typeface="Calibri" pitchFamily="34" charset="-122"/>
                 <a:cs typeface="Calibri" pitchFamily="34" charset="-120"/>
               </a:rPr>
-              <a:t>Securitate &amp; QA</a:t>
+              <a:t>Securitate pe scurt</a:t>
             </a:r>
             <a:endParaRPr lang="en-US" sz="1600" dirty="0"/>
           </a:p>
@@ -4112,7 +3828,7 @@
           <a:bodyPr wrap="square" rtlCol="0" anchor="t"/>
           <a:lstStyle/>
           <a:p>
-            <a:pPr indent="0" marL="0">
+            <a:pPr marL="0" indent="0">
               <a:spcAft>
                 <a:spcPts val="800"/>
               </a:spcAft>
@@ -4127,12 +3843,45 @@
                 <a:ea typeface="Calibri" pitchFamily="34" charset="-122"/>
                 <a:cs typeface="Calibri" pitchFamily="34" charset="-120"/>
               </a:rPr>
-              <a:t>CSP cu nonce, CSRF, prepared</a:t>
+              <a:t>CSRF, XSS </a:t>
+            </a:r>
+            <a:r>
+              <a:rPr lang="en-US" sz="1300" dirty="0" err="1">
+                <a:solidFill>
+                  <a:srgbClr val="0F172A"/>
+                </a:solidFill>
+                <a:latin typeface="Calibri" pitchFamily="34" charset="0"/>
+                <a:ea typeface="Calibri" pitchFamily="34" charset="-122"/>
+                <a:cs typeface="Calibri" pitchFamily="34" charset="-120"/>
+              </a:rPr>
+              <a:t>și</a:t>
+            </a:r>
+            <a:r>
+              <a:rPr lang="en-US" sz="1300" dirty="0">
+                <a:solidFill>
+                  <a:srgbClr val="0F172A"/>
+                </a:solidFill>
+                <a:latin typeface="Calibri" pitchFamily="34" charset="0"/>
+                <a:ea typeface="Calibri" pitchFamily="34" charset="-122"/>
+                <a:cs typeface="Calibri" pitchFamily="34" charset="-120"/>
+              </a:rPr>
+              <a:t> SQL Injection </a:t>
+            </a:r>
+            <a:r>
+              <a:rPr lang="en-US" sz="1300" dirty="0" err="1">
+                <a:solidFill>
+                  <a:srgbClr val="0F172A"/>
+                </a:solidFill>
+                <a:latin typeface="Calibri" pitchFamily="34" charset="0"/>
+                <a:ea typeface="Calibri" pitchFamily="34" charset="-122"/>
+                <a:cs typeface="Calibri" pitchFamily="34" charset="-120"/>
+              </a:rPr>
+              <a:t>blocate</a:t>
             </a:r>
             <a:endParaRPr lang="en-US" sz="1300" dirty="0"/>
           </a:p>
           <a:p>
-            <a:pPr indent="0" marL="0">
+            <a:pPr marL="0" indent="0">
               <a:spcAft>
                 <a:spcPts val="800"/>
               </a:spcAft>
@@ -4147,17 +3896,19 @@
                 <a:ea typeface="Calibri" pitchFamily="34" charset="-122"/>
                 <a:cs typeface="Calibri" pitchFamily="34" charset="-120"/>
               </a:rPr>
-              <a:t>PHPUnit + PHPStan + GitHub CI</a:t>
-            </a:r>
-            <a:endParaRPr lang="en-US" sz="1300" dirty="0"/>
-          </a:p>
-          <a:p>
-            <a:pPr indent="0" marL="0">
-              <a:spcAft>
-                <a:spcPts val="800"/>
-              </a:spcAft>
-              <a:buNone/>
-            </a:pPr>
+              <a:t>Parole </a:t>
+            </a:r>
+            <a:r>
+              <a:rPr lang="en-US" sz="1300" dirty="0" err="1">
+                <a:solidFill>
+                  <a:srgbClr val="0F172A"/>
+                </a:solidFill>
+                <a:latin typeface="Calibri" pitchFamily="34" charset="0"/>
+                <a:ea typeface="Calibri" pitchFamily="34" charset="-122"/>
+                <a:cs typeface="Calibri" pitchFamily="34" charset="-120"/>
+              </a:rPr>
+              <a:t>protejate</a:t>
+            </a:r>
             <a:r>
               <a:rPr lang="en-US" sz="1300" dirty="0">
                 <a:solidFill>
@@ -4167,19 +3918,10 @@
                 <a:ea typeface="Calibri" pitchFamily="34" charset="-122"/>
                 <a:cs typeface="Calibri" pitchFamily="34" charset="-120"/>
               </a:rPr>
-              <a:t>Audit log admin actions</a:t>
-            </a:r>
-            <a:endParaRPr lang="en-US" sz="1300" dirty="0"/>
-          </a:p>
-          <a:p>
-            <a:pPr indent="0" marL="0">
-              <a:spcAft>
-                <a:spcPts val="800"/>
-              </a:spcAft>
-              <a:buNone/>
-            </a:pPr>
-            <a:r>
-              <a:rPr lang="en-US" sz="1300" dirty="0">
+              <a:t> cu </a:t>
+            </a:r>
+            <a:r>
+              <a:rPr lang="en-US" sz="1300" dirty="0" err="1">
                 <a:solidFill>
                   <a:srgbClr val="0F172A"/>
                 </a:solidFill>
@@ -4187,7 +3929,7 @@
                 <a:ea typeface="Calibri" pitchFamily="34" charset="-122"/>
                 <a:cs typeface="Calibri" pitchFamily="34" charset="-120"/>
               </a:rPr>
-              <a:t>bcrypt + SHA-256 tokens</a:t>
+              <a:t>bcrypt</a:t>
             </a:r>
             <a:endParaRPr lang="en-US" sz="1300" dirty="0"/>
           </a:p>
@@ -4214,7 +3956,7 @@
           <a:bodyPr wrap="square" lIns="0" tIns="0" rIns="0" bIns="0" rtlCol="0" anchor="ctr"/>
           <a:lstStyle/>
           <a:p>
-            <a:pPr indent="0" marL="0">
+            <a:pPr marL="0" indent="0">
               <a:buNone/>
             </a:pPr>
             <a:r>
@@ -4253,7 +3995,7 @@
           <a:bodyPr wrap="square" lIns="0" tIns="0" rIns="0" bIns="0" rtlCol="0" anchor="ctr"/>
           <a:lstStyle/>
           <a:p>
-            <a:pPr algn="r" indent="0" marL="0">
+            <a:pPr marL="0" indent="0" algn="r">
               <a:buNone/>
             </a:pPr>
             <a:r>
@@ -4287,6 +4029,7 @@
         <a:solidFill>
           <a:srgbClr val="F8F9FB"/>
         </a:solidFill>
+        <a:effectLst/>
       </p:bgPr>
     </p:bg>
     <p:spTree>
@@ -4344,11 +4087,11 @@
           <a:bodyPr wrap="square" lIns="0" tIns="0" rIns="0" bIns="0" rtlCol="0" anchor="ctr"/>
           <a:lstStyle/>
           <a:p>
-            <a:pPr indent="0" marL="0">
-              <a:buNone/>
-            </a:pPr>
-            <a:r>
-              <a:rPr lang="en-US" sz="1100" b="1" spc="400" kern="0" dirty="0">
+            <a:pPr marL="0" indent="0">
+              <a:buNone/>
+            </a:pPr>
+            <a:r>
+              <a:rPr lang="en-US" sz="1100" b="1" kern="0" spc="400">
                 <a:solidFill>
                   <a:srgbClr val="6E56CF"/>
                 </a:solidFill>
@@ -4356,7 +4099,7 @@
                 <a:ea typeface="Calibri" pitchFamily="34" charset="-122"/>
                 <a:cs typeface="Calibri" pitchFamily="34" charset="-120"/>
               </a:rPr>
-              <a:t>03 · INIMA APLICATIEI</a:t>
+              <a:t>03 · INIMA APLICAȚIEI</a:t>
             </a:r>
             <a:endParaRPr lang="en-US" sz="1100" dirty="0"/>
           </a:p>
@@ -4383,7 +4126,7 @@
           <a:bodyPr wrap="square" lIns="0" tIns="0" rIns="0" bIns="0" rtlCol="0" anchor="ctr"/>
           <a:lstStyle/>
           <a:p>
-            <a:pPr indent="0" marL="0">
+            <a:pPr marL="0" indent="0">
               <a:buNone/>
             </a:pPr>
             <a:r>
@@ -4422,11 +4165,11 @@
           <a:bodyPr wrap="square" lIns="0" tIns="0" rIns="0" bIns="0" rtlCol="0" anchor="ctr"/>
           <a:lstStyle/>
           <a:p>
-            <a:pPr indent="0" marL="0">
-              <a:buNone/>
-            </a:pPr>
-            <a:r>
-              <a:rPr lang="en-US" sz="1800" b="1" dirty="0">
+            <a:pPr marL="0" indent="0">
+              <a:buNone/>
+            </a:pPr>
+            <a:r>
+              <a:rPr lang="en-US" sz="1800" b="1">
                 <a:solidFill>
                   <a:srgbClr val="6E56CF"/>
                 </a:solidFill>
@@ -4434,7 +4177,7 @@
                 <a:ea typeface="Calibri" pitchFamily="34" charset="-122"/>
                 <a:cs typeface="Calibri" pitchFamily="34" charset="-120"/>
               </a:rPr>
-              <a:t>Cum functioneaza</a:t>
+              <a:t>Ce se întâmplă când apeși Start</a:t>
             </a:r>
             <a:endParaRPr lang="en-US" sz="1800" dirty="0"/>
           </a:p>
@@ -4481,7 +4224,7 @@
           <a:bodyPr wrap="square" lIns="0" tIns="0" rIns="0" bIns="0" rtlCol="0" anchor="ctr"/>
           <a:lstStyle/>
           <a:p>
-            <a:pPr algn="ctr" indent="0" marL="0">
+            <a:pPr marL="0" indent="0" algn="ctr">
               <a:buNone/>
             </a:pPr>
             <a:r>
@@ -4520,11 +4263,11 @@
           <a:bodyPr wrap="square" lIns="0" tIns="0" rIns="0" bIns="0" rtlCol="0" anchor="ctr"/>
           <a:lstStyle/>
           <a:p>
-            <a:pPr indent="0" marL="0">
-              <a:buNone/>
-            </a:pPr>
-            <a:r>
-              <a:rPr lang="en-US" sz="1200" dirty="0">
+            <a:pPr marL="0" indent="0">
+              <a:buNone/>
+            </a:pPr>
+            <a:r>
+              <a:rPr lang="it-IT" sz="1200">
                 <a:solidFill>
                   <a:srgbClr val="0F172A"/>
                 </a:solidFill>
@@ -4532,7 +4275,7 @@
                 <a:ea typeface="Calibri" pitchFamily="34" charset="-122"/>
                 <a:cs typeface="Calibri" pitchFamily="34" charset="-120"/>
               </a:rPr>
-              <a:t>Detecteaza data-algorithm si instantiaza clasa SortingVisualizer</a:t>
+              <a:t>Citește algoritmul ales în pagină</a:t>
             </a:r>
             <a:endParaRPr lang="en-US" sz="1200" dirty="0"/>
           </a:p>
@@ -4579,7 +4322,7 @@
           <a:bodyPr wrap="square" lIns="0" tIns="0" rIns="0" bIns="0" rtlCol="0" anchor="ctr"/>
           <a:lstStyle/>
           <a:p>
-            <a:pPr algn="ctr" indent="0" marL="0">
+            <a:pPr marL="0" indent="0" algn="ctr">
               <a:buNone/>
             </a:pPr>
             <a:r>
@@ -4618,11 +4361,11 @@
           <a:bodyPr wrap="square" lIns="0" tIns="0" rIns="0" bIns="0" rtlCol="0" anchor="ctr"/>
           <a:lstStyle/>
           <a:p>
-            <a:pPr indent="0" marL="0">
-              <a:buNone/>
-            </a:pPr>
-            <a:r>
-              <a:rPr lang="en-US" sz="1200" dirty="0">
+            <a:pPr marL="0" indent="0">
+              <a:buNone/>
+            </a:pPr>
+            <a:r>
+              <a:rPr lang="en-US" sz="1200">
                 <a:solidFill>
                   <a:srgbClr val="0F172A"/>
                 </a:solidFill>
@@ -4630,7 +4373,7 @@
                 <a:ea typeface="Calibri" pitchFamily="34" charset="-122"/>
                 <a:cs typeface="Calibri" pitchFamily="34" charset="-120"/>
               </a:rPr>
-              <a:t>Executa algoritmul instrumentat (eveniment la fiecare comparatie/swap)</a:t>
+              <a:t>Generează vectorul și îl desenează ca bare</a:t>
             </a:r>
             <a:endParaRPr lang="en-US" sz="1200" dirty="0"/>
           </a:p>
@@ -4677,7 +4420,7 @@
           <a:bodyPr wrap="square" lIns="0" tIns="0" rIns="0" bIns="0" rtlCol="0" anchor="ctr"/>
           <a:lstStyle/>
           <a:p>
-            <a:pPr algn="ctr" indent="0" marL="0">
+            <a:pPr marL="0" indent="0" algn="ctr">
               <a:buNone/>
             </a:pPr>
             <a:r>
@@ -4716,11 +4459,11 @@
           <a:bodyPr wrap="square" lIns="0" tIns="0" rIns="0" bIns="0" rtlCol="0" anchor="ctr"/>
           <a:lstStyle/>
           <a:p>
-            <a:pPr indent="0" marL="0">
-              <a:buNone/>
-            </a:pPr>
-            <a:r>
-              <a:rPr lang="en-US" sz="1200" dirty="0">
+            <a:pPr marL="0" indent="0">
+              <a:buNone/>
+            </a:pPr>
+            <a:r>
+              <a:rPr lang="en-US" sz="1200">
                 <a:solidFill>
                   <a:srgbClr val="0F172A"/>
                 </a:solidFill>
@@ -4728,7 +4471,7 @@
                 <a:ea typeface="Calibri" pitchFamily="34" charset="-122"/>
                 <a:cs typeface="Calibri" pitchFamily="34" charset="-120"/>
               </a:rPr>
-              <a:t>Deseneaza pe Canvas la 60 fps cu requestAnimationFrame</a:t>
+              <a:t>Rulează pașii: comparații, schimbări și partiționări</a:t>
             </a:r>
             <a:endParaRPr lang="en-US" sz="1200" dirty="0"/>
           </a:p>
@@ -4775,7 +4518,7 @@
           <a:bodyPr wrap="square" lIns="0" tIns="0" rIns="0" bIns="0" rtlCol="0" anchor="ctr"/>
           <a:lstStyle/>
           <a:p>
-            <a:pPr algn="ctr" indent="0" marL="0">
+            <a:pPr marL="0" indent="0" algn="ctr">
               <a:buNone/>
             </a:pPr>
             <a:r>
@@ -4814,11 +4557,11 @@
           <a:bodyPr wrap="square" lIns="0" tIns="0" rIns="0" bIns="0" rtlCol="0" anchor="ctr"/>
           <a:lstStyle/>
           <a:p>
-            <a:pPr indent="0" marL="0">
-              <a:buNone/>
-            </a:pPr>
-            <a:r>
-              <a:rPr lang="en-US" sz="1200" dirty="0">
+            <a:pPr marL="0" indent="0">
+              <a:buNone/>
+            </a:pPr>
+            <a:r>
+              <a:rPr lang="en-US" sz="1200">
                 <a:solidFill>
                   <a:srgbClr val="0F172A"/>
                 </a:solidFill>
@@ -4826,7 +4569,7 @@
                 <a:ea typeface="Calibri" pitchFamily="34" charset="-122"/>
                 <a:cs typeface="Calibri" pitchFamily="34" charset="-120"/>
               </a:rPr>
-              <a:t>Evidentiaza linia de pseudocod activa (highlightCodeLine)</a:t>
+              <a:t>Sincronizează pseudocodul, variabilele și contoarele</a:t>
             </a:r>
             <a:endParaRPr lang="en-US" sz="1200" dirty="0"/>
           </a:p>
@@ -4873,7 +4616,7 @@
           <a:bodyPr wrap="square" lIns="0" tIns="0" rIns="0" bIns="0" rtlCol="0" anchor="ctr"/>
           <a:lstStyle/>
           <a:p>
-            <a:pPr algn="ctr" indent="0" marL="0">
+            <a:pPr marL="0" indent="0" algn="ctr">
               <a:buNone/>
             </a:pPr>
             <a:r>
@@ -4912,11 +4655,11 @@
           <a:bodyPr wrap="square" lIns="0" tIns="0" rIns="0" bIns="0" rtlCol="0" anchor="ctr"/>
           <a:lstStyle/>
           <a:p>
-            <a:pPr indent="0" marL="0">
-              <a:buNone/>
-            </a:pPr>
-            <a:r>
-              <a:rPr lang="en-US" sz="1200" dirty="0">
+            <a:pPr marL="0" indent="0">
+              <a:buNone/>
+            </a:pPr>
+            <a:r>
+              <a:rPr lang="en-US" sz="1200">
                 <a:solidFill>
                   <a:srgbClr val="0F172A"/>
                 </a:solidFill>
@@ -4924,7 +4667,7 @@
                 <a:ea typeface="Calibri" pitchFamily="34" charset="-122"/>
                 <a:cs typeface="Calibri" pitchFamily="34" charset="-120"/>
               </a:rPr>
-              <a:t>Genereaza tonuri audio cu Web Audio API (cu prefers-reduced-motion)</a:t>
+              <a:t>Oferă feedback vizual și audio, cu opțiuni de accesibilitate</a:t>
             </a:r>
             <a:endParaRPr lang="en-US" sz="1200" dirty="0"/>
           </a:p>
@@ -4949,7 +4692,7 @@
           </a:solidFill>
           <a:ln/>
           <a:effectLst>
-            <a:outerShdw sx="100000" sy="100000" kx="0" ky="0" algn="bl" rotWithShape="0" blurRad="152400" dist="50800" dir="5400000">
+            <a:outerShdw blurRad="152400" dist="50800" dir="5400000" algn="bl" rotWithShape="0">
               <a:srgbClr val="000000">
                 <a:alpha val="15000"/>
               </a:srgbClr>
@@ -4978,7 +4721,7 @@
           <a:bodyPr wrap="square" lIns="0" tIns="0" rIns="0" bIns="0" rtlCol="0" anchor="ctr"/>
           <a:lstStyle/>
           <a:p>
-            <a:pPr indent="0" marL="0">
+            <a:pPr marL="0" indent="0">
               <a:buNone/>
             </a:pPr>
             <a:r>
@@ -5437,7 +5180,7 @@
           <a:bodyPr wrap="square" lIns="0" tIns="0" rIns="0" bIns="0" rtlCol="0" anchor="ctr"/>
           <a:lstStyle/>
           <a:p>
-            <a:pPr indent="0" marL="0">
+            <a:pPr marL="0" indent="0">
               <a:buNone/>
             </a:pPr>
             <a:r>
@@ -5496,11 +5239,11 @@
           <a:bodyPr wrap="square" lIns="0" tIns="0" rIns="0" bIns="0" rtlCol="0" anchor="ctr"/>
           <a:lstStyle/>
           <a:p>
-            <a:pPr indent="0" marL="0">
-              <a:buNone/>
-            </a:pPr>
-            <a:r>
-              <a:rPr lang="en-US" sz="1000" dirty="0">
+            <a:pPr marL="0" indent="0">
+              <a:buNone/>
+            </a:pPr>
+            <a:r>
+              <a:rPr lang="en-US" sz="1000">
                 <a:solidFill>
                   <a:srgbClr val="E5E7EB"/>
                 </a:solidFill>
@@ -5508,7 +5251,7 @@
                 <a:ea typeface="Calibri" pitchFamily="34" charset="-122"/>
                 <a:cs typeface="Calibri" pitchFamily="34" charset="-120"/>
               </a:rPr>
-              <a:t>comparatie</a:t>
+              <a:t>comparație</a:t>
             </a:r>
             <a:endParaRPr lang="en-US" sz="1000" dirty="0"/>
           </a:p>
@@ -5555,7 +5298,7 @@
           <a:bodyPr wrap="square" lIns="0" tIns="0" rIns="0" bIns="0" rtlCol="0" anchor="ctr"/>
           <a:lstStyle/>
           <a:p>
-            <a:pPr indent="0" marL="0">
+            <a:pPr marL="0" indent="0">
               <a:buNone/>
             </a:pPr>
             <a:r>
@@ -5594,7 +5337,7 @@
           <a:bodyPr wrap="square" lIns="0" tIns="0" rIns="0" bIns="0" rtlCol="0" anchor="ctr"/>
           <a:lstStyle/>
           <a:p>
-            <a:pPr indent="0" marL="0">
+            <a:pPr marL="0" indent="0">
               <a:buNone/>
             </a:pPr>
             <a:r>
@@ -5633,7 +5376,7 @@
           <a:bodyPr wrap="square" lIns="0" tIns="0" rIns="0" bIns="0" rtlCol="0" anchor="ctr"/>
           <a:lstStyle/>
           <a:p>
-            <a:pPr algn="r" indent="0" marL="0">
+            <a:pPr marL="0" indent="0" algn="r">
               <a:buNone/>
             </a:pPr>
             <a:r>
@@ -5667,6 +5410,7 @@
         <a:solidFill>
           <a:srgbClr val="F8F9FB"/>
         </a:solidFill>
+        <a:effectLst/>
       </p:bgPr>
     </p:bg>
     <p:spTree>
@@ -5724,11 +5468,11 @@
           <a:bodyPr wrap="square" lIns="0" tIns="0" rIns="0" bIns="0" rtlCol="0" anchor="ctr"/>
           <a:lstStyle/>
           <a:p>
-            <a:pPr indent="0" marL="0">
-              <a:buNone/>
-            </a:pPr>
-            <a:r>
-              <a:rPr lang="en-US" sz="1100" b="1" spc="400" kern="0" dirty="0">
+            <a:pPr marL="0" indent="0">
+              <a:buNone/>
+            </a:pPr>
+            <a:r>
+              <a:rPr lang="en-US" sz="1100" b="1" kern="0" spc="400">
                 <a:solidFill>
                   <a:srgbClr val="6E56CF"/>
                 </a:solidFill>
@@ -5736,7 +5480,7 @@
                 <a:ea typeface="Calibri" pitchFamily="34" charset="-122"/>
                 <a:cs typeface="Calibri" pitchFamily="34" charset="-120"/>
               </a:rPr>
-              <a:t>04 · INTELIGENTA ARTIFICIALA</a:t>
+              <a:t>04 · INTELIGENȚĂ ARTIFICIALĂ</a:t>
             </a:r>
             <a:endParaRPr lang="en-US" sz="1100" dirty="0"/>
           </a:p>
@@ -5763,11 +5507,11 @@
           <a:bodyPr wrap="square" lIns="0" tIns="0" rIns="0" bIns="0" rtlCol="0" anchor="ctr"/>
           <a:lstStyle/>
           <a:p>
-            <a:pPr indent="0" marL="0">
-              <a:buNone/>
-            </a:pPr>
-            <a:r>
-              <a:rPr lang="en-US" sz="3600" b="1" dirty="0">
+            <a:pPr marL="0" indent="0">
+              <a:buNone/>
+            </a:pPr>
+            <a:r>
+              <a:rPr lang="en-US" sz="3600" b="1">
                 <a:solidFill>
                   <a:srgbClr val="0F172A"/>
                 </a:solidFill>
@@ -5775,7 +5519,7 @@
                 <a:ea typeface="Calibri" pitchFamily="34" charset="-122"/>
                 <a:cs typeface="Calibri" pitchFamily="34" charset="-120"/>
               </a:rPr>
-              <a:t>Groq + Llama 3.3 - trei integrari</a:t>
+              <a:t>Groq + Llama 3.3 - trei integrări</a:t>
             </a:r>
             <a:endParaRPr lang="en-US" sz="3600" dirty="0"/>
           </a:p>
@@ -5800,7 +5544,7 @@
           </a:solidFill>
           <a:ln/>
           <a:effectLst>
-            <a:outerShdw sx="100000" sy="100000" kx="0" ky="0" algn="bl" rotWithShape="0" blurRad="152400" dist="50800" dir="5400000">
+            <a:outerShdw blurRad="152400" dist="50800" dir="5400000" algn="bl" rotWithShape="0">
               <a:srgbClr val="000000">
                 <a:alpha val="15000"/>
               </a:srgbClr>
@@ -5829,11 +5573,11 @@
           <a:bodyPr wrap="square" lIns="0" tIns="0" rIns="0" bIns="0" rtlCol="0" anchor="ctr"/>
           <a:lstStyle/>
           <a:p>
-            <a:pPr indent="0" marL="0">
-              <a:buNone/>
-            </a:pPr>
-            <a:r>
-              <a:rPr lang="en-US" sz="1100" b="1" spc="400" kern="0" dirty="0">
+            <a:pPr marL="0" indent="0">
+              <a:buNone/>
+            </a:pPr>
+            <a:r>
+              <a:rPr lang="en-US" sz="1100" b="1" kern="0" spc="400" dirty="0">
                 <a:solidFill>
                   <a:srgbClr val="06B6D4"/>
                 </a:solidFill>
@@ -5868,7 +5612,7 @@
           <a:bodyPr wrap="square" lIns="0" tIns="0" rIns="0" bIns="0" rtlCol="0" anchor="ctr"/>
           <a:lstStyle/>
           <a:p>
-            <a:pPr indent="0" marL="0">
+            <a:pPr marL="0" indent="0">
               <a:buNone/>
             </a:pPr>
             <a:r>
@@ -5907,7 +5651,7 @@
           <a:bodyPr wrap="square" lIns="0" tIns="0" rIns="0" bIns="0" rtlCol="0" anchor="ctr"/>
           <a:lstStyle/>
           <a:p>
-            <a:pPr indent="0" marL="0">
+            <a:pPr marL="0" indent="0">
               <a:buNone/>
             </a:pPr>
             <a:r>
@@ -5968,7 +5712,7 @@
           <a:bodyPr wrap="square" lIns="0" tIns="0" rIns="0" bIns="0" rtlCol="0" anchor="ctr"/>
           <a:lstStyle/>
           <a:p>
-            <a:pPr indent="0" marL="0">
+            <a:pPr marL="0" indent="0">
               <a:buNone/>
             </a:pPr>
             <a:r>
@@ -6007,11 +5751,11 @@
           <a:bodyPr wrap="square" lIns="0" tIns="0" rIns="0" bIns="0" rtlCol="0" anchor="ctr"/>
           <a:lstStyle/>
           <a:p>
-            <a:pPr indent="0" marL="0">
-              <a:buNone/>
-            </a:pPr>
-            <a:r>
-              <a:rPr lang="en-US" sz="1200" dirty="0">
+            <a:pPr marL="0" indent="0">
+              <a:buNone/>
+            </a:pPr>
+            <a:r>
+              <a:rPr lang="en-US" sz="1200">
                 <a:solidFill>
                   <a:srgbClr val="E5E7EB"/>
                 </a:solidFill>
@@ -6019,7 +5763,7 @@
                 <a:ea typeface="Calibri" pitchFamily="34" charset="-122"/>
                 <a:cs typeface="Calibri" pitchFamily="34" charset="-120"/>
               </a:rPr>
-              <a:t>Latente sub 1s · tier gratuit · compatibil OpenAI ChatCompletions (migrare facila)</a:t>
+              <a:t>Latențe sub 1s · tier gratuit · compatibil OpenAI ChatCompletions (migrare facilă)</a:t>
             </a:r>
             <a:endParaRPr lang="en-US" sz="1200" dirty="0"/>
           </a:p>
@@ -6091,7 +5835,7 @@
           <a:bodyPr wrap="square" lIns="0" tIns="0" rIns="0" bIns="0" rtlCol="0" anchor="ctr"/>
           <a:lstStyle/>
           <a:p>
-            <a:pPr indent="0" marL="0">
+            <a:pPr marL="0" indent="0">
               <a:buNone/>
             </a:pPr>
             <a:r>
@@ -6130,7 +5874,7 @@
           <a:bodyPr wrap="square" lIns="0" tIns="0" rIns="0" bIns="0" rtlCol="0" anchor="ctr"/>
           <a:lstStyle/>
           <a:p>
-            <a:pPr algn="r" indent="0" marL="0">
+            <a:pPr marL="0" indent="0" algn="r">
               <a:buNone/>
             </a:pPr>
             <a:r>
@@ -6169,7 +5913,7 @@
           <a:bodyPr wrap="square" lIns="0" tIns="0" rIns="0" bIns="0" rtlCol="0" anchor="ctr"/>
           <a:lstStyle/>
           <a:p>
-            <a:pPr indent="0" marL="0">
+            <a:pPr marL="0" indent="0">
               <a:buNone/>
             </a:pPr>
             <a:r>
@@ -6253,7 +5997,7 @@
           <a:bodyPr wrap="square" lIns="0" tIns="0" rIns="0" bIns="0" rtlCol="0" anchor="ctr"/>
           <a:lstStyle/>
           <a:p>
-            <a:pPr indent="0" marL="0">
+            <a:pPr marL="0" indent="0">
               <a:buNone/>
             </a:pPr>
             <a:r>
@@ -6292,7 +6036,7 @@
           <a:bodyPr wrap="square" lIns="0" tIns="0" rIns="0" bIns="0" rtlCol="0" anchor="ctr"/>
           <a:lstStyle/>
           <a:p>
-            <a:pPr algn="r" indent="0" marL="0">
+            <a:pPr marL="0" indent="0" algn="r">
               <a:buNone/>
             </a:pPr>
             <a:r>
@@ -6331,11 +6075,11 @@
           <a:bodyPr wrap="square" lIns="0" tIns="0" rIns="0" bIns="0" rtlCol="0" anchor="ctr"/>
           <a:lstStyle/>
           <a:p>
-            <a:pPr indent="0" marL="0">
-              <a:buNone/>
-            </a:pPr>
-            <a:r>
-              <a:rPr lang="en-US" sz="1300" dirty="0">
+            <a:pPr marL="0" indent="0">
+              <a:buNone/>
+            </a:pPr>
+            <a:r>
+              <a:rPr lang="en-US" sz="1300">
                 <a:solidFill>
                   <a:srgbClr val="64748B"/>
                 </a:solidFill>
@@ -6343,7 +6087,7 @@
                 <a:ea typeface="Calibri" pitchFamily="34" charset="-122"/>
                 <a:cs typeface="Calibri" pitchFamily="34" charset="-120"/>
               </a:rPr>
-              <a:t>10 intrebari dinamice adaptate</a:t>
+              <a:t>10 întrebări dinamice adaptate</a:t>
             </a:r>
             <a:endParaRPr lang="en-US" sz="1300" dirty="0"/>
           </a:p>
@@ -6415,7 +6159,7 @@
           <a:bodyPr wrap="square" lIns="0" tIns="0" rIns="0" bIns="0" rtlCol="0" anchor="ctr"/>
           <a:lstStyle/>
           <a:p>
-            <a:pPr indent="0" marL="0">
+            <a:pPr marL="0" indent="0">
               <a:buNone/>
             </a:pPr>
             <a:r>
@@ -6454,7 +6198,7 @@
           <a:bodyPr wrap="square" lIns="0" tIns="0" rIns="0" bIns="0" rtlCol="0" anchor="ctr"/>
           <a:lstStyle/>
           <a:p>
-            <a:pPr algn="r" indent="0" marL="0">
+            <a:pPr marL="0" indent="0" algn="r">
               <a:buNone/>
             </a:pPr>
             <a:r>
@@ -6493,11 +6237,11 @@
           <a:bodyPr wrap="square" lIns="0" tIns="0" rIns="0" bIns="0" rtlCol="0" anchor="ctr"/>
           <a:lstStyle/>
           <a:p>
-            <a:pPr indent="0" marL="0">
-              <a:buNone/>
-            </a:pPr>
-            <a:r>
-              <a:rPr lang="en-US" sz="1300" dirty="0">
+            <a:pPr marL="0" indent="0">
+              <a:buNone/>
+            </a:pPr>
+            <a:r>
+              <a:rPr lang="en-US" sz="1300">
                 <a:solidFill>
                   <a:srgbClr val="64748B"/>
                 </a:solidFill>
@@ -6505,7 +6249,7 @@
                 <a:ea typeface="Calibri" pitchFamily="34" charset="-122"/>
                 <a:cs typeface="Calibri" pitchFamily="34" charset="-120"/>
               </a:rPr>
-              <a:t>Analiza automata pe codul C++</a:t>
+              <a:t>Analiză automată pe codul C++</a:t>
             </a:r>
             <a:endParaRPr lang="en-US" sz="1300" dirty="0"/>
           </a:p>
@@ -6532,7 +6276,7 @@
           <a:bodyPr wrap="square" lIns="0" tIns="0" rIns="0" bIns="0" rtlCol="0" anchor="ctr"/>
           <a:lstStyle/>
           <a:p>
-            <a:pPr indent="0" marL="0">
+            <a:pPr marL="0" indent="0">
               <a:buNone/>
             </a:pPr>
             <a:r>
@@ -6571,7 +6315,7 @@
           <a:bodyPr wrap="square" lIns="0" tIns="0" rIns="0" bIns="0" rtlCol="0" anchor="ctr"/>
           <a:lstStyle/>
           <a:p>
-            <a:pPr algn="r" indent="0" marL="0">
+            <a:pPr marL="0" indent="0" algn="r">
               <a:buNone/>
             </a:pPr>
             <a:r>
@@ -6605,6 +6349,7 @@
         <a:solidFill>
           <a:srgbClr val="F8F9FB"/>
         </a:solidFill>
+        <a:effectLst/>
       </p:bgPr>
     </p:bg>
     <p:spTree>
@@ -6662,11 +6407,11 @@
           <a:bodyPr wrap="square" lIns="0" tIns="0" rIns="0" bIns="0" rtlCol="0" anchor="ctr"/>
           <a:lstStyle/>
           <a:p>
-            <a:pPr indent="0" marL="0">
-              <a:buNone/>
-            </a:pPr>
-            <a:r>
-              <a:rPr lang="en-US" sz="1100" b="1" spc="400" kern="0" dirty="0">
+            <a:pPr marL="0" indent="0">
+              <a:buNone/>
+            </a:pPr>
+            <a:r>
+              <a:rPr lang="en-US" sz="1100" b="1" kern="0" spc="400">
                 <a:solidFill>
                   <a:srgbClr val="6E56CF"/>
                 </a:solidFill>
@@ -6674,7 +6419,7 @@
                 <a:ea typeface="Calibri" pitchFamily="34" charset="-122"/>
                 <a:cs typeface="Calibri" pitchFamily="34" charset="-120"/>
               </a:rPr>
-              <a:t>05 · DIFERENTIATORI</a:t>
+              <a:t>05 · DIFERENȚIATORI</a:t>
             </a:r>
             <a:endParaRPr lang="en-US" sz="1100" dirty="0"/>
           </a:p>
@@ -6701,7 +6446,7 @@
           <a:bodyPr wrap="square" lIns="0" tIns="0" rIns="0" bIns="0" rtlCol="0" anchor="ctr"/>
           <a:lstStyle/>
           <a:p>
-            <a:pPr indent="0" marL="0">
+            <a:pPr marL="0" indent="0">
               <a:buNone/>
             </a:pPr>
             <a:r>
@@ -6713,7 +6458,18 @@
                 <a:ea typeface="Calibri" pitchFamily="34" charset="-122"/>
                 <a:cs typeface="Calibri" pitchFamily="34" charset="-120"/>
               </a:rPr>
-              <a:t>Ce ne face unici fata de VisuAlgo si altele</a:t>
+              <a:t>Ce avem noi, ce nu </a:t>
+            </a:r>
+            <a:r>
+              <a:rPr lang="en-US" sz="3600" b="1">
+                <a:solidFill>
+                  <a:srgbClr val="0F172A"/>
+                </a:solidFill>
+                <a:latin typeface="Calibri" pitchFamily="34" charset="0"/>
+                <a:ea typeface="Calibri" pitchFamily="34" charset="-122"/>
+                <a:cs typeface="Calibri" pitchFamily="34" charset="-120"/>
+              </a:rPr>
+              <a:t>au alte platforme</a:t>
             </a:r>
             <a:endParaRPr lang="en-US" sz="3600" dirty="0"/>
           </a:p>
@@ -6721,14 +6477,53 @@
       </p:sp>
       <p:sp>
         <p:nvSpPr>
-          <p:cNvPr id="5" name="Shape 3"/>
-          <p:cNvSpPr/>
-          <p:nvPr/>
-        </p:nvSpPr>
-        <p:spPr>
-          <a:xfrm>
-            <a:off x="457200" y="1828800"/>
-            <a:ext cx="11247120" cy="1234440"/>
+          <p:cNvPr id="5" name="Text 3"/>
+          <p:cNvSpPr/>
+          <p:nvPr/>
+        </p:nvSpPr>
+        <p:spPr>
+          <a:xfrm>
+            <a:off x="457200" y="1783080"/>
+            <a:ext cx="11247120" cy="457200"/>
+          </a:xfrm>
+          <a:prstGeom prst="rect">
+            <a:avLst/>
+          </a:prstGeom>
+          <a:noFill/>
+          <a:ln/>
+        </p:spPr>
+        <p:txBody>
+          <a:bodyPr wrap="square" lIns="0" tIns="0" rIns="0" bIns="0" rtlCol="0" anchor="ctr"/>
+          <a:lstStyle/>
+          <a:p>
+            <a:pPr marL="0" indent="0">
+              <a:buNone/>
+            </a:pPr>
+            <a:r>
+              <a:rPr lang="en-US" sz="1400" i="1">
+                <a:solidFill>
+                  <a:srgbClr val="64748B"/>
+                </a:solidFill>
+                <a:latin typeface="Calibri" pitchFamily="34" charset="0"/>
+                <a:ea typeface="Calibri" pitchFamily="34" charset="-122"/>
+                <a:cs typeface="Calibri" pitchFamily="34" charset="-120"/>
+              </a:rPr>
+              <a:t>Funcționalități prezente în OffByOne Academy și absente la VisuAlgo, Algorithm Visualizer, GeeksForGeeks, W3Schools:</a:t>
+            </a:r>
+            <a:endParaRPr lang="en-US" sz="1400" dirty="0"/>
+          </a:p>
+        </p:txBody>
+      </p:sp>
+      <p:sp>
+        <p:nvSpPr>
+          <p:cNvPr id="6" name="Shape 4"/>
+          <p:cNvSpPr/>
+          <p:nvPr/>
+        </p:nvSpPr>
+        <p:spPr>
+          <a:xfrm>
+            <a:off x="388620" y="2423160"/>
+            <a:ext cx="3703320" cy="1828800"/>
           </a:xfrm>
           <a:prstGeom prst="rect">
             <a:avLst/>
@@ -6738,12 +6533,12 @@
           </a:solidFill>
           <a:ln w="12700">
             <a:solidFill>
-              <a:srgbClr val="E2E8F0"/>
+              <a:srgbClr val="10B981"/>
             </a:solidFill>
             <a:prstDash val="solid"/>
           </a:ln>
           <a:effectLst>
-            <a:outerShdw sx="100000" sy="100000" kx="0" ky="0" algn="bl" rotWithShape="0" blurRad="76200" dist="25400" dir="5400000">
+            <a:outerShdw blurRad="76200" dist="25400" dir="5400000" algn="bl" rotWithShape="0">
               <a:srgbClr val="000000">
                 <a:alpha val="5000"/>
               </a:srgbClr>
@@ -6753,62 +6548,23 @@
       </p:sp>
       <p:sp>
         <p:nvSpPr>
-          <p:cNvPr id="6" name="Shape 4"/>
-          <p:cNvSpPr/>
-          <p:nvPr/>
-        </p:nvSpPr>
-        <p:spPr>
-          <a:xfrm>
-            <a:off x="457200" y="1828800"/>
-            <a:ext cx="73152" cy="1234440"/>
-          </a:xfrm>
-          <a:prstGeom prst="rect">
-            <a:avLst/>
-          </a:prstGeom>
-          <a:solidFill>
-            <a:srgbClr val="6E56CF"/>
-          </a:solidFill>
-          <a:ln/>
-        </p:spPr>
-      </p:sp>
-      <p:sp>
-        <p:nvSpPr>
-          <p:cNvPr id="7" name="Text 5"/>
-          <p:cNvSpPr/>
-          <p:nvPr/>
-        </p:nvSpPr>
-        <p:spPr>
-          <a:xfrm>
-            <a:off x="640080" y="1828800"/>
-            <a:ext cx="1280160" cy="1234440"/>
-          </a:xfrm>
-          <a:prstGeom prst="rect">
-            <a:avLst/>
-          </a:prstGeom>
-          <a:noFill/>
-          <a:ln/>
-        </p:spPr>
-        <p:txBody>
-          <a:bodyPr wrap="square" lIns="0" tIns="0" rIns="0" bIns="0" rtlCol="0" anchor="ctr"/>
-          <a:lstStyle/>
-          <a:p>
-            <a:pPr indent="0" marL="0">
-              <a:buNone/>
-            </a:pPr>
-            <a:r>
-              <a:rPr lang="en-US" sz="6400" b="1" dirty="0">
-                <a:solidFill>
-                  <a:srgbClr val="6E56CF"/>
-                </a:solidFill>
-                <a:latin typeface="Calibri" pitchFamily="34" charset="0"/>
-                <a:ea typeface="Calibri" pitchFamily="34" charset="-122"/>
-                <a:cs typeface="Calibri" pitchFamily="34" charset="-120"/>
-              </a:rPr>
-              <a:t>01</a:t>
-            </a:r>
-            <a:endParaRPr lang="en-US" sz="6400" dirty="0"/>
-          </a:p>
-        </p:txBody>
+          <p:cNvPr id="7" name="Shape 5"/>
+          <p:cNvSpPr/>
+          <p:nvPr/>
+        </p:nvSpPr>
+        <p:spPr>
+          <a:xfrm>
+            <a:off x="617220" y="2697480"/>
+            <a:ext cx="640080" cy="640080"/>
+          </a:xfrm>
+          <a:prstGeom prst="ellipse">
+            <a:avLst/>
+          </a:prstGeom>
+          <a:solidFill>
+            <a:srgbClr val="10B981"/>
+          </a:solidFill>
+          <a:ln/>
+        </p:spPr>
       </p:sp>
       <p:sp>
         <p:nvSpPr>
@@ -6818,24 +6574,102 @@
         </p:nvSpPr>
         <p:spPr>
           <a:xfrm>
-            <a:off x="2011680" y="2011680"/>
-            <a:ext cx="4572000" cy="457200"/>
-          </a:xfrm>
-          <a:prstGeom prst="rect">
-            <a:avLst/>
-          </a:prstGeom>
-          <a:noFill/>
-          <a:ln/>
-        </p:spPr>
-        <p:txBody>
-          <a:bodyPr wrap="square" lIns="0" tIns="0" rIns="0" bIns="0" rtlCol="0" anchor="ctr"/>
-          <a:lstStyle/>
-          <a:p>
-            <a:pPr indent="0" marL="0">
-              <a:buNone/>
-            </a:pPr>
-            <a:r>
-              <a:rPr lang="en-US" sz="2000" b="1" dirty="0">
+            <a:off x="617220" y="2697480"/>
+            <a:ext cx="640080" cy="640080"/>
+          </a:xfrm>
+          <a:prstGeom prst="rect">
+            <a:avLst/>
+          </a:prstGeom>
+          <a:noFill/>
+          <a:ln/>
+        </p:spPr>
+        <p:txBody>
+          <a:bodyPr wrap="square" lIns="0" tIns="0" rIns="0" bIns="0" rtlCol="0" anchor="ctr"/>
+          <a:lstStyle/>
+          <a:p>
+            <a:pPr marL="0" indent="0" algn="ctr">
+              <a:buNone/>
+            </a:pPr>
+            <a:r>
+              <a:rPr lang="en-US" sz="1800" b="1" dirty="0">
+                <a:solidFill>
+                  <a:srgbClr val="FFFFFF"/>
+                </a:solidFill>
+                <a:latin typeface="Calibri" pitchFamily="34" charset="0"/>
+                <a:ea typeface="Calibri" pitchFamily="34" charset="-122"/>
+                <a:cs typeface="Calibri" pitchFamily="34" charset="-120"/>
+              </a:rPr>
+              <a:t>AI</a:t>
+            </a:r>
+            <a:endParaRPr lang="en-US" sz="1800" dirty="0"/>
+          </a:p>
+        </p:txBody>
+      </p:sp>
+      <p:sp>
+        <p:nvSpPr>
+          <p:cNvPr id="9" name="Text 7"/>
+          <p:cNvSpPr/>
+          <p:nvPr/>
+        </p:nvSpPr>
+        <p:spPr>
+          <a:xfrm>
+            <a:off x="1348740" y="2697480"/>
+            <a:ext cx="2606040" cy="274320"/>
+          </a:xfrm>
+          <a:prstGeom prst="rect">
+            <a:avLst/>
+          </a:prstGeom>
+          <a:noFill/>
+          <a:ln/>
+        </p:spPr>
+        <p:txBody>
+          <a:bodyPr wrap="square" lIns="0" tIns="0" rIns="0" bIns="0" rtlCol="0" anchor="ctr"/>
+          <a:lstStyle/>
+          <a:p>
+            <a:pPr marL="0" indent="0">
+              <a:buNone/>
+            </a:pPr>
+            <a:r>
+              <a:rPr lang="en-US" sz="1000" b="1" dirty="0">
+                <a:solidFill>
+                  <a:srgbClr val="10B981"/>
+                </a:solidFill>
+                <a:latin typeface="Calibri" pitchFamily="34" charset="0"/>
+                <a:ea typeface="Calibri" pitchFamily="34" charset="-122"/>
+                <a:cs typeface="Calibri" pitchFamily="34" charset="-120"/>
+              </a:rPr>
+              <a:t>✓ Doar la noi</a:t>
+            </a:r>
+            <a:endParaRPr lang="en-US" sz="1000" dirty="0"/>
+          </a:p>
+        </p:txBody>
+      </p:sp>
+      <p:sp>
+        <p:nvSpPr>
+          <p:cNvPr id="10" name="Text 8"/>
+          <p:cNvSpPr/>
+          <p:nvPr/>
+        </p:nvSpPr>
+        <p:spPr>
+          <a:xfrm>
+            <a:off x="1348740" y="2971800"/>
+            <a:ext cx="2606040" cy="365760"/>
+          </a:xfrm>
+          <a:prstGeom prst="rect">
+            <a:avLst/>
+          </a:prstGeom>
+          <a:noFill/>
+          <a:ln/>
+        </p:spPr>
+        <p:txBody>
+          <a:bodyPr wrap="square" lIns="0" tIns="0" rIns="0" bIns="0" rtlCol="0" anchor="ctr"/>
+          <a:lstStyle/>
+          <a:p>
+            <a:pPr marL="0" indent="0">
+              <a:buNone/>
+            </a:pPr>
+            <a:r>
+              <a:rPr lang="en-US" sz="1400" b="1">
                 <a:solidFill>
                   <a:srgbClr val="0F172A"/>
                 </a:solidFill>
@@ -6843,38 +6677,38 @@
                 <a:ea typeface="Calibri" pitchFamily="34" charset="-122"/>
                 <a:cs typeface="Calibri" pitchFamily="34" charset="-120"/>
               </a:rPr>
-              <a:t>AI personalizat</a:t>
-            </a:r>
-            <a:endParaRPr lang="en-US" sz="2000" dirty="0"/>
-          </a:p>
-        </p:txBody>
-      </p:sp>
-      <p:sp>
-        <p:nvSpPr>
-          <p:cNvPr id="9" name="Text 7"/>
-          <p:cNvSpPr/>
-          <p:nvPr/>
-        </p:nvSpPr>
-        <p:spPr>
-          <a:xfrm>
-            <a:off x="2011680" y="2468880"/>
-            <a:ext cx="9418320" cy="548640"/>
-          </a:xfrm>
-          <a:prstGeom prst="rect">
-            <a:avLst/>
-          </a:prstGeom>
-          <a:noFill/>
-          <a:ln/>
-        </p:spPr>
-        <p:txBody>
-          <a:bodyPr wrap="square" lIns="0" tIns="0" rIns="0" bIns="0" rtlCol="0" anchor="ctr"/>
-          <a:lstStyle/>
-          <a:p>
-            <a:pPr indent="0" marL="0">
-              <a:buNone/>
-            </a:pPr>
-            <a:r>
-              <a:rPr lang="en-US" sz="1300" dirty="0">
+              <a:t>Chat AI conversațional</a:t>
+            </a:r>
+            <a:endParaRPr lang="en-US" sz="1400" dirty="0"/>
+          </a:p>
+        </p:txBody>
+      </p:sp>
+      <p:sp>
+        <p:nvSpPr>
+          <p:cNvPr id="11" name="Text 9"/>
+          <p:cNvSpPr/>
+          <p:nvPr/>
+        </p:nvSpPr>
+        <p:spPr>
+          <a:xfrm>
+            <a:off x="617220" y="3474720"/>
+            <a:ext cx="3246120" cy="640080"/>
+          </a:xfrm>
+          <a:prstGeom prst="rect">
+            <a:avLst/>
+          </a:prstGeom>
+          <a:noFill/>
+          <a:ln/>
+        </p:spPr>
+        <p:txBody>
+          <a:bodyPr wrap="square" lIns="0" tIns="0" rIns="0" bIns="0" rtlCol="0" anchor="ctr"/>
+          <a:lstStyle/>
+          <a:p>
+            <a:pPr marL="0" indent="0">
+              <a:buNone/>
+            </a:pPr>
+            <a:r>
+              <a:rPr lang="it-IT" sz="1100">
                 <a:solidFill>
                   <a:srgbClr val="64748B"/>
                 </a:solidFill>
@@ -6882,22 +6716,22 @@
                 <a:ea typeface="Calibri" pitchFamily="34" charset="-122"/>
                 <a:cs typeface="Calibri" pitchFamily="34" charset="-120"/>
               </a:rPr>
-              <a:t>Niciuna dintre platformele comparate (VisuAlgo, Algorithm Visualizer, GeeksForGeeks) nu ofera chat conversational, quiz dinamic si feedback pe cod scris.</a:t>
-            </a:r>
-            <a:endParaRPr lang="en-US" sz="1300" dirty="0"/>
-          </a:p>
-        </p:txBody>
-      </p:sp>
-      <p:sp>
-        <p:nvSpPr>
-          <p:cNvPr id="10" name="Shape 8"/>
-          <p:cNvSpPr/>
-          <p:nvPr/>
-        </p:nvSpPr>
-        <p:spPr>
-          <a:xfrm>
-            <a:off x="457200" y="3246120"/>
-            <a:ext cx="11247120" cy="1234440"/>
+              <a:t>Profesorul AI răspunde în limbaj natural</a:t>
+            </a:r>
+            <a:endParaRPr lang="en-US" sz="1100" dirty="0"/>
+          </a:p>
+        </p:txBody>
+      </p:sp>
+      <p:sp>
+        <p:nvSpPr>
+          <p:cNvPr id="12" name="Shape 10"/>
+          <p:cNvSpPr/>
+          <p:nvPr/>
+        </p:nvSpPr>
+        <p:spPr>
+          <a:xfrm>
+            <a:off x="4229100" y="2423160"/>
+            <a:ext cx="3703320" cy="1828800"/>
           </a:xfrm>
           <a:prstGeom prst="rect">
             <a:avLst/>
@@ -6907,12 +6741,12 @@
           </a:solidFill>
           <a:ln w="12700">
             <a:solidFill>
-              <a:srgbClr val="E2E8F0"/>
+              <a:srgbClr val="10B981"/>
             </a:solidFill>
             <a:prstDash val="solid"/>
           </a:ln>
           <a:effectLst>
-            <a:outerShdw sx="100000" sy="100000" kx="0" ky="0" algn="bl" rotWithShape="0" blurRad="76200" dist="25400" dir="5400000">
+            <a:outerShdw blurRad="76200" dist="25400" dir="5400000" algn="bl" rotWithShape="0">
               <a:srgbClr val="000000">
                 <a:alpha val="5000"/>
               </a:srgbClr>
@@ -6922,89 +6756,128 @@
       </p:sp>
       <p:sp>
         <p:nvSpPr>
-          <p:cNvPr id="11" name="Shape 9"/>
-          <p:cNvSpPr/>
-          <p:nvPr/>
-        </p:nvSpPr>
-        <p:spPr>
-          <a:xfrm>
-            <a:off x="457200" y="3246120"/>
-            <a:ext cx="73152" cy="1234440"/>
-          </a:xfrm>
-          <a:prstGeom prst="rect">
-            <a:avLst/>
-          </a:prstGeom>
-          <a:solidFill>
-            <a:srgbClr val="06B6D4"/>
-          </a:solidFill>
-          <a:ln/>
-        </p:spPr>
-      </p:sp>
-      <p:sp>
-        <p:nvSpPr>
-          <p:cNvPr id="12" name="Text 10"/>
-          <p:cNvSpPr/>
-          <p:nvPr/>
-        </p:nvSpPr>
-        <p:spPr>
-          <a:xfrm>
-            <a:off x="640080" y="3246120"/>
-            <a:ext cx="1280160" cy="1234440"/>
-          </a:xfrm>
-          <a:prstGeom prst="rect">
-            <a:avLst/>
-          </a:prstGeom>
-          <a:noFill/>
-          <a:ln/>
-        </p:spPr>
-        <p:txBody>
-          <a:bodyPr wrap="square" lIns="0" tIns="0" rIns="0" bIns="0" rtlCol="0" anchor="ctr"/>
-          <a:lstStyle/>
-          <a:p>
-            <a:pPr indent="0" marL="0">
-              <a:buNone/>
-            </a:pPr>
-            <a:r>
-              <a:rPr lang="en-US" sz="6400" b="1" dirty="0">
-                <a:solidFill>
-                  <a:srgbClr val="06B6D4"/>
-                </a:solidFill>
-                <a:latin typeface="Calibri" pitchFamily="34" charset="0"/>
-                <a:ea typeface="Calibri" pitchFamily="34" charset="-122"/>
-                <a:cs typeface="Calibri" pitchFamily="34" charset="-120"/>
-              </a:rPr>
-              <a:t>02</a:t>
-            </a:r>
-            <a:endParaRPr lang="en-US" sz="6400" dirty="0"/>
-          </a:p>
-        </p:txBody>
-      </p:sp>
-      <p:sp>
-        <p:nvSpPr>
-          <p:cNvPr id="13" name="Text 11"/>
-          <p:cNvSpPr/>
-          <p:nvPr/>
-        </p:nvSpPr>
-        <p:spPr>
-          <a:xfrm>
-            <a:off x="2011680" y="3429000"/>
-            <a:ext cx="4572000" cy="457200"/>
-          </a:xfrm>
-          <a:prstGeom prst="rect">
-            <a:avLst/>
-          </a:prstGeom>
-          <a:noFill/>
-          <a:ln/>
-        </p:spPr>
-        <p:txBody>
-          <a:bodyPr wrap="square" lIns="0" tIns="0" rIns="0" bIns="0" rtlCol="0" anchor="ctr"/>
-          <a:lstStyle/>
-          <a:p>
-            <a:pPr indent="0" marL="0">
-              <a:buNone/>
-            </a:pPr>
-            <a:r>
-              <a:rPr lang="en-US" sz="2000" b="1" dirty="0">
+          <p:cNvPr id="13" name="Shape 11"/>
+          <p:cNvSpPr/>
+          <p:nvPr/>
+        </p:nvSpPr>
+        <p:spPr>
+          <a:xfrm>
+            <a:off x="4457700" y="2697480"/>
+            <a:ext cx="640080" cy="640080"/>
+          </a:xfrm>
+          <a:prstGeom prst="ellipse">
+            <a:avLst/>
+          </a:prstGeom>
+          <a:solidFill>
+            <a:srgbClr val="10B981"/>
+          </a:solidFill>
+          <a:ln/>
+        </p:spPr>
+      </p:sp>
+      <p:sp>
+        <p:nvSpPr>
+          <p:cNvPr id="14" name="Text 12"/>
+          <p:cNvSpPr/>
+          <p:nvPr/>
+        </p:nvSpPr>
+        <p:spPr>
+          <a:xfrm>
+            <a:off x="4457700" y="2697480"/>
+            <a:ext cx="640080" cy="640080"/>
+          </a:xfrm>
+          <a:prstGeom prst="rect">
+            <a:avLst/>
+          </a:prstGeom>
+          <a:noFill/>
+          <a:ln/>
+        </p:spPr>
+        <p:txBody>
+          <a:bodyPr wrap="square" lIns="0" tIns="0" rIns="0" bIns="0" rtlCol="0" anchor="ctr"/>
+          <a:lstStyle/>
+          <a:p>
+            <a:pPr marL="0" indent="0" algn="ctr">
+              <a:buNone/>
+            </a:pPr>
+            <a:r>
+              <a:rPr lang="en-US" sz="1800" b="1" dirty="0">
+                <a:solidFill>
+                  <a:srgbClr val="FFFFFF"/>
+                </a:solidFill>
+                <a:latin typeface="Calibri" pitchFamily="34" charset="0"/>
+                <a:ea typeface="Calibri" pitchFamily="34" charset="-122"/>
+                <a:cs typeface="Calibri" pitchFamily="34" charset="-120"/>
+              </a:rPr>
+              <a:t>Q</a:t>
+            </a:r>
+            <a:endParaRPr lang="en-US" sz="1800" dirty="0"/>
+          </a:p>
+        </p:txBody>
+      </p:sp>
+      <p:sp>
+        <p:nvSpPr>
+          <p:cNvPr id="15" name="Text 13"/>
+          <p:cNvSpPr/>
+          <p:nvPr/>
+        </p:nvSpPr>
+        <p:spPr>
+          <a:xfrm>
+            <a:off x="5189220" y="2697480"/>
+            <a:ext cx="2606040" cy="274320"/>
+          </a:xfrm>
+          <a:prstGeom prst="rect">
+            <a:avLst/>
+          </a:prstGeom>
+          <a:noFill/>
+          <a:ln/>
+        </p:spPr>
+        <p:txBody>
+          <a:bodyPr wrap="square" lIns="0" tIns="0" rIns="0" bIns="0" rtlCol="0" anchor="ctr"/>
+          <a:lstStyle/>
+          <a:p>
+            <a:pPr marL="0" indent="0">
+              <a:buNone/>
+            </a:pPr>
+            <a:r>
+              <a:rPr lang="en-US" sz="1000" b="1" dirty="0">
+                <a:solidFill>
+                  <a:srgbClr val="10B981"/>
+                </a:solidFill>
+                <a:latin typeface="Calibri" pitchFamily="34" charset="0"/>
+                <a:ea typeface="Calibri" pitchFamily="34" charset="-122"/>
+                <a:cs typeface="Calibri" pitchFamily="34" charset="-120"/>
+              </a:rPr>
+              <a:t>✓ Doar la noi</a:t>
+            </a:r>
+            <a:endParaRPr lang="en-US" sz="1000" dirty="0"/>
+          </a:p>
+        </p:txBody>
+      </p:sp>
+      <p:sp>
+        <p:nvSpPr>
+          <p:cNvPr id="16" name="Text 14"/>
+          <p:cNvSpPr/>
+          <p:nvPr/>
+        </p:nvSpPr>
+        <p:spPr>
+          <a:xfrm>
+            <a:off x="5189220" y="2971800"/>
+            <a:ext cx="2606040" cy="365760"/>
+          </a:xfrm>
+          <a:prstGeom prst="rect">
+            <a:avLst/>
+          </a:prstGeom>
+          <a:noFill/>
+          <a:ln/>
+        </p:spPr>
+        <p:txBody>
+          <a:bodyPr wrap="square" lIns="0" tIns="0" rIns="0" bIns="0" rtlCol="0" anchor="ctr"/>
+          <a:lstStyle/>
+          <a:p>
+            <a:pPr marL="0" indent="0">
+              <a:buNone/>
+            </a:pPr>
+            <a:r>
+              <a:rPr lang="en-US" sz="1400" b="1" dirty="0">
                 <a:solidFill>
                   <a:srgbClr val="0F172A"/>
                 </a:solidFill>
@@ -7012,38 +6885,38 @@
                 <a:ea typeface="Calibri" pitchFamily="34" charset="-122"/>
                 <a:cs typeface="Calibri" pitchFamily="34" charset="-120"/>
               </a:rPr>
-              <a:t>Tot intr-un loc</a:t>
-            </a:r>
-            <a:endParaRPr lang="en-US" sz="2000" dirty="0"/>
-          </a:p>
-        </p:txBody>
-      </p:sp>
-      <p:sp>
-        <p:nvSpPr>
-          <p:cNvPr id="14" name="Text 12"/>
-          <p:cNvSpPr/>
-          <p:nvPr/>
-        </p:nvSpPr>
-        <p:spPr>
-          <a:xfrm>
-            <a:off x="2011680" y="3886200"/>
-            <a:ext cx="9418320" cy="548640"/>
-          </a:xfrm>
-          <a:prstGeom prst="rect">
-            <a:avLst/>
-          </a:prstGeom>
-          <a:noFill/>
-          <a:ln/>
-        </p:spPr>
-        <p:txBody>
-          <a:bodyPr wrap="square" lIns="0" tIns="0" rIns="0" bIns="0" rtlCol="0" anchor="ctr"/>
-          <a:lstStyle/>
-          <a:p>
-            <a:pPr indent="0" marL="0">
-              <a:buNone/>
-            </a:pPr>
-            <a:r>
-              <a:rPr lang="en-US" sz="1300" dirty="0">
+              <a:t>Quiz dinamic generat de AI</a:t>
+            </a:r>
+            <a:endParaRPr lang="en-US" sz="1400" dirty="0"/>
+          </a:p>
+        </p:txBody>
+      </p:sp>
+      <p:sp>
+        <p:nvSpPr>
+          <p:cNvPr id="17" name="Text 15"/>
+          <p:cNvSpPr/>
+          <p:nvPr/>
+        </p:nvSpPr>
+        <p:spPr>
+          <a:xfrm>
+            <a:off x="4457700" y="3474720"/>
+            <a:ext cx="3246120" cy="640080"/>
+          </a:xfrm>
+          <a:prstGeom prst="rect">
+            <a:avLst/>
+          </a:prstGeom>
+          <a:noFill/>
+          <a:ln/>
+        </p:spPr>
+        <p:txBody>
+          <a:bodyPr wrap="square" lIns="0" tIns="0" rIns="0" bIns="0" rtlCol="0" anchor="ctr"/>
+          <a:lstStyle/>
+          <a:p>
+            <a:pPr marL="0" indent="0">
+              <a:buNone/>
+            </a:pPr>
+            <a:r>
+              <a:rPr lang="en-US" sz="1100">
                 <a:solidFill>
                   <a:srgbClr val="64748B"/>
                 </a:solidFill>
@@ -7051,22 +6924,22 @@
                 <a:ea typeface="Calibri" pitchFamily="34" charset="-122"/>
                 <a:cs typeface="Calibri" pitchFamily="34" charset="-120"/>
               </a:rPr>
-              <a:t>Teorie + cod sursa + vizualizare + evaluare + gamification - intr-o singura interfata, fara context-switching intre tab-uri.</a:t>
-            </a:r>
-            <a:endParaRPr lang="en-US" sz="1300" dirty="0"/>
-          </a:p>
-        </p:txBody>
-      </p:sp>
-      <p:sp>
-        <p:nvSpPr>
-          <p:cNvPr id="15" name="Shape 13"/>
-          <p:cNvSpPr/>
-          <p:nvPr/>
-        </p:nvSpPr>
-        <p:spPr>
-          <a:xfrm>
-            <a:off x="457200" y="4663440"/>
-            <a:ext cx="11247120" cy="1234440"/>
+              <a:t>10 întrebări adaptate nivelului</a:t>
+            </a:r>
+            <a:endParaRPr lang="en-US" sz="1100" dirty="0"/>
+          </a:p>
+        </p:txBody>
+      </p:sp>
+      <p:sp>
+        <p:nvSpPr>
+          <p:cNvPr id="18" name="Shape 16"/>
+          <p:cNvSpPr/>
+          <p:nvPr/>
+        </p:nvSpPr>
+        <p:spPr>
+          <a:xfrm>
+            <a:off x="8069580" y="2423160"/>
+            <a:ext cx="3703320" cy="1828800"/>
           </a:xfrm>
           <a:prstGeom prst="rect">
             <a:avLst/>
@@ -7076,12 +6949,12 @@
           </a:solidFill>
           <a:ln w="12700">
             <a:solidFill>
-              <a:srgbClr val="E2E8F0"/>
+              <a:srgbClr val="10B981"/>
             </a:solidFill>
             <a:prstDash val="solid"/>
           </a:ln>
           <a:effectLst>
-            <a:outerShdw sx="100000" sy="100000" kx="0" ky="0" algn="bl" rotWithShape="0" blurRad="76200" dist="25400" dir="5400000">
+            <a:outerShdw blurRad="76200" dist="25400" dir="5400000" algn="bl" rotWithShape="0">
               <a:srgbClr val="000000">
                 <a:alpha val="5000"/>
               </a:srgbClr>
@@ -7091,16 +6964,16 @@
       </p:sp>
       <p:sp>
         <p:nvSpPr>
-          <p:cNvPr id="16" name="Shape 14"/>
-          <p:cNvSpPr/>
-          <p:nvPr/>
-        </p:nvSpPr>
-        <p:spPr>
-          <a:xfrm>
-            <a:off x="457200" y="4663440"/>
-            <a:ext cx="73152" cy="1234440"/>
-          </a:xfrm>
-          <a:prstGeom prst="rect">
+          <p:cNvPr id="19" name="Shape 17"/>
+          <p:cNvSpPr/>
+          <p:nvPr/>
+        </p:nvSpPr>
+        <p:spPr>
+          <a:xfrm>
+            <a:off x="8298180" y="2697480"/>
+            <a:ext cx="640080" cy="640080"/>
+          </a:xfrm>
+          <a:prstGeom prst="ellipse">
             <a:avLst/>
           </a:prstGeom>
           <a:solidFill>
@@ -7111,30 +6984,69 @@
       </p:sp>
       <p:sp>
         <p:nvSpPr>
-          <p:cNvPr id="17" name="Text 15"/>
-          <p:cNvSpPr/>
-          <p:nvPr/>
-        </p:nvSpPr>
-        <p:spPr>
-          <a:xfrm>
-            <a:off x="640080" y="4663440"/>
-            <a:ext cx="1280160" cy="1234440"/>
-          </a:xfrm>
-          <a:prstGeom prst="rect">
-            <a:avLst/>
-          </a:prstGeom>
-          <a:noFill/>
-          <a:ln/>
-        </p:spPr>
-        <p:txBody>
-          <a:bodyPr wrap="square" lIns="0" tIns="0" rIns="0" bIns="0" rtlCol="0" anchor="ctr"/>
-          <a:lstStyle/>
-          <a:p>
-            <a:pPr indent="0" marL="0">
-              <a:buNone/>
-            </a:pPr>
-            <a:r>
-              <a:rPr lang="en-US" sz="6400" b="1" dirty="0">
+          <p:cNvPr id="20" name="Text 18"/>
+          <p:cNvSpPr/>
+          <p:nvPr/>
+        </p:nvSpPr>
+        <p:spPr>
+          <a:xfrm>
+            <a:off x="8298180" y="2697480"/>
+            <a:ext cx="640080" cy="640080"/>
+          </a:xfrm>
+          <a:prstGeom prst="rect">
+            <a:avLst/>
+          </a:prstGeom>
+          <a:noFill/>
+          <a:ln/>
+        </p:spPr>
+        <p:txBody>
+          <a:bodyPr wrap="square" lIns="0" tIns="0" rIns="0" bIns="0" rtlCol="0" anchor="ctr"/>
+          <a:lstStyle/>
+          <a:p>
+            <a:pPr marL="0" indent="0" algn="ctr">
+              <a:buNone/>
+            </a:pPr>
+            <a:r>
+              <a:rPr lang="en-US" sz="1800" b="1" dirty="0">
+                <a:solidFill>
+                  <a:srgbClr val="FFFFFF"/>
+                </a:solidFill>
+                <a:latin typeface="Calibri" pitchFamily="34" charset="0"/>
+                <a:ea typeface="Calibri" pitchFamily="34" charset="-122"/>
+                <a:cs typeface="Calibri" pitchFamily="34" charset="-120"/>
+              </a:rPr>
+              <a:t>C</a:t>
+            </a:r>
+            <a:endParaRPr lang="en-US" sz="1800" dirty="0"/>
+          </a:p>
+        </p:txBody>
+      </p:sp>
+      <p:sp>
+        <p:nvSpPr>
+          <p:cNvPr id="21" name="Text 19"/>
+          <p:cNvSpPr/>
+          <p:nvPr/>
+        </p:nvSpPr>
+        <p:spPr>
+          <a:xfrm>
+            <a:off x="9029700" y="2697480"/>
+            <a:ext cx="2606040" cy="274320"/>
+          </a:xfrm>
+          <a:prstGeom prst="rect">
+            <a:avLst/>
+          </a:prstGeom>
+          <a:noFill/>
+          <a:ln/>
+        </p:spPr>
+        <p:txBody>
+          <a:bodyPr wrap="square" lIns="0" tIns="0" rIns="0" bIns="0" rtlCol="0" anchor="ctr"/>
+          <a:lstStyle/>
+          <a:p>
+            <a:pPr marL="0" indent="0">
+              <a:buNone/>
+            </a:pPr>
+            <a:r>
+              <a:rPr lang="en-US" sz="1000" b="1" dirty="0">
                 <a:solidFill>
                   <a:srgbClr val="10B981"/>
                 </a:solidFill>
@@ -7142,38 +7054,38 @@
                 <a:ea typeface="Calibri" pitchFamily="34" charset="-122"/>
                 <a:cs typeface="Calibri" pitchFamily="34" charset="-120"/>
               </a:rPr>
-              <a:t>03</a:t>
-            </a:r>
-            <a:endParaRPr lang="en-US" sz="6400" dirty="0"/>
-          </a:p>
-        </p:txBody>
-      </p:sp>
-      <p:sp>
-        <p:nvSpPr>
-          <p:cNvPr id="18" name="Text 16"/>
-          <p:cNvSpPr/>
-          <p:nvPr/>
-        </p:nvSpPr>
-        <p:spPr>
-          <a:xfrm>
-            <a:off x="2011680" y="4846320"/>
-            <a:ext cx="4572000" cy="457200"/>
-          </a:xfrm>
-          <a:prstGeom prst="rect">
-            <a:avLst/>
-          </a:prstGeom>
-          <a:noFill/>
-          <a:ln/>
-        </p:spPr>
-        <p:txBody>
-          <a:bodyPr wrap="square" lIns="0" tIns="0" rIns="0" bIns="0" rtlCol="0" anchor="ctr"/>
-          <a:lstStyle/>
-          <a:p>
-            <a:pPr indent="0" marL="0">
-              <a:buNone/>
-            </a:pPr>
-            <a:r>
-              <a:rPr lang="en-US" sz="2000" b="1" dirty="0">
+              <a:t>✓ Doar la noi</a:t>
+            </a:r>
+            <a:endParaRPr lang="en-US" sz="1000" dirty="0"/>
+          </a:p>
+        </p:txBody>
+      </p:sp>
+      <p:sp>
+        <p:nvSpPr>
+          <p:cNvPr id="22" name="Text 20"/>
+          <p:cNvSpPr/>
+          <p:nvPr/>
+        </p:nvSpPr>
+        <p:spPr>
+          <a:xfrm>
+            <a:off x="9029700" y="2971800"/>
+            <a:ext cx="2606040" cy="365760"/>
+          </a:xfrm>
+          <a:prstGeom prst="rect">
+            <a:avLst/>
+          </a:prstGeom>
+          <a:noFill/>
+          <a:ln/>
+        </p:spPr>
+        <p:txBody>
+          <a:bodyPr wrap="square" lIns="0" tIns="0" rIns="0" bIns="0" rtlCol="0" anchor="ctr"/>
+          <a:lstStyle/>
+          <a:p>
+            <a:pPr marL="0" indent="0">
+              <a:buNone/>
+            </a:pPr>
+            <a:r>
+              <a:rPr lang="en-US" sz="1400" b="1" dirty="0">
                 <a:solidFill>
                   <a:srgbClr val="0F172A"/>
                 </a:solidFill>
@@ -7181,38 +7093,38 @@
                 <a:ea typeface="Calibri" pitchFamily="34" charset="-122"/>
                 <a:cs typeface="Calibri" pitchFamily="34" charset="-120"/>
               </a:rPr>
-              <a:t>Limba romana</a:t>
-            </a:r>
-            <a:endParaRPr lang="en-US" sz="2000" dirty="0"/>
-          </a:p>
-        </p:txBody>
-      </p:sp>
-      <p:sp>
-        <p:nvSpPr>
-          <p:cNvPr id="19" name="Text 17"/>
-          <p:cNvSpPr/>
-          <p:nvPr/>
-        </p:nvSpPr>
-        <p:spPr>
-          <a:xfrm>
-            <a:off x="2011680" y="5303520"/>
-            <a:ext cx="9418320" cy="548640"/>
-          </a:xfrm>
-          <a:prstGeom prst="rect">
-            <a:avLst/>
-          </a:prstGeom>
-          <a:noFill/>
-          <a:ln/>
-        </p:spPr>
-        <p:txBody>
-          <a:bodyPr wrap="square" lIns="0" tIns="0" rIns="0" bIns="0" rtlCol="0" anchor="ctr"/>
-          <a:lstStyle/>
-          <a:p>
-            <a:pPr indent="0" marL="0">
-              <a:buNone/>
-            </a:pPr>
-            <a:r>
-              <a:rPr lang="en-US" sz="1300" dirty="0">
+              <a:t>Code feedback pe C++ scris</a:t>
+            </a:r>
+            <a:endParaRPr lang="en-US" sz="1400" dirty="0"/>
+          </a:p>
+        </p:txBody>
+      </p:sp>
+      <p:sp>
+        <p:nvSpPr>
+          <p:cNvPr id="23" name="Text 21"/>
+          <p:cNvSpPr/>
+          <p:nvPr/>
+        </p:nvSpPr>
+        <p:spPr>
+          <a:xfrm>
+            <a:off x="8298180" y="3474720"/>
+            <a:ext cx="3246120" cy="640080"/>
+          </a:xfrm>
+          <a:prstGeom prst="rect">
+            <a:avLst/>
+          </a:prstGeom>
+          <a:noFill/>
+          <a:ln/>
+        </p:spPr>
+        <p:txBody>
+          <a:bodyPr wrap="square" lIns="0" tIns="0" rIns="0" bIns="0" rtlCol="0" anchor="ctr"/>
+          <a:lstStyle/>
+          <a:p>
+            <a:pPr marL="0" indent="0">
+              <a:buNone/>
+            </a:pPr>
+            <a:r>
+              <a:rPr lang="en-US" sz="1100">
                 <a:solidFill>
                   <a:srgbClr val="64748B"/>
                 </a:solidFill>
@@ -7220,15 +7132,639 @@
                 <a:ea typeface="Calibri" pitchFamily="34" charset="-122"/>
                 <a:cs typeface="Calibri" pitchFamily="34" charset="-120"/>
               </a:rPr>
-              <a:t>Suport nativ pentru limba romana - esential pentru elevii din liceu care nu vorbesc engleza fluent.</a:t>
-            </a:r>
-            <a:endParaRPr lang="en-US" sz="1300" dirty="0"/>
-          </a:p>
-        </p:txBody>
-      </p:sp>
-      <p:sp>
-        <p:nvSpPr>
-          <p:cNvPr id="20" name="Text 18"/>
+              <a:t>AI-ul analizează codul tău și sugerează</a:t>
+            </a:r>
+            <a:endParaRPr lang="en-US" sz="1100" dirty="0"/>
+          </a:p>
+        </p:txBody>
+      </p:sp>
+      <p:sp>
+        <p:nvSpPr>
+          <p:cNvPr id="24" name="Shape 22"/>
+          <p:cNvSpPr/>
+          <p:nvPr/>
+        </p:nvSpPr>
+        <p:spPr>
+          <a:xfrm>
+            <a:off x="388620" y="4389120"/>
+            <a:ext cx="3703320" cy="1828800"/>
+          </a:xfrm>
+          <a:prstGeom prst="rect">
+            <a:avLst/>
+          </a:prstGeom>
+          <a:solidFill>
+            <a:srgbClr val="FFFFFF"/>
+          </a:solidFill>
+          <a:ln w="12700">
+            <a:solidFill>
+              <a:srgbClr val="10B981"/>
+            </a:solidFill>
+            <a:prstDash val="solid"/>
+          </a:ln>
+          <a:effectLst>
+            <a:outerShdw blurRad="76200" dist="25400" dir="5400000" algn="bl" rotWithShape="0">
+              <a:srgbClr val="000000">
+                <a:alpha val="5000"/>
+              </a:srgbClr>
+            </a:outerShdw>
+          </a:effectLst>
+        </p:spPr>
+      </p:sp>
+      <p:sp>
+        <p:nvSpPr>
+          <p:cNvPr id="25" name="Shape 23"/>
+          <p:cNvSpPr/>
+          <p:nvPr/>
+        </p:nvSpPr>
+        <p:spPr>
+          <a:xfrm>
+            <a:off x="617220" y="4663440"/>
+            <a:ext cx="640080" cy="640080"/>
+          </a:xfrm>
+          <a:prstGeom prst="ellipse">
+            <a:avLst/>
+          </a:prstGeom>
+          <a:solidFill>
+            <a:srgbClr val="10B981"/>
+          </a:solidFill>
+          <a:ln/>
+        </p:spPr>
+      </p:sp>
+      <p:sp>
+        <p:nvSpPr>
+          <p:cNvPr id="26" name="Text 24"/>
+          <p:cNvSpPr/>
+          <p:nvPr/>
+        </p:nvSpPr>
+        <p:spPr>
+          <a:xfrm>
+            <a:off x="617220" y="4663440"/>
+            <a:ext cx="640080" cy="640080"/>
+          </a:xfrm>
+          <a:prstGeom prst="rect">
+            <a:avLst/>
+          </a:prstGeom>
+          <a:noFill/>
+          <a:ln/>
+        </p:spPr>
+        <p:txBody>
+          <a:bodyPr wrap="square" lIns="0" tIns="0" rIns="0" bIns="0" rtlCol="0" anchor="ctr"/>
+          <a:lstStyle/>
+          <a:p>
+            <a:pPr marL="0" indent="0" algn="ctr">
+              <a:buNone/>
+            </a:pPr>
+            <a:r>
+              <a:rPr lang="en-US" sz="1800" b="1" dirty="0">
+                <a:solidFill>
+                  <a:srgbClr val="FFFFFF"/>
+                </a:solidFill>
+                <a:latin typeface="Calibri" pitchFamily="34" charset="0"/>
+                <a:ea typeface="Calibri" pitchFamily="34" charset="-122"/>
+                <a:cs typeface="Calibri" pitchFamily="34" charset="-120"/>
+              </a:rPr>
+              <a:t>G</a:t>
+            </a:r>
+            <a:endParaRPr lang="en-US" sz="1800" dirty="0"/>
+          </a:p>
+        </p:txBody>
+      </p:sp>
+      <p:sp>
+        <p:nvSpPr>
+          <p:cNvPr id="27" name="Text 25"/>
+          <p:cNvSpPr/>
+          <p:nvPr/>
+        </p:nvSpPr>
+        <p:spPr>
+          <a:xfrm>
+            <a:off x="1348740" y="4663440"/>
+            <a:ext cx="2606040" cy="274320"/>
+          </a:xfrm>
+          <a:prstGeom prst="rect">
+            <a:avLst/>
+          </a:prstGeom>
+          <a:noFill/>
+          <a:ln/>
+        </p:spPr>
+        <p:txBody>
+          <a:bodyPr wrap="square" lIns="0" tIns="0" rIns="0" bIns="0" rtlCol="0" anchor="ctr"/>
+          <a:lstStyle/>
+          <a:p>
+            <a:pPr marL="0" indent="0">
+              <a:buNone/>
+            </a:pPr>
+            <a:r>
+              <a:rPr lang="en-US" sz="1000" b="1" dirty="0">
+                <a:solidFill>
+                  <a:srgbClr val="10B981"/>
+                </a:solidFill>
+                <a:latin typeface="Calibri" pitchFamily="34" charset="0"/>
+                <a:ea typeface="Calibri" pitchFamily="34" charset="-122"/>
+                <a:cs typeface="Calibri" pitchFamily="34" charset="-120"/>
+              </a:rPr>
+              <a:t>✓ Doar la noi</a:t>
+            </a:r>
+            <a:endParaRPr lang="en-US" sz="1000" dirty="0"/>
+          </a:p>
+        </p:txBody>
+      </p:sp>
+      <p:sp>
+        <p:nvSpPr>
+          <p:cNvPr id="28" name="Text 26"/>
+          <p:cNvSpPr/>
+          <p:nvPr/>
+        </p:nvSpPr>
+        <p:spPr>
+          <a:xfrm>
+            <a:off x="1348740" y="4937760"/>
+            <a:ext cx="2606040" cy="365760"/>
+          </a:xfrm>
+          <a:prstGeom prst="rect">
+            <a:avLst/>
+          </a:prstGeom>
+          <a:noFill/>
+          <a:ln/>
+        </p:spPr>
+        <p:txBody>
+          <a:bodyPr wrap="square" lIns="0" tIns="0" rIns="0" bIns="0" rtlCol="0" anchor="ctr"/>
+          <a:lstStyle/>
+          <a:p>
+            <a:pPr marL="0" indent="0">
+              <a:buNone/>
+            </a:pPr>
+            <a:r>
+              <a:rPr lang="en-US" sz="1400" b="1" dirty="0">
+                <a:solidFill>
+                  <a:srgbClr val="0F172A"/>
+                </a:solidFill>
+                <a:latin typeface="Calibri" pitchFamily="34" charset="0"/>
+                <a:ea typeface="Calibri" pitchFamily="34" charset="-122"/>
+                <a:cs typeface="Calibri" pitchFamily="34" charset="-120"/>
+              </a:rPr>
+              <a:t>Gamification: 10 badges + streak</a:t>
+            </a:r>
+            <a:endParaRPr lang="en-US" sz="1400" dirty="0"/>
+          </a:p>
+        </p:txBody>
+      </p:sp>
+      <p:sp>
+        <p:nvSpPr>
+          <p:cNvPr id="29" name="Text 27"/>
+          <p:cNvSpPr/>
+          <p:nvPr/>
+        </p:nvSpPr>
+        <p:spPr>
+          <a:xfrm>
+            <a:off x="617220" y="5440680"/>
+            <a:ext cx="3246120" cy="640080"/>
+          </a:xfrm>
+          <a:prstGeom prst="rect">
+            <a:avLst/>
+          </a:prstGeom>
+          <a:noFill/>
+          <a:ln/>
+        </p:spPr>
+        <p:txBody>
+          <a:bodyPr wrap="square" lIns="0" tIns="0" rIns="0" bIns="0" rtlCol="0" anchor="ctr"/>
+          <a:lstStyle/>
+          <a:p>
+            <a:pPr marL="0" indent="0">
+              <a:buNone/>
+            </a:pPr>
+            <a:r>
+              <a:rPr lang="en-US" sz="1100">
+                <a:solidFill>
+                  <a:srgbClr val="64748B"/>
+                </a:solidFill>
+                <a:latin typeface="Calibri" pitchFamily="34" charset="0"/>
+                <a:ea typeface="Calibri" pitchFamily="34" charset="-122"/>
+                <a:cs typeface="Calibri" pitchFamily="34" charset="-120"/>
+              </a:rPr>
+              <a:t>Recompensare imediată, retenție zilnică</a:t>
+            </a:r>
+            <a:endParaRPr lang="en-US" sz="1100" dirty="0"/>
+          </a:p>
+        </p:txBody>
+      </p:sp>
+      <p:sp>
+        <p:nvSpPr>
+          <p:cNvPr id="30" name="Shape 28"/>
+          <p:cNvSpPr/>
+          <p:nvPr/>
+        </p:nvSpPr>
+        <p:spPr>
+          <a:xfrm>
+            <a:off x="4229100" y="4389120"/>
+            <a:ext cx="3703320" cy="1828800"/>
+          </a:xfrm>
+          <a:prstGeom prst="rect">
+            <a:avLst/>
+          </a:prstGeom>
+          <a:solidFill>
+            <a:srgbClr val="FFFFFF"/>
+          </a:solidFill>
+          <a:ln w="12700">
+            <a:solidFill>
+              <a:srgbClr val="10B981"/>
+            </a:solidFill>
+            <a:prstDash val="solid"/>
+          </a:ln>
+          <a:effectLst>
+            <a:outerShdw blurRad="76200" dist="25400" dir="5400000" algn="bl" rotWithShape="0">
+              <a:srgbClr val="000000">
+                <a:alpha val="5000"/>
+              </a:srgbClr>
+            </a:outerShdw>
+          </a:effectLst>
+        </p:spPr>
+      </p:sp>
+      <p:sp>
+        <p:nvSpPr>
+          <p:cNvPr id="31" name="Shape 29"/>
+          <p:cNvSpPr/>
+          <p:nvPr/>
+        </p:nvSpPr>
+        <p:spPr>
+          <a:xfrm>
+            <a:off x="4457700" y="4663440"/>
+            <a:ext cx="640080" cy="640080"/>
+          </a:xfrm>
+          <a:prstGeom prst="ellipse">
+            <a:avLst/>
+          </a:prstGeom>
+          <a:solidFill>
+            <a:srgbClr val="10B981"/>
+          </a:solidFill>
+          <a:ln/>
+        </p:spPr>
+      </p:sp>
+      <p:sp>
+        <p:nvSpPr>
+          <p:cNvPr id="32" name="Text 30"/>
+          <p:cNvSpPr/>
+          <p:nvPr/>
+        </p:nvSpPr>
+        <p:spPr>
+          <a:xfrm>
+            <a:off x="4457700" y="4663440"/>
+            <a:ext cx="640080" cy="640080"/>
+          </a:xfrm>
+          <a:prstGeom prst="rect">
+            <a:avLst/>
+          </a:prstGeom>
+          <a:noFill/>
+          <a:ln/>
+        </p:spPr>
+        <p:txBody>
+          <a:bodyPr wrap="square" lIns="0" tIns="0" rIns="0" bIns="0" rtlCol="0" anchor="ctr"/>
+          <a:lstStyle/>
+          <a:p>
+            <a:pPr marL="0" indent="0" algn="ctr">
+              <a:buNone/>
+            </a:pPr>
+            <a:r>
+              <a:rPr lang="en-US" sz="1800" b="1" dirty="0">
+                <a:solidFill>
+                  <a:srgbClr val="FFFFFF"/>
+                </a:solidFill>
+                <a:latin typeface="Calibri" pitchFamily="34" charset="0"/>
+                <a:ea typeface="Calibri" pitchFamily="34" charset="-122"/>
+                <a:cs typeface="Calibri" pitchFamily="34" charset="-120"/>
+              </a:rPr>
+              <a:t>P</a:t>
+            </a:r>
+            <a:endParaRPr lang="en-US" sz="1800" dirty="0"/>
+          </a:p>
+        </p:txBody>
+      </p:sp>
+      <p:sp>
+        <p:nvSpPr>
+          <p:cNvPr id="33" name="Text 31"/>
+          <p:cNvSpPr/>
+          <p:nvPr/>
+        </p:nvSpPr>
+        <p:spPr>
+          <a:xfrm>
+            <a:off x="5189220" y="4663440"/>
+            <a:ext cx="2606040" cy="274320"/>
+          </a:xfrm>
+          <a:prstGeom prst="rect">
+            <a:avLst/>
+          </a:prstGeom>
+          <a:noFill/>
+          <a:ln/>
+        </p:spPr>
+        <p:txBody>
+          <a:bodyPr wrap="square" lIns="0" tIns="0" rIns="0" bIns="0" rtlCol="0" anchor="ctr"/>
+          <a:lstStyle/>
+          <a:p>
+            <a:pPr marL="0" indent="0">
+              <a:buNone/>
+            </a:pPr>
+            <a:r>
+              <a:rPr lang="en-US" sz="1000" b="1" dirty="0">
+                <a:solidFill>
+                  <a:srgbClr val="10B981"/>
+                </a:solidFill>
+                <a:latin typeface="Calibri" pitchFamily="34" charset="0"/>
+                <a:ea typeface="Calibri" pitchFamily="34" charset="-122"/>
+                <a:cs typeface="Calibri" pitchFamily="34" charset="-120"/>
+              </a:rPr>
+              <a:t>✓ Doar la noi</a:t>
+            </a:r>
+            <a:endParaRPr lang="en-US" sz="1000" dirty="0"/>
+          </a:p>
+        </p:txBody>
+      </p:sp>
+      <p:sp>
+        <p:nvSpPr>
+          <p:cNvPr id="34" name="Text 32"/>
+          <p:cNvSpPr/>
+          <p:nvPr/>
+        </p:nvSpPr>
+        <p:spPr>
+          <a:xfrm>
+            <a:off x="5189220" y="4937760"/>
+            <a:ext cx="2606040" cy="365760"/>
+          </a:xfrm>
+          <a:prstGeom prst="rect">
+            <a:avLst/>
+          </a:prstGeom>
+          <a:noFill/>
+          <a:ln/>
+        </p:spPr>
+        <p:txBody>
+          <a:bodyPr wrap="square" lIns="0" tIns="0" rIns="0" bIns="0" rtlCol="0" anchor="ctr"/>
+          <a:lstStyle/>
+          <a:p>
+            <a:pPr marL="0" indent="0">
+              <a:buNone/>
+            </a:pPr>
+            <a:r>
+              <a:rPr lang="en-US" sz="1400" b="1">
+                <a:solidFill>
+                  <a:srgbClr val="0F172A"/>
+                </a:solidFill>
+                <a:latin typeface="Calibri" pitchFamily="34" charset="0"/>
+                <a:ea typeface="Calibri" pitchFamily="34" charset="-122"/>
+                <a:cs typeface="Calibri" pitchFamily="34" charset="-120"/>
+              </a:rPr>
+              <a:t>Parcursuri ghidate pe nivel</a:t>
+            </a:r>
+            <a:endParaRPr lang="en-US" sz="1400" dirty="0"/>
+          </a:p>
+        </p:txBody>
+      </p:sp>
+      <p:sp>
+        <p:nvSpPr>
+          <p:cNvPr id="35" name="Text 33"/>
+          <p:cNvSpPr/>
+          <p:nvPr/>
+        </p:nvSpPr>
+        <p:spPr>
+          <a:xfrm>
+            <a:off x="4457700" y="5440680"/>
+            <a:ext cx="3246120" cy="640080"/>
+          </a:xfrm>
+          <a:prstGeom prst="rect">
+            <a:avLst/>
+          </a:prstGeom>
+          <a:noFill/>
+          <a:ln/>
+        </p:spPr>
+        <p:txBody>
+          <a:bodyPr wrap="square" lIns="0" tIns="0" rIns="0" bIns="0" rtlCol="0" anchor="ctr"/>
+          <a:lstStyle/>
+          <a:p>
+            <a:pPr marL="0" indent="0">
+              <a:buNone/>
+            </a:pPr>
+            <a:r>
+              <a:rPr lang="it-IT" sz="1100">
+                <a:solidFill>
+                  <a:srgbClr val="64748B"/>
+                </a:solidFill>
+                <a:latin typeface="Calibri" pitchFamily="34" charset="0"/>
+                <a:ea typeface="Calibri" pitchFamily="34" charset="-122"/>
+                <a:cs typeface="Calibri" pitchFamily="34" charset="-120"/>
+              </a:rPr>
+              <a:t>Învățare pe pași, cu progres salvat</a:t>
+            </a:r>
+            <a:endParaRPr lang="en-US" sz="1100" dirty="0"/>
+          </a:p>
+        </p:txBody>
+      </p:sp>
+      <p:sp>
+        <p:nvSpPr>
+          <p:cNvPr id="36" name="Shape 34"/>
+          <p:cNvSpPr/>
+          <p:nvPr/>
+        </p:nvSpPr>
+        <p:spPr>
+          <a:xfrm>
+            <a:off x="8069580" y="4389120"/>
+            <a:ext cx="3703320" cy="1828800"/>
+          </a:xfrm>
+          <a:prstGeom prst="rect">
+            <a:avLst/>
+          </a:prstGeom>
+          <a:solidFill>
+            <a:srgbClr val="FFFFFF"/>
+          </a:solidFill>
+          <a:ln w="12700">
+            <a:solidFill>
+              <a:srgbClr val="10B981"/>
+            </a:solidFill>
+            <a:prstDash val="solid"/>
+          </a:ln>
+          <a:effectLst>
+            <a:outerShdw blurRad="76200" dist="25400" dir="5400000" algn="bl" rotWithShape="0">
+              <a:srgbClr val="000000">
+                <a:alpha val="5000"/>
+              </a:srgbClr>
+            </a:outerShdw>
+          </a:effectLst>
+        </p:spPr>
+      </p:sp>
+      <p:sp>
+        <p:nvSpPr>
+          <p:cNvPr id="37" name="Shape 35"/>
+          <p:cNvSpPr/>
+          <p:nvPr/>
+        </p:nvSpPr>
+        <p:spPr>
+          <a:xfrm>
+            <a:off x="8298180" y="4663440"/>
+            <a:ext cx="640080" cy="640080"/>
+          </a:xfrm>
+          <a:prstGeom prst="ellipse">
+            <a:avLst/>
+          </a:prstGeom>
+          <a:solidFill>
+            <a:srgbClr val="10B981"/>
+          </a:solidFill>
+          <a:ln/>
+        </p:spPr>
+      </p:sp>
+      <p:sp>
+        <p:nvSpPr>
+          <p:cNvPr id="38" name="Text 36"/>
+          <p:cNvSpPr/>
+          <p:nvPr/>
+        </p:nvSpPr>
+        <p:spPr>
+          <a:xfrm>
+            <a:off x="8298180" y="4663440"/>
+            <a:ext cx="640080" cy="640080"/>
+          </a:xfrm>
+          <a:prstGeom prst="rect">
+            <a:avLst/>
+          </a:prstGeom>
+          <a:noFill/>
+          <a:ln/>
+        </p:spPr>
+        <p:txBody>
+          <a:bodyPr wrap="square" lIns="0" tIns="0" rIns="0" bIns="0" rtlCol="0" anchor="ctr"/>
+          <a:lstStyle/>
+          <a:p>
+            <a:pPr marL="0" indent="0" algn="ctr">
+              <a:buNone/>
+            </a:pPr>
+            <a:r>
+              <a:rPr lang="en-US" sz="1800" b="1" dirty="0">
+                <a:solidFill>
+                  <a:srgbClr val="FFFFFF"/>
+                </a:solidFill>
+                <a:latin typeface="Calibri" pitchFamily="34" charset="0"/>
+                <a:ea typeface="Calibri" pitchFamily="34" charset="-122"/>
+                <a:cs typeface="Calibri" pitchFamily="34" charset="-120"/>
+              </a:rPr>
+              <a:t>RO</a:t>
+            </a:r>
+            <a:endParaRPr lang="en-US" sz="1800" dirty="0"/>
+          </a:p>
+        </p:txBody>
+      </p:sp>
+      <p:sp>
+        <p:nvSpPr>
+          <p:cNvPr id="39" name="Text 37"/>
+          <p:cNvSpPr/>
+          <p:nvPr/>
+        </p:nvSpPr>
+        <p:spPr>
+          <a:xfrm>
+            <a:off x="9029700" y="4663440"/>
+            <a:ext cx="2606040" cy="274320"/>
+          </a:xfrm>
+          <a:prstGeom prst="rect">
+            <a:avLst/>
+          </a:prstGeom>
+          <a:noFill/>
+          <a:ln/>
+        </p:spPr>
+        <p:txBody>
+          <a:bodyPr wrap="square" lIns="0" tIns="0" rIns="0" bIns="0" rtlCol="0" anchor="ctr"/>
+          <a:lstStyle/>
+          <a:p>
+            <a:pPr marL="0" indent="0">
+              <a:buNone/>
+            </a:pPr>
+            <a:r>
+              <a:rPr lang="en-US" sz="1000" b="1" dirty="0">
+                <a:solidFill>
+                  <a:srgbClr val="10B981"/>
+                </a:solidFill>
+                <a:latin typeface="Calibri" pitchFamily="34" charset="0"/>
+                <a:ea typeface="Calibri" pitchFamily="34" charset="-122"/>
+                <a:cs typeface="Calibri" pitchFamily="34" charset="-120"/>
+              </a:rPr>
+              <a:t>✓ Doar la noi</a:t>
+            </a:r>
+            <a:endParaRPr lang="en-US" sz="1000" dirty="0"/>
+          </a:p>
+        </p:txBody>
+      </p:sp>
+      <p:sp>
+        <p:nvSpPr>
+          <p:cNvPr id="40" name="Text 38"/>
+          <p:cNvSpPr/>
+          <p:nvPr/>
+        </p:nvSpPr>
+        <p:spPr>
+          <a:xfrm>
+            <a:off x="9029700" y="4937760"/>
+            <a:ext cx="2606040" cy="365760"/>
+          </a:xfrm>
+          <a:prstGeom prst="rect">
+            <a:avLst/>
+          </a:prstGeom>
+          <a:noFill/>
+          <a:ln/>
+        </p:spPr>
+        <p:txBody>
+          <a:bodyPr wrap="square" lIns="0" tIns="0" rIns="0" bIns="0" rtlCol="0" anchor="ctr"/>
+          <a:lstStyle/>
+          <a:p>
+            <a:pPr marL="0" indent="0">
+              <a:buNone/>
+            </a:pPr>
+            <a:r>
+              <a:rPr lang="en-US" sz="1400" b="1">
+                <a:solidFill>
+                  <a:srgbClr val="0F172A"/>
+                </a:solidFill>
+                <a:latin typeface="Calibri" pitchFamily="34" charset="0"/>
+                <a:ea typeface="Calibri" pitchFamily="34" charset="-122"/>
+                <a:cs typeface="Calibri" pitchFamily="34" charset="-120"/>
+              </a:rPr>
+              <a:t>Limba română nativă</a:t>
+            </a:r>
+            <a:endParaRPr lang="en-US" sz="1400" dirty="0"/>
+          </a:p>
+        </p:txBody>
+      </p:sp>
+      <p:sp>
+        <p:nvSpPr>
+          <p:cNvPr id="41" name="Text 39"/>
+          <p:cNvSpPr/>
+          <p:nvPr/>
+        </p:nvSpPr>
+        <p:spPr>
+          <a:xfrm>
+            <a:off x="8298180" y="5440680"/>
+            <a:ext cx="3246120" cy="640080"/>
+          </a:xfrm>
+          <a:prstGeom prst="rect">
+            <a:avLst/>
+          </a:prstGeom>
+          <a:noFill/>
+          <a:ln/>
+        </p:spPr>
+        <p:txBody>
+          <a:bodyPr wrap="square" lIns="0" tIns="0" rIns="0" bIns="0" rtlCol="0" anchor="ctr"/>
+          <a:lstStyle/>
+          <a:p>
+            <a:pPr marL="0" indent="0">
+              <a:buNone/>
+            </a:pPr>
+            <a:r>
+              <a:rPr lang="en-US" sz="1100">
+                <a:solidFill>
+                  <a:srgbClr val="64748B"/>
+                </a:solidFill>
+                <a:latin typeface="Calibri" pitchFamily="34" charset="0"/>
+                <a:ea typeface="Calibri" pitchFamily="34" charset="-122"/>
+                <a:cs typeface="Calibri" pitchFamily="34" charset="-120"/>
+              </a:rPr>
+              <a:t>Esențial pentru elevii din liceu</a:t>
+            </a:r>
+            <a:endParaRPr lang="en-US" sz="1100" dirty="0"/>
+          </a:p>
+        </p:txBody>
+      </p:sp>
+      <p:sp>
+        <p:nvSpPr>
+          <p:cNvPr id="42" name="Text 40"/>
           <p:cNvSpPr/>
           <p:nvPr/>
         </p:nvSpPr>
@@ -7247,7 +7783,7 @@
           <a:bodyPr wrap="square" lIns="0" tIns="0" rIns="0" bIns="0" rtlCol="0" anchor="ctr"/>
           <a:lstStyle/>
           <a:p>
-            <a:pPr indent="0" marL="0">
+            <a:pPr marL="0" indent="0">
               <a:buNone/>
             </a:pPr>
             <a:r>
@@ -7267,7 +7803,7 @@
       </p:sp>
       <p:sp>
         <p:nvSpPr>
-          <p:cNvPr id="21" name="Text 19"/>
+          <p:cNvPr id="43" name="Text 41"/>
           <p:cNvSpPr/>
           <p:nvPr/>
         </p:nvSpPr>
@@ -7286,7 +7822,7 @@
           <a:bodyPr wrap="square" lIns="0" tIns="0" rIns="0" bIns="0" rtlCol="0" anchor="ctr"/>
           <a:lstStyle/>
           <a:p>
-            <a:pPr algn="r" indent="0" marL="0">
+            <a:pPr marL="0" indent="0" algn="r">
               <a:buNone/>
             </a:pPr>
             <a:r>
@@ -7314,12 +7850,13 @@
 
 <file path=ppt/slides/slide7.xml><?xml version="1.0" encoding="utf-8"?>
 <p:sld xmlns:a="http://schemas.openxmlformats.org/drawingml/2006/main" xmlns:r="http://schemas.openxmlformats.org/officeDocument/2006/relationships" xmlns:p="http://schemas.openxmlformats.org/presentationml/2006/main">
-  <p:cSld name="Slide 7">
+  <p:cSld name="Slide 8">
     <p:bg>
       <p:bgPr>
         <a:solidFill>
-          <a:srgbClr val="F8F9FB"/>
+          <a:srgbClr val="0F1023"/>
         </a:solidFill>
+        <a:effectLst/>
       </p:bgPr>
     </p:bg>
     <p:spTree>
@@ -7344,1312 +7881,6 @@
         </p:nvSpPr>
         <p:spPr>
           <a:xfrm>
-            <a:off x="457200" y="502920"/>
-            <a:ext cx="228600" cy="36576"/>
-          </a:xfrm>
-          <a:prstGeom prst="rect">
-            <a:avLst/>
-          </a:prstGeom>
-          <a:solidFill>
-            <a:srgbClr val="6E56CF"/>
-          </a:solidFill>
-          <a:ln/>
-        </p:spPr>
-      </p:sp>
-      <p:sp>
-        <p:nvSpPr>
-          <p:cNvPr id="3" name="Text 1"/>
-          <p:cNvSpPr/>
-          <p:nvPr/>
-        </p:nvSpPr>
-        <p:spPr>
-          <a:xfrm>
-            <a:off x="777240" y="384048"/>
-            <a:ext cx="9144000" cy="274320"/>
-          </a:xfrm>
-          <a:prstGeom prst="rect">
-            <a:avLst/>
-          </a:prstGeom>
-          <a:noFill/>
-          <a:ln/>
-        </p:spPr>
-        <p:txBody>
-          <a:bodyPr wrap="square" lIns="0" tIns="0" rIns="0" bIns="0" rtlCol="0" anchor="ctr"/>
-          <a:lstStyle/>
-          <a:p>
-            <a:pPr indent="0" marL="0">
-              <a:buNone/>
-            </a:pPr>
-            <a:r>
-              <a:rPr lang="en-US" sz="1100" b="1" spc="400" kern="0" dirty="0">
-                <a:solidFill>
-                  <a:srgbClr val="6E56CF"/>
-                </a:solidFill>
-                <a:latin typeface="Calibri" pitchFamily="34" charset="0"/>
-                <a:ea typeface="Calibri" pitchFamily="34" charset="-122"/>
-                <a:cs typeface="Calibri" pitchFamily="34" charset="-120"/>
-              </a:rPr>
-              <a:t>06 · REZULTATE</a:t>
-            </a:r>
-            <a:endParaRPr lang="en-US" sz="1100" dirty="0"/>
-          </a:p>
-        </p:txBody>
-      </p:sp>
-      <p:sp>
-        <p:nvSpPr>
-          <p:cNvPr id="4" name="Text 2"/>
-          <p:cNvSpPr/>
-          <p:nvPr/>
-        </p:nvSpPr>
-        <p:spPr>
-          <a:xfrm>
-            <a:off x="457200" y="685800"/>
-            <a:ext cx="11247120" cy="822960"/>
-          </a:xfrm>
-          <a:prstGeom prst="rect">
-            <a:avLst/>
-          </a:prstGeom>
-          <a:noFill/>
-          <a:ln/>
-        </p:spPr>
-        <p:txBody>
-          <a:bodyPr wrap="square" lIns="0" tIns="0" rIns="0" bIns="0" rtlCol="0" anchor="ctr"/>
-          <a:lstStyle/>
-          <a:p>
-            <a:pPr indent="0" marL="0">
-              <a:buNone/>
-            </a:pPr>
-            <a:r>
-              <a:rPr lang="en-US" sz="3600" b="1" dirty="0">
-                <a:solidFill>
-                  <a:srgbClr val="0F172A"/>
-                </a:solidFill>
-                <a:latin typeface="Calibri" pitchFamily="34" charset="0"/>
-                <a:ea typeface="Calibri" pitchFamily="34" charset="-122"/>
-                <a:cs typeface="Calibri" pitchFamily="34" charset="-120"/>
-              </a:rPr>
-              <a:t>Ce am construit, ce urmeaza</a:t>
-            </a:r>
-            <a:endParaRPr lang="en-US" sz="3600" dirty="0"/>
-          </a:p>
-        </p:txBody>
-      </p:sp>
-      <p:sp>
-        <p:nvSpPr>
-          <p:cNvPr id="5" name="Shape 3"/>
-          <p:cNvSpPr/>
-          <p:nvPr/>
-        </p:nvSpPr>
-        <p:spPr>
-          <a:xfrm>
-            <a:off x="457200" y="1783080"/>
-            <a:ext cx="2743200" cy="1280160"/>
-          </a:xfrm>
-          <a:prstGeom prst="rect">
-            <a:avLst/>
-          </a:prstGeom>
-          <a:solidFill>
-            <a:srgbClr val="6E56CF"/>
-          </a:solidFill>
-          <a:ln/>
-        </p:spPr>
-      </p:sp>
-      <p:sp>
-        <p:nvSpPr>
-          <p:cNvPr id="6" name="Text 4"/>
-          <p:cNvSpPr/>
-          <p:nvPr/>
-        </p:nvSpPr>
-        <p:spPr>
-          <a:xfrm>
-            <a:off x="457200" y="1828800"/>
-            <a:ext cx="2743200" cy="777240"/>
-          </a:xfrm>
-          <a:prstGeom prst="rect">
-            <a:avLst/>
-          </a:prstGeom>
-          <a:noFill/>
-          <a:ln/>
-        </p:spPr>
-        <p:txBody>
-          <a:bodyPr wrap="square" lIns="0" tIns="0" rIns="0" bIns="0" rtlCol="0" anchor="ctr"/>
-          <a:lstStyle/>
-          <a:p>
-            <a:pPr algn="ctr" indent="0" marL="0">
-              <a:buNone/>
-            </a:pPr>
-            <a:r>
-              <a:rPr lang="en-US" sz="4800" b="1" dirty="0">
-                <a:solidFill>
-                  <a:srgbClr val="FFFFFF"/>
-                </a:solidFill>
-                <a:latin typeface="Calibri" pitchFamily="34" charset="0"/>
-                <a:ea typeface="Calibri" pitchFamily="34" charset="-122"/>
-                <a:cs typeface="Calibri" pitchFamily="34" charset="-120"/>
-              </a:rPr>
-              <a:t>14K</a:t>
-            </a:r>
-            <a:endParaRPr lang="en-US" sz="4800" dirty="0"/>
-          </a:p>
-        </p:txBody>
-      </p:sp>
-      <p:sp>
-        <p:nvSpPr>
-          <p:cNvPr id="7" name="Text 5"/>
-          <p:cNvSpPr/>
-          <p:nvPr/>
-        </p:nvSpPr>
-        <p:spPr>
-          <a:xfrm>
-            <a:off x="457200" y="2606040"/>
-            <a:ext cx="2743200" cy="411480"/>
-          </a:xfrm>
-          <a:prstGeom prst="rect">
-            <a:avLst/>
-          </a:prstGeom>
-          <a:noFill/>
-          <a:ln/>
-        </p:spPr>
-        <p:txBody>
-          <a:bodyPr wrap="square" lIns="0" tIns="0" rIns="0" bIns="0" rtlCol="0" anchor="ctr"/>
-          <a:lstStyle/>
-          <a:p>
-            <a:pPr algn="ctr" indent="0" marL="0">
-              <a:buNone/>
-            </a:pPr>
-            <a:r>
-              <a:rPr lang="en-US" sz="1100" spc="400" kern="0" dirty="0">
-                <a:solidFill>
-                  <a:srgbClr val="FFFFFF"/>
-                </a:solidFill>
-                <a:latin typeface="Calibri" pitchFamily="34" charset="0"/>
-                <a:ea typeface="Calibri" pitchFamily="34" charset="-122"/>
-                <a:cs typeface="Calibri" pitchFamily="34" charset="-120"/>
-              </a:rPr>
-              <a:t>LINII COD</a:t>
-            </a:r>
-            <a:endParaRPr lang="en-US" sz="1100" dirty="0"/>
-          </a:p>
-        </p:txBody>
-      </p:sp>
-      <p:sp>
-        <p:nvSpPr>
-          <p:cNvPr id="8" name="Shape 6"/>
-          <p:cNvSpPr/>
-          <p:nvPr/>
-        </p:nvSpPr>
-        <p:spPr>
-          <a:xfrm>
-            <a:off x="3337560" y="1783080"/>
-            <a:ext cx="2743200" cy="1280160"/>
-          </a:xfrm>
-          <a:prstGeom prst="rect">
-            <a:avLst/>
-          </a:prstGeom>
-          <a:solidFill>
-            <a:srgbClr val="6E56CF"/>
-          </a:solidFill>
-          <a:ln/>
-        </p:spPr>
-      </p:sp>
-      <p:sp>
-        <p:nvSpPr>
-          <p:cNvPr id="9" name="Text 7"/>
-          <p:cNvSpPr/>
-          <p:nvPr/>
-        </p:nvSpPr>
-        <p:spPr>
-          <a:xfrm>
-            <a:off x="3337560" y="1828800"/>
-            <a:ext cx="2743200" cy="777240"/>
-          </a:xfrm>
-          <a:prstGeom prst="rect">
-            <a:avLst/>
-          </a:prstGeom>
-          <a:noFill/>
-          <a:ln/>
-        </p:spPr>
-        <p:txBody>
-          <a:bodyPr wrap="square" lIns="0" tIns="0" rIns="0" bIns="0" rtlCol="0" anchor="ctr"/>
-          <a:lstStyle/>
-          <a:p>
-            <a:pPr algn="ctr" indent="0" marL="0">
-              <a:buNone/>
-            </a:pPr>
-            <a:r>
-              <a:rPr lang="en-US" sz="4800" b="1" dirty="0">
-                <a:solidFill>
-                  <a:srgbClr val="FFFFFF"/>
-                </a:solidFill>
-                <a:latin typeface="Calibri" pitchFamily="34" charset="0"/>
-                <a:ea typeface="Calibri" pitchFamily="34" charset="-122"/>
-                <a:cs typeface="Calibri" pitchFamily="34" charset="-120"/>
-              </a:rPr>
-              <a:t>13</a:t>
-            </a:r>
-            <a:endParaRPr lang="en-US" sz="4800" dirty="0"/>
-          </a:p>
-        </p:txBody>
-      </p:sp>
-      <p:sp>
-        <p:nvSpPr>
-          <p:cNvPr id="10" name="Text 8"/>
-          <p:cNvSpPr/>
-          <p:nvPr/>
-        </p:nvSpPr>
-        <p:spPr>
-          <a:xfrm>
-            <a:off x="3337560" y="2606040"/>
-            <a:ext cx="2743200" cy="411480"/>
-          </a:xfrm>
-          <a:prstGeom prst="rect">
-            <a:avLst/>
-          </a:prstGeom>
-          <a:noFill/>
-          <a:ln/>
-        </p:spPr>
-        <p:txBody>
-          <a:bodyPr wrap="square" lIns="0" tIns="0" rIns="0" bIns="0" rtlCol="0" anchor="ctr"/>
-          <a:lstStyle/>
-          <a:p>
-            <a:pPr algn="ctr" indent="0" marL="0">
-              <a:buNone/>
-            </a:pPr>
-            <a:r>
-              <a:rPr lang="en-US" sz="1100" spc="400" kern="0" dirty="0">
-                <a:solidFill>
-                  <a:srgbClr val="FFFFFF"/>
-                </a:solidFill>
-                <a:latin typeface="Calibri" pitchFamily="34" charset="0"/>
-                <a:ea typeface="Calibri" pitchFamily="34" charset="-122"/>
-                <a:cs typeface="Calibri" pitchFamily="34" charset="-120"/>
-              </a:rPr>
-              <a:t>TABELE MYSQL</a:t>
-            </a:r>
-            <a:endParaRPr lang="en-US" sz="1100" dirty="0"/>
-          </a:p>
-        </p:txBody>
-      </p:sp>
-      <p:sp>
-        <p:nvSpPr>
-          <p:cNvPr id="11" name="Shape 9"/>
-          <p:cNvSpPr/>
-          <p:nvPr/>
-        </p:nvSpPr>
-        <p:spPr>
-          <a:xfrm>
-            <a:off x="6217920" y="1783080"/>
-            <a:ext cx="2743200" cy="1280160"/>
-          </a:xfrm>
-          <a:prstGeom prst="rect">
-            <a:avLst/>
-          </a:prstGeom>
-          <a:solidFill>
-            <a:srgbClr val="6E56CF"/>
-          </a:solidFill>
-          <a:ln/>
-        </p:spPr>
-      </p:sp>
-      <p:sp>
-        <p:nvSpPr>
-          <p:cNvPr id="12" name="Text 10"/>
-          <p:cNvSpPr/>
-          <p:nvPr/>
-        </p:nvSpPr>
-        <p:spPr>
-          <a:xfrm>
-            <a:off x="6217920" y="1828800"/>
-            <a:ext cx="2743200" cy="777240"/>
-          </a:xfrm>
-          <a:prstGeom prst="rect">
-            <a:avLst/>
-          </a:prstGeom>
-          <a:noFill/>
-          <a:ln/>
-        </p:spPr>
-        <p:txBody>
-          <a:bodyPr wrap="square" lIns="0" tIns="0" rIns="0" bIns="0" rtlCol="0" anchor="ctr"/>
-          <a:lstStyle/>
-          <a:p>
-            <a:pPr algn="ctr" indent="0" marL="0">
-              <a:buNone/>
-            </a:pPr>
-            <a:r>
-              <a:rPr lang="en-US" sz="4800" b="1" dirty="0">
-                <a:solidFill>
-                  <a:srgbClr val="FFFFFF"/>
-                </a:solidFill>
-                <a:latin typeface="Calibri" pitchFamily="34" charset="0"/>
-                <a:ea typeface="Calibri" pitchFamily="34" charset="-122"/>
-                <a:cs typeface="Calibri" pitchFamily="34" charset="-120"/>
-              </a:rPr>
-              <a:t>10</a:t>
-            </a:r>
-            <a:endParaRPr lang="en-US" sz="4800" dirty="0"/>
-          </a:p>
-        </p:txBody>
-      </p:sp>
-      <p:sp>
-        <p:nvSpPr>
-          <p:cNvPr id="13" name="Text 11"/>
-          <p:cNvSpPr/>
-          <p:nvPr/>
-        </p:nvSpPr>
-        <p:spPr>
-          <a:xfrm>
-            <a:off x="6217920" y="2606040"/>
-            <a:ext cx="2743200" cy="411480"/>
-          </a:xfrm>
-          <a:prstGeom prst="rect">
-            <a:avLst/>
-          </a:prstGeom>
-          <a:noFill/>
-          <a:ln/>
-        </p:spPr>
-        <p:txBody>
-          <a:bodyPr wrap="square" lIns="0" tIns="0" rIns="0" bIns="0" rtlCol="0" anchor="ctr"/>
-          <a:lstStyle/>
-          <a:p>
-            <a:pPr algn="ctr" indent="0" marL="0">
-              <a:buNone/>
-            </a:pPr>
-            <a:r>
-              <a:rPr lang="en-US" sz="1100" spc="400" kern="0" dirty="0">
-                <a:solidFill>
-                  <a:srgbClr val="FFFFFF"/>
-                </a:solidFill>
-                <a:latin typeface="Calibri" pitchFamily="34" charset="0"/>
-                <a:ea typeface="Calibri" pitchFamily="34" charset="-122"/>
-                <a:cs typeface="Calibri" pitchFamily="34" charset="-120"/>
-              </a:rPr>
-              <a:t>BADGE-URI</a:t>
-            </a:r>
-            <a:endParaRPr lang="en-US" sz="1100" dirty="0"/>
-          </a:p>
-        </p:txBody>
-      </p:sp>
-      <p:sp>
-        <p:nvSpPr>
-          <p:cNvPr id="14" name="Shape 12"/>
-          <p:cNvSpPr/>
-          <p:nvPr/>
-        </p:nvSpPr>
-        <p:spPr>
-          <a:xfrm>
-            <a:off x="9098280" y="1783080"/>
-            <a:ext cx="2743200" cy="1280160"/>
-          </a:xfrm>
-          <a:prstGeom prst="rect">
-            <a:avLst/>
-          </a:prstGeom>
-          <a:solidFill>
-            <a:srgbClr val="6E56CF"/>
-          </a:solidFill>
-          <a:ln/>
-        </p:spPr>
-      </p:sp>
-      <p:sp>
-        <p:nvSpPr>
-          <p:cNvPr id="15" name="Text 13"/>
-          <p:cNvSpPr/>
-          <p:nvPr/>
-        </p:nvSpPr>
-        <p:spPr>
-          <a:xfrm>
-            <a:off x="9098280" y="1828800"/>
-            <a:ext cx="2743200" cy="777240"/>
-          </a:xfrm>
-          <a:prstGeom prst="rect">
-            <a:avLst/>
-          </a:prstGeom>
-          <a:noFill/>
-          <a:ln/>
-        </p:spPr>
-        <p:txBody>
-          <a:bodyPr wrap="square" lIns="0" tIns="0" rIns="0" bIns="0" rtlCol="0" anchor="ctr"/>
-          <a:lstStyle/>
-          <a:p>
-            <a:pPr algn="ctr" indent="0" marL="0">
-              <a:buNone/>
-            </a:pPr>
-            <a:r>
-              <a:rPr lang="en-US" sz="4800" b="1" dirty="0">
-                <a:solidFill>
-                  <a:srgbClr val="FFFFFF"/>
-                </a:solidFill>
-                <a:latin typeface="Calibri" pitchFamily="34" charset="0"/>
-                <a:ea typeface="Calibri" pitchFamily="34" charset="-122"/>
-                <a:cs typeface="Calibri" pitchFamily="34" charset="-120"/>
-              </a:rPr>
-              <a:t>6+4</a:t>
-            </a:r>
-            <a:endParaRPr lang="en-US" sz="4800" dirty="0"/>
-          </a:p>
-        </p:txBody>
-      </p:sp>
-      <p:sp>
-        <p:nvSpPr>
-          <p:cNvPr id="16" name="Text 14"/>
-          <p:cNvSpPr/>
-          <p:nvPr/>
-        </p:nvSpPr>
-        <p:spPr>
-          <a:xfrm>
-            <a:off x="9098280" y="2606040"/>
-            <a:ext cx="2743200" cy="411480"/>
-          </a:xfrm>
-          <a:prstGeom prst="rect">
-            <a:avLst/>
-          </a:prstGeom>
-          <a:noFill/>
-          <a:ln/>
-        </p:spPr>
-        <p:txBody>
-          <a:bodyPr wrap="square" lIns="0" tIns="0" rIns="0" bIns="0" rtlCol="0" anchor="ctr"/>
-          <a:lstStyle/>
-          <a:p>
-            <a:pPr algn="ctr" indent="0" marL="0">
-              <a:buNone/>
-            </a:pPr>
-            <a:r>
-              <a:rPr lang="en-US" sz="1100" spc="400" kern="0" dirty="0">
-                <a:solidFill>
-                  <a:srgbClr val="FFFFFF"/>
-                </a:solidFill>
-                <a:latin typeface="Calibri" pitchFamily="34" charset="0"/>
-                <a:ea typeface="Calibri" pitchFamily="34" charset="-122"/>
-                <a:cs typeface="Calibri" pitchFamily="34" charset="-120"/>
-              </a:rPr>
-              <a:t>ALGORITMI + TEHNICI</a:t>
-            </a:r>
-            <a:endParaRPr lang="en-US" sz="1100" dirty="0"/>
-          </a:p>
-        </p:txBody>
-      </p:sp>
-      <p:sp>
-        <p:nvSpPr>
-          <p:cNvPr id="17" name="Text 15"/>
-          <p:cNvSpPr/>
-          <p:nvPr/>
-        </p:nvSpPr>
-        <p:spPr>
-          <a:xfrm>
-            <a:off x="457200" y="3291840"/>
-            <a:ext cx="5486400" cy="365760"/>
-          </a:xfrm>
-          <a:prstGeom prst="rect">
-            <a:avLst/>
-          </a:prstGeom>
-          <a:noFill/>
-          <a:ln/>
-        </p:spPr>
-        <p:txBody>
-          <a:bodyPr wrap="square" lIns="0" tIns="0" rIns="0" bIns="0" rtlCol="0" anchor="ctr"/>
-          <a:lstStyle/>
-          <a:p>
-            <a:pPr indent="0" marL="0">
-              <a:buNone/>
-            </a:pPr>
-            <a:r>
-              <a:rPr lang="en-US" sz="1600" b="1" dirty="0">
-                <a:solidFill>
-                  <a:srgbClr val="0F172A"/>
-                </a:solidFill>
-                <a:latin typeface="Calibri" pitchFamily="34" charset="0"/>
-                <a:ea typeface="Calibri" pitchFamily="34" charset="-122"/>
-                <a:cs typeface="Calibri" pitchFamily="34" charset="-120"/>
-              </a:rPr>
-              <a:t>Concluzii cheie</a:t>
-            </a:r>
-            <a:endParaRPr lang="en-US" sz="1600" dirty="0"/>
-          </a:p>
-        </p:txBody>
-      </p:sp>
-      <p:sp>
-        <p:nvSpPr>
-          <p:cNvPr id="18" name="Shape 16"/>
-          <p:cNvSpPr/>
-          <p:nvPr/>
-        </p:nvSpPr>
-        <p:spPr>
-          <a:xfrm>
-            <a:off x="457200" y="3703320"/>
-            <a:ext cx="274320" cy="274320"/>
-          </a:xfrm>
-          <a:prstGeom prst="ellipse">
-            <a:avLst/>
-          </a:prstGeom>
-          <a:solidFill>
-            <a:srgbClr val="10B981"/>
-          </a:solidFill>
-          <a:ln/>
-        </p:spPr>
-      </p:sp>
-      <p:sp>
-        <p:nvSpPr>
-          <p:cNvPr id="19" name="Text 17"/>
-          <p:cNvSpPr/>
-          <p:nvPr/>
-        </p:nvSpPr>
-        <p:spPr>
-          <a:xfrm>
-            <a:off x="457200" y="3703320"/>
-            <a:ext cx="274320" cy="274320"/>
-          </a:xfrm>
-          <a:prstGeom prst="rect">
-            <a:avLst/>
-          </a:prstGeom>
-          <a:noFill/>
-          <a:ln/>
-        </p:spPr>
-        <p:txBody>
-          <a:bodyPr wrap="square" lIns="0" tIns="0" rIns="0" bIns="0" rtlCol="0" anchor="ctr"/>
-          <a:lstStyle/>
-          <a:p>
-            <a:pPr algn="ctr" indent="0" marL="0">
-              <a:buNone/>
-            </a:pPr>
-            <a:r>
-              <a:rPr lang="en-US" sz="1200" b="1" dirty="0">
-                <a:solidFill>
-                  <a:srgbClr val="FFFFFF"/>
-                </a:solidFill>
-                <a:latin typeface="Calibri" pitchFamily="34" charset="0"/>
-                <a:ea typeface="Calibri" pitchFamily="34" charset="-122"/>
-                <a:cs typeface="Calibri" pitchFamily="34" charset="-120"/>
-              </a:rPr>
-              <a:t>✓</a:t>
-            </a:r>
-            <a:endParaRPr lang="en-US" sz="1200" dirty="0"/>
-          </a:p>
-        </p:txBody>
-      </p:sp>
-      <p:sp>
-        <p:nvSpPr>
-          <p:cNvPr id="20" name="Text 18"/>
-          <p:cNvSpPr/>
-          <p:nvPr/>
-        </p:nvSpPr>
-        <p:spPr>
-          <a:xfrm>
-            <a:off x="868680" y="3703320"/>
-            <a:ext cx="5486400" cy="320040"/>
-          </a:xfrm>
-          <a:prstGeom prst="rect">
-            <a:avLst/>
-          </a:prstGeom>
-          <a:noFill/>
-          <a:ln/>
-        </p:spPr>
-        <p:txBody>
-          <a:bodyPr wrap="square" lIns="0" tIns="0" rIns="0" bIns="0" rtlCol="0" anchor="ctr"/>
-          <a:lstStyle/>
-          <a:p>
-            <a:pPr indent="0" marL="0">
-              <a:buNone/>
-            </a:pPr>
-            <a:r>
-              <a:rPr lang="en-US" sz="1200" dirty="0">
-                <a:solidFill>
-                  <a:srgbClr val="0F172A"/>
-                </a:solidFill>
-                <a:latin typeface="Calibri" pitchFamily="34" charset="0"/>
-                <a:ea typeface="Calibri" pitchFamily="34" charset="-122"/>
-                <a:cs typeface="Calibri" pitchFamily="34" charset="-120"/>
-              </a:rPr>
-              <a:t>Integrare AI personalizata reduce timpul de asimilare</a:t>
-            </a:r>
-            <a:endParaRPr lang="en-US" sz="1200" dirty="0"/>
-          </a:p>
-        </p:txBody>
-      </p:sp>
-      <p:sp>
-        <p:nvSpPr>
-          <p:cNvPr id="21" name="Shape 19"/>
-          <p:cNvSpPr/>
-          <p:nvPr/>
-        </p:nvSpPr>
-        <p:spPr>
-          <a:xfrm>
-            <a:off x="457200" y="4206240"/>
-            <a:ext cx="274320" cy="274320"/>
-          </a:xfrm>
-          <a:prstGeom prst="ellipse">
-            <a:avLst/>
-          </a:prstGeom>
-          <a:solidFill>
-            <a:srgbClr val="10B981"/>
-          </a:solidFill>
-          <a:ln/>
-        </p:spPr>
-      </p:sp>
-      <p:sp>
-        <p:nvSpPr>
-          <p:cNvPr id="22" name="Text 20"/>
-          <p:cNvSpPr/>
-          <p:nvPr/>
-        </p:nvSpPr>
-        <p:spPr>
-          <a:xfrm>
-            <a:off x="457200" y="4206240"/>
-            <a:ext cx="274320" cy="274320"/>
-          </a:xfrm>
-          <a:prstGeom prst="rect">
-            <a:avLst/>
-          </a:prstGeom>
-          <a:noFill/>
-          <a:ln/>
-        </p:spPr>
-        <p:txBody>
-          <a:bodyPr wrap="square" lIns="0" tIns="0" rIns="0" bIns="0" rtlCol="0" anchor="ctr"/>
-          <a:lstStyle/>
-          <a:p>
-            <a:pPr algn="ctr" indent="0" marL="0">
-              <a:buNone/>
-            </a:pPr>
-            <a:r>
-              <a:rPr lang="en-US" sz="1200" b="1" dirty="0">
-                <a:solidFill>
-                  <a:srgbClr val="FFFFFF"/>
-                </a:solidFill>
-                <a:latin typeface="Calibri" pitchFamily="34" charset="0"/>
-                <a:ea typeface="Calibri" pitchFamily="34" charset="-122"/>
-                <a:cs typeface="Calibri" pitchFamily="34" charset="-120"/>
-              </a:rPr>
-              <a:t>✓</a:t>
-            </a:r>
-            <a:endParaRPr lang="en-US" sz="1200" dirty="0"/>
-          </a:p>
-        </p:txBody>
-      </p:sp>
-      <p:sp>
-        <p:nvSpPr>
-          <p:cNvPr id="23" name="Text 21"/>
-          <p:cNvSpPr/>
-          <p:nvPr/>
-        </p:nvSpPr>
-        <p:spPr>
-          <a:xfrm>
-            <a:off x="868680" y="4206240"/>
-            <a:ext cx="5486400" cy="320040"/>
-          </a:xfrm>
-          <a:prstGeom prst="rect">
-            <a:avLst/>
-          </a:prstGeom>
-          <a:noFill/>
-          <a:ln/>
-        </p:spPr>
-        <p:txBody>
-          <a:bodyPr wrap="square" lIns="0" tIns="0" rIns="0" bIns="0" rtlCol="0" anchor="ctr"/>
-          <a:lstStyle/>
-          <a:p>
-            <a:pPr indent="0" marL="0">
-              <a:buNone/>
-            </a:pPr>
-            <a:r>
-              <a:rPr lang="en-US" sz="1200" dirty="0">
-                <a:solidFill>
-                  <a:srgbClr val="0F172A"/>
-                </a:solidFill>
-                <a:latin typeface="Calibri" pitchFamily="34" charset="0"/>
-                <a:ea typeface="Calibri" pitchFamily="34" charset="-122"/>
-                <a:cs typeface="Calibri" pitchFamily="34" charset="-120"/>
-              </a:rPr>
-              <a:t>Gamification creste retentia prin recompensare imediata</a:t>
-            </a:r>
-            <a:endParaRPr lang="en-US" sz="1200" dirty="0"/>
-          </a:p>
-        </p:txBody>
-      </p:sp>
-      <p:sp>
-        <p:nvSpPr>
-          <p:cNvPr id="24" name="Shape 22"/>
-          <p:cNvSpPr/>
-          <p:nvPr/>
-        </p:nvSpPr>
-        <p:spPr>
-          <a:xfrm>
-            <a:off x="457200" y="4709160"/>
-            <a:ext cx="274320" cy="274320"/>
-          </a:xfrm>
-          <a:prstGeom prst="ellipse">
-            <a:avLst/>
-          </a:prstGeom>
-          <a:solidFill>
-            <a:srgbClr val="10B981"/>
-          </a:solidFill>
-          <a:ln/>
-        </p:spPr>
-      </p:sp>
-      <p:sp>
-        <p:nvSpPr>
-          <p:cNvPr id="25" name="Text 23"/>
-          <p:cNvSpPr/>
-          <p:nvPr/>
-        </p:nvSpPr>
-        <p:spPr>
-          <a:xfrm>
-            <a:off x="457200" y="4709160"/>
-            <a:ext cx="274320" cy="274320"/>
-          </a:xfrm>
-          <a:prstGeom prst="rect">
-            <a:avLst/>
-          </a:prstGeom>
-          <a:noFill/>
-          <a:ln/>
-        </p:spPr>
-        <p:txBody>
-          <a:bodyPr wrap="square" lIns="0" tIns="0" rIns="0" bIns="0" rtlCol="0" anchor="ctr"/>
-          <a:lstStyle/>
-          <a:p>
-            <a:pPr algn="ctr" indent="0" marL="0">
-              <a:buNone/>
-            </a:pPr>
-            <a:r>
-              <a:rPr lang="en-US" sz="1200" b="1" dirty="0">
-                <a:solidFill>
-                  <a:srgbClr val="FFFFFF"/>
-                </a:solidFill>
-                <a:latin typeface="Calibri" pitchFamily="34" charset="0"/>
-                <a:ea typeface="Calibri" pitchFamily="34" charset="-122"/>
-                <a:cs typeface="Calibri" pitchFamily="34" charset="-120"/>
-              </a:rPr>
-              <a:t>✓</a:t>
-            </a:r>
-            <a:endParaRPr lang="en-US" sz="1200" dirty="0"/>
-          </a:p>
-        </p:txBody>
-      </p:sp>
-      <p:sp>
-        <p:nvSpPr>
-          <p:cNvPr id="26" name="Text 24"/>
-          <p:cNvSpPr/>
-          <p:nvPr/>
-        </p:nvSpPr>
-        <p:spPr>
-          <a:xfrm>
-            <a:off x="868680" y="4709160"/>
-            <a:ext cx="5486400" cy="320040"/>
-          </a:xfrm>
-          <a:prstGeom prst="rect">
-            <a:avLst/>
-          </a:prstGeom>
-          <a:noFill/>
-          <a:ln/>
-        </p:spPr>
-        <p:txBody>
-          <a:bodyPr wrap="square" lIns="0" tIns="0" rIns="0" bIns="0" rtlCol="0" anchor="ctr"/>
-          <a:lstStyle/>
-          <a:p>
-            <a:pPr indent="0" marL="0">
-              <a:buNone/>
-            </a:pPr>
-            <a:r>
-              <a:rPr lang="en-US" sz="1200" dirty="0">
-                <a:solidFill>
-                  <a:srgbClr val="0F172A"/>
-                </a:solidFill>
-                <a:latin typeface="Calibri" pitchFamily="34" charset="0"/>
-                <a:ea typeface="Calibri" pitchFamily="34" charset="-122"/>
-                <a:cs typeface="Calibri" pitchFamily="34" charset="-120"/>
-              </a:rPr>
-              <a:t>Vizualizatorul Canvas + audio ofera intuitie clara</a:t>
-            </a:r>
-            <a:endParaRPr lang="en-US" sz="1200" dirty="0"/>
-          </a:p>
-        </p:txBody>
-      </p:sp>
-      <p:sp>
-        <p:nvSpPr>
-          <p:cNvPr id="27" name="Shape 25"/>
-          <p:cNvSpPr/>
-          <p:nvPr/>
-        </p:nvSpPr>
-        <p:spPr>
-          <a:xfrm>
-            <a:off x="457200" y="5212080"/>
-            <a:ext cx="274320" cy="274320"/>
-          </a:xfrm>
-          <a:prstGeom prst="ellipse">
-            <a:avLst/>
-          </a:prstGeom>
-          <a:solidFill>
-            <a:srgbClr val="10B981"/>
-          </a:solidFill>
-          <a:ln/>
-        </p:spPr>
-      </p:sp>
-      <p:sp>
-        <p:nvSpPr>
-          <p:cNvPr id="28" name="Text 26"/>
-          <p:cNvSpPr/>
-          <p:nvPr/>
-        </p:nvSpPr>
-        <p:spPr>
-          <a:xfrm>
-            <a:off x="457200" y="5212080"/>
-            <a:ext cx="274320" cy="274320"/>
-          </a:xfrm>
-          <a:prstGeom prst="rect">
-            <a:avLst/>
-          </a:prstGeom>
-          <a:noFill/>
-          <a:ln/>
-        </p:spPr>
-        <p:txBody>
-          <a:bodyPr wrap="square" lIns="0" tIns="0" rIns="0" bIns="0" rtlCol="0" anchor="ctr"/>
-          <a:lstStyle/>
-          <a:p>
-            <a:pPr algn="ctr" indent="0" marL="0">
-              <a:buNone/>
-            </a:pPr>
-            <a:r>
-              <a:rPr lang="en-US" sz="1200" b="1" dirty="0">
-                <a:solidFill>
-                  <a:srgbClr val="FFFFFF"/>
-                </a:solidFill>
-                <a:latin typeface="Calibri" pitchFamily="34" charset="0"/>
-                <a:ea typeface="Calibri" pitchFamily="34" charset="-122"/>
-                <a:cs typeface="Calibri" pitchFamily="34" charset="-120"/>
-              </a:rPr>
-              <a:t>✓</a:t>
-            </a:r>
-            <a:endParaRPr lang="en-US" sz="1200" dirty="0"/>
-          </a:p>
-        </p:txBody>
-      </p:sp>
-      <p:sp>
-        <p:nvSpPr>
-          <p:cNvPr id="29" name="Text 27"/>
-          <p:cNvSpPr/>
-          <p:nvPr/>
-        </p:nvSpPr>
-        <p:spPr>
-          <a:xfrm>
-            <a:off x="868680" y="5212080"/>
-            <a:ext cx="5486400" cy="320040"/>
-          </a:xfrm>
-          <a:prstGeom prst="rect">
-            <a:avLst/>
-          </a:prstGeom>
-          <a:noFill/>
-          <a:ln/>
-        </p:spPr>
-        <p:txBody>
-          <a:bodyPr wrap="square" lIns="0" tIns="0" rIns="0" bIns="0" rtlCol="0" anchor="ctr"/>
-          <a:lstStyle/>
-          <a:p>
-            <a:pPr indent="0" marL="0">
-              <a:buNone/>
-            </a:pPr>
-            <a:r>
-              <a:rPr lang="en-US" sz="1200" dirty="0">
-                <a:solidFill>
-                  <a:srgbClr val="0F172A"/>
-                </a:solidFill>
-                <a:latin typeface="Calibri" pitchFamily="34" charset="0"/>
-                <a:ea typeface="Calibri" pitchFamily="34" charset="-122"/>
-                <a:cs typeface="Calibri" pitchFamily="34" charset="-120"/>
-              </a:rPr>
-              <a:t>Protectie multi-strat conform OWASP Top 10</a:t>
-            </a:r>
-            <a:endParaRPr lang="en-US" sz="1200" dirty="0"/>
-          </a:p>
-        </p:txBody>
-      </p:sp>
-      <p:sp>
-        <p:nvSpPr>
-          <p:cNvPr id="30" name="Text 28"/>
-          <p:cNvSpPr/>
-          <p:nvPr/>
-        </p:nvSpPr>
-        <p:spPr>
-          <a:xfrm>
-            <a:off x="6583680" y="3291840"/>
-            <a:ext cx="5486400" cy="365760"/>
-          </a:xfrm>
-          <a:prstGeom prst="rect">
-            <a:avLst/>
-          </a:prstGeom>
-          <a:noFill/>
-          <a:ln/>
-        </p:spPr>
-        <p:txBody>
-          <a:bodyPr wrap="square" lIns="0" tIns="0" rIns="0" bIns="0" rtlCol="0" anchor="ctr"/>
-          <a:lstStyle/>
-          <a:p>
-            <a:pPr indent="0" marL="0">
-              <a:buNone/>
-            </a:pPr>
-            <a:r>
-              <a:rPr lang="en-US" sz="1600" b="1" dirty="0">
-                <a:solidFill>
-                  <a:srgbClr val="0F172A"/>
-                </a:solidFill>
-                <a:latin typeface="Calibri" pitchFamily="34" charset="0"/>
-                <a:ea typeface="Calibri" pitchFamily="34" charset="-122"/>
-                <a:cs typeface="Calibri" pitchFamily="34" charset="-120"/>
-              </a:rPr>
-              <a:t>Directii viitoare</a:t>
-            </a:r>
-            <a:endParaRPr lang="en-US" sz="1600" dirty="0"/>
-          </a:p>
-        </p:txBody>
-      </p:sp>
-      <p:sp>
-        <p:nvSpPr>
-          <p:cNvPr id="31" name="Shape 29"/>
-          <p:cNvSpPr/>
-          <p:nvPr/>
-        </p:nvSpPr>
-        <p:spPr>
-          <a:xfrm>
-            <a:off x="6583680" y="3749040"/>
-            <a:ext cx="182880" cy="182880"/>
-          </a:xfrm>
-          <a:prstGeom prst="rect">
-            <a:avLst/>
-          </a:prstGeom>
-          <a:solidFill>
-            <a:srgbClr val="F59E0B"/>
-          </a:solidFill>
-          <a:ln/>
-        </p:spPr>
-      </p:sp>
-      <p:sp>
-        <p:nvSpPr>
-          <p:cNvPr id="32" name="Text 30"/>
-          <p:cNvSpPr/>
-          <p:nvPr/>
-        </p:nvSpPr>
-        <p:spPr>
-          <a:xfrm>
-            <a:off x="6903720" y="3703320"/>
-            <a:ext cx="5029200" cy="320040"/>
-          </a:xfrm>
-          <a:prstGeom prst="rect">
-            <a:avLst/>
-          </a:prstGeom>
-          <a:noFill/>
-          <a:ln/>
-        </p:spPr>
-        <p:txBody>
-          <a:bodyPr wrap="square" lIns="0" tIns="0" rIns="0" bIns="0" rtlCol="0" anchor="ctr"/>
-          <a:lstStyle/>
-          <a:p>
-            <a:pPr indent="0" marL="0">
-              <a:buNone/>
-            </a:pPr>
-            <a:r>
-              <a:rPr lang="en-US" sz="1200" dirty="0">
-                <a:solidFill>
-                  <a:srgbClr val="0F172A"/>
-                </a:solidFill>
-                <a:latin typeface="Calibri" pitchFamily="34" charset="0"/>
-                <a:ea typeface="Calibri" pitchFamily="34" charset="-122"/>
-                <a:cs typeface="Calibri" pitchFamily="34" charset="-120"/>
-              </a:rPr>
-              <a:t>Algoritmi grafuri (Dijkstra, BFS, DFS)</a:t>
-            </a:r>
-            <a:endParaRPr lang="en-US" sz="1200" dirty="0"/>
-          </a:p>
-        </p:txBody>
-      </p:sp>
-      <p:sp>
-        <p:nvSpPr>
-          <p:cNvPr id="33" name="Shape 31"/>
-          <p:cNvSpPr/>
-          <p:nvPr/>
-        </p:nvSpPr>
-        <p:spPr>
-          <a:xfrm>
-            <a:off x="6583680" y="4251960"/>
-            <a:ext cx="182880" cy="182880"/>
-          </a:xfrm>
-          <a:prstGeom prst="rect">
-            <a:avLst/>
-          </a:prstGeom>
-          <a:solidFill>
-            <a:srgbClr val="F59E0B"/>
-          </a:solidFill>
-          <a:ln/>
-        </p:spPr>
-      </p:sp>
-      <p:sp>
-        <p:nvSpPr>
-          <p:cNvPr id="34" name="Text 32"/>
-          <p:cNvSpPr/>
-          <p:nvPr/>
-        </p:nvSpPr>
-        <p:spPr>
-          <a:xfrm>
-            <a:off x="6903720" y="4206240"/>
-            <a:ext cx="5029200" cy="320040"/>
-          </a:xfrm>
-          <a:prstGeom prst="rect">
-            <a:avLst/>
-          </a:prstGeom>
-          <a:noFill/>
-          <a:ln/>
-        </p:spPr>
-        <p:txBody>
-          <a:bodyPr wrap="square" lIns="0" tIns="0" rIns="0" bIns="0" rtlCol="0" anchor="ctr"/>
-          <a:lstStyle/>
-          <a:p>
-            <a:pPr indent="0" marL="0">
-              <a:buNone/>
-            </a:pPr>
-            <a:r>
-              <a:rPr lang="en-US" sz="1200" dirty="0">
-                <a:solidFill>
-                  <a:srgbClr val="0F172A"/>
-                </a:solidFill>
-                <a:latin typeface="Calibri" pitchFamily="34" charset="0"/>
-                <a:ea typeface="Calibri" pitchFamily="34" charset="-122"/>
-                <a:cs typeface="Calibri" pitchFamily="34" charset="-120"/>
-              </a:rPr>
-              <a:t>Structuri arborescente (BST, AVL)</a:t>
-            </a:r>
-            <a:endParaRPr lang="en-US" sz="1200" dirty="0"/>
-          </a:p>
-        </p:txBody>
-      </p:sp>
-      <p:sp>
-        <p:nvSpPr>
-          <p:cNvPr id="35" name="Shape 33"/>
-          <p:cNvSpPr/>
-          <p:nvPr/>
-        </p:nvSpPr>
-        <p:spPr>
-          <a:xfrm>
-            <a:off x="6583680" y="4754880"/>
-            <a:ext cx="182880" cy="182880"/>
-          </a:xfrm>
-          <a:prstGeom prst="rect">
-            <a:avLst/>
-          </a:prstGeom>
-          <a:solidFill>
-            <a:srgbClr val="06B6D4"/>
-          </a:solidFill>
-          <a:ln/>
-        </p:spPr>
-      </p:sp>
-      <p:sp>
-        <p:nvSpPr>
-          <p:cNvPr id="36" name="Text 34"/>
-          <p:cNvSpPr/>
-          <p:nvPr/>
-        </p:nvSpPr>
-        <p:spPr>
-          <a:xfrm>
-            <a:off x="6903720" y="4709160"/>
-            <a:ext cx="5029200" cy="320040"/>
-          </a:xfrm>
-          <a:prstGeom prst="rect">
-            <a:avLst/>
-          </a:prstGeom>
-          <a:noFill/>
-          <a:ln/>
-        </p:spPr>
-        <p:txBody>
-          <a:bodyPr wrap="square" lIns="0" tIns="0" rIns="0" bIns="0" rtlCol="0" anchor="ctr"/>
-          <a:lstStyle/>
-          <a:p>
-            <a:pPr indent="0" marL="0">
-              <a:buNone/>
-            </a:pPr>
-            <a:r>
-              <a:rPr lang="en-US" sz="1200" dirty="0">
-                <a:solidFill>
-                  <a:srgbClr val="0F172A"/>
-                </a:solidFill>
-                <a:latin typeface="Calibri" pitchFamily="34" charset="0"/>
-                <a:ea typeface="Calibri" pitchFamily="34" charset="-122"/>
-                <a:cs typeface="Calibri" pitchFamily="34" charset="-120"/>
-              </a:rPr>
-              <a:t>Suport i18n romana / engleza</a:t>
-            </a:r>
-            <a:endParaRPr lang="en-US" sz="1200" dirty="0"/>
-          </a:p>
-        </p:txBody>
-      </p:sp>
-      <p:sp>
-        <p:nvSpPr>
-          <p:cNvPr id="37" name="Shape 35"/>
-          <p:cNvSpPr/>
-          <p:nvPr/>
-        </p:nvSpPr>
-        <p:spPr>
-          <a:xfrm>
-            <a:off x="6583680" y="5257800"/>
-            <a:ext cx="182880" cy="182880"/>
-          </a:xfrm>
-          <a:prstGeom prst="rect">
-            <a:avLst/>
-          </a:prstGeom>
-          <a:solidFill>
-            <a:srgbClr val="06B6D4"/>
-          </a:solidFill>
-          <a:ln/>
-        </p:spPr>
-      </p:sp>
-      <p:sp>
-        <p:nvSpPr>
-          <p:cNvPr id="38" name="Text 36"/>
-          <p:cNvSpPr/>
-          <p:nvPr/>
-        </p:nvSpPr>
-        <p:spPr>
-          <a:xfrm>
-            <a:off x="6903720" y="5212080"/>
-            <a:ext cx="5029200" cy="320040"/>
-          </a:xfrm>
-          <a:prstGeom prst="rect">
-            <a:avLst/>
-          </a:prstGeom>
-          <a:noFill/>
-          <a:ln/>
-        </p:spPr>
-        <p:txBody>
-          <a:bodyPr wrap="square" lIns="0" tIns="0" rIns="0" bIns="0" rtlCol="0" anchor="ctr"/>
-          <a:lstStyle/>
-          <a:p>
-            <a:pPr indent="0" marL="0">
-              <a:buNone/>
-            </a:pPr>
-            <a:r>
-              <a:rPr lang="en-US" sz="1200" dirty="0">
-                <a:solidFill>
-                  <a:srgbClr val="0F172A"/>
-                </a:solidFill>
-                <a:latin typeface="Calibri" pitchFamily="34" charset="0"/>
-                <a:ea typeface="Calibri" pitchFamily="34" charset="-122"/>
-                <a:cs typeface="Calibri" pitchFamily="34" charset="-120"/>
-              </a:rPr>
-              <a:t>Backup automat DB + Sentry monitoring</a:t>
-            </a:r>
-            <a:endParaRPr lang="en-US" sz="1200" dirty="0"/>
-          </a:p>
-        </p:txBody>
-      </p:sp>
-      <p:sp>
-        <p:nvSpPr>
-          <p:cNvPr id="39" name="Text 37"/>
-          <p:cNvSpPr/>
-          <p:nvPr/>
-        </p:nvSpPr>
-        <p:spPr>
-          <a:xfrm>
-            <a:off x="457200" y="6446520"/>
-            <a:ext cx="3657600" cy="274320"/>
-          </a:xfrm>
-          <a:prstGeom prst="rect">
-            <a:avLst/>
-          </a:prstGeom>
-          <a:noFill/>
-          <a:ln/>
-        </p:spPr>
-        <p:txBody>
-          <a:bodyPr wrap="square" lIns="0" tIns="0" rIns="0" bIns="0" rtlCol="0" anchor="ctr"/>
-          <a:lstStyle/>
-          <a:p>
-            <a:pPr indent="0" marL="0">
-              <a:buNone/>
-            </a:pPr>
-            <a:r>
-              <a:rPr lang="en-US" sz="900" dirty="0">
-                <a:solidFill>
-                  <a:srgbClr val="64748B"/>
-                </a:solidFill>
-                <a:latin typeface="Calibri" pitchFamily="34" charset="0"/>
-                <a:ea typeface="Calibri" pitchFamily="34" charset="-122"/>
-                <a:cs typeface="Calibri" pitchFamily="34" charset="-120"/>
-              </a:rPr>
-              <a:t>OffByOne Academy</a:t>
-            </a:r>
-            <a:endParaRPr lang="en-US" sz="900" dirty="0"/>
-          </a:p>
-        </p:txBody>
-      </p:sp>
-      <p:sp>
-        <p:nvSpPr>
-          <p:cNvPr id="40" name="Text 38"/>
-          <p:cNvSpPr/>
-          <p:nvPr/>
-        </p:nvSpPr>
-        <p:spPr>
-          <a:xfrm>
-            <a:off x="10789920" y="6446520"/>
-            <a:ext cx="914400" cy="274320"/>
-          </a:xfrm>
-          <a:prstGeom prst="rect">
-            <a:avLst/>
-          </a:prstGeom>
-          <a:noFill/>
-          <a:ln/>
-        </p:spPr>
-        <p:txBody>
-          <a:bodyPr wrap="square" lIns="0" tIns="0" rIns="0" bIns="0" rtlCol="0" anchor="ctr"/>
-          <a:lstStyle/>
-          <a:p>
-            <a:pPr algn="r" indent="0" marL="0">
-              <a:buNone/>
-            </a:pPr>
-            <a:r>
-              <a:rPr lang="en-US" sz="900" dirty="0">
-                <a:solidFill>
-                  <a:srgbClr val="64748B"/>
-                </a:solidFill>
-                <a:latin typeface="Calibri" pitchFamily="34" charset="0"/>
-                <a:ea typeface="Calibri" pitchFamily="34" charset="-122"/>
-                <a:cs typeface="Calibri" pitchFamily="34" charset="-120"/>
-              </a:rPr>
-              <a:t>7 / 8</a:t>
-            </a:r>
-            <a:endParaRPr lang="en-US" sz="900" dirty="0"/>
-          </a:p>
-        </p:txBody>
-      </p:sp>
-    </p:spTree>
-  </p:cSld>
-  <p:clrMapOvr>
-    <a:masterClrMapping/>
-  </p:clrMapOvr>
-</p:sld>
-</file>
-
-<file path=ppt/slides/slide8.xml><?xml version="1.0" encoding="utf-8"?>
-<p:sld xmlns:a="http://schemas.openxmlformats.org/drawingml/2006/main" xmlns:r="http://schemas.openxmlformats.org/officeDocument/2006/relationships" xmlns:p="http://schemas.openxmlformats.org/presentationml/2006/main">
-  <p:cSld name="Slide 8">
-    <p:bg>
-      <p:bgPr>
-        <a:solidFill>
-          <a:srgbClr val="0F1023"/>
-        </a:solidFill>
-      </p:bgPr>
-    </p:bg>
-    <p:spTree>
-      <p:nvGrpSpPr>
-        <p:cNvPr id="1" name=""/>
-        <p:cNvGrpSpPr/>
-        <p:nvPr/>
-      </p:nvGrpSpPr>
-      <p:grpSpPr>
-        <a:xfrm>
-          <a:off x="0" y="0"/>
-          <a:ext cx="0" cy="0"/>
-          <a:chOff x="0" y="0"/>
-          <a:chExt cx="0" cy="0"/>
-        </a:xfrm>
-      </p:grpSpPr>
-      <p:sp>
-        <p:nvSpPr>
-          <p:cNvPr id="2" name="Shape 0"/>
-          <p:cNvSpPr/>
-          <p:nvPr/>
-        </p:nvSpPr>
-        <p:spPr>
-          <a:xfrm>
             <a:off x="0" y="0"/>
             <a:ext cx="137160" cy="6858000"/>
           </a:xfrm>
@@ -8714,24 +7945,24 @@
         </p:nvSpPr>
         <p:spPr>
           <a:xfrm>
-            <a:off x="640080" y="914400"/>
-            <a:ext cx="7315200" cy="365760"/>
-          </a:xfrm>
-          <a:prstGeom prst="rect">
-            <a:avLst/>
-          </a:prstGeom>
-          <a:noFill/>
-          <a:ln/>
-        </p:spPr>
-        <p:txBody>
-          <a:bodyPr wrap="square" lIns="0" tIns="0" rIns="0" bIns="0" rtlCol="0" anchor="ctr"/>
-          <a:lstStyle/>
-          <a:p>
-            <a:pPr indent="0" marL="0">
-              <a:buNone/>
-            </a:pPr>
-            <a:r>
-              <a:rPr lang="en-US" sz="1300" b="1" spc="800" kern="0" dirty="0">
+            <a:off x="640080" y="1280160"/>
+            <a:ext cx="9144000" cy="365760"/>
+          </a:xfrm>
+          <a:prstGeom prst="rect">
+            <a:avLst/>
+          </a:prstGeom>
+          <a:noFill/>
+          <a:ln/>
+        </p:spPr>
+        <p:txBody>
+          <a:bodyPr wrap="square" lIns="0" tIns="0" rIns="0" bIns="0" rtlCol="0" anchor="ctr"/>
+          <a:lstStyle/>
+          <a:p>
+            <a:pPr marL="0" indent="0">
+              <a:buNone/>
+            </a:pPr>
+            <a:r>
+              <a:rPr lang="en-US" sz="1300" b="1" kern="0" spc="800" dirty="0">
                 <a:solidFill>
                   <a:srgbClr val="06B6D4"/>
                 </a:solidFill>
@@ -8739,7 +7970,7 @@
                 <a:ea typeface="Calibri" pitchFamily="34" charset="-122"/>
                 <a:cs typeface="Calibri" pitchFamily="34" charset="-120"/>
               </a:rPr>
-              <a:t>MULTUMIRI</a:t>
+              <a:t>OFFBYONE ACADEMY</a:t>
             </a:r>
             <a:endParaRPr lang="en-US" sz="1300" dirty="0"/>
           </a:p>
@@ -8753,24 +7984,24 @@
         </p:nvSpPr>
         <p:spPr>
           <a:xfrm>
-            <a:off x="640080" y="1463040"/>
-            <a:ext cx="10972800" cy="1463040"/>
-          </a:xfrm>
-          <a:prstGeom prst="rect">
-            <a:avLst/>
-          </a:prstGeom>
-          <a:noFill/>
-          <a:ln/>
-        </p:spPr>
-        <p:txBody>
-          <a:bodyPr wrap="square" lIns="0" tIns="0" rIns="0" bIns="0" rtlCol="0" anchor="ctr"/>
-          <a:lstStyle/>
-          <a:p>
-            <a:pPr indent="0" marL="0">
-              <a:buNone/>
-            </a:pPr>
-            <a:r>
-              <a:rPr lang="en-US" sz="10000" b="1" dirty="0">
+            <a:off x="640080" y="1828800"/>
+            <a:ext cx="10972800" cy="1645920"/>
+          </a:xfrm>
+          <a:prstGeom prst="rect">
+            <a:avLst/>
+          </a:prstGeom>
+          <a:noFill/>
+          <a:ln/>
+        </p:spPr>
+        <p:txBody>
+          <a:bodyPr wrap="square" lIns="0" tIns="0" rIns="0" bIns="0" rtlCol="0" anchor="ctr"/>
+          <a:lstStyle/>
+          <a:p>
+            <a:pPr marL="0" indent="0">
+              <a:buNone/>
+            </a:pPr>
+            <a:r>
+              <a:rPr lang="en-US" sz="11000" b="1">
                 <a:solidFill>
                   <a:srgbClr val="FFFFFF"/>
                 </a:solidFill>
@@ -8778,9 +8009,9 @@
                 <a:ea typeface="Calibri" pitchFamily="34" charset="-122"/>
                 <a:cs typeface="Calibri" pitchFamily="34" charset="-120"/>
               </a:rPr>
-              <a:t>Intrebari?</a:t>
-            </a:r>
-            <a:endParaRPr lang="en-US" sz="10000" dirty="0"/>
+              <a:t>Mulțumim!</a:t>
+            </a:r>
+            <a:endParaRPr lang="en-US" sz="11000" dirty="0"/>
           </a:p>
         </p:txBody>
       </p:sp>
@@ -8792,7 +8023,7 @@
         </p:nvSpPr>
         <p:spPr>
           <a:xfrm>
-            <a:off x="640080" y="3291840"/>
+            <a:off x="640080" y="3749040"/>
             <a:ext cx="1828800" cy="36576"/>
           </a:xfrm>
           <a:prstGeom prst="rect">
@@ -8812,24 +8043,24 @@
         </p:nvSpPr>
         <p:spPr>
           <a:xfrm>
-            <a:off x="640080" y="3566160"/>
-            <a:ext cx="10058400" cy="365760"/>
-          </a:xfrm>
-          <a:prstGeom prst="rect">
-            <a:avLst/>
-          </a:prstGeom>
-          <a:noFill/>
-          <a:ln/>
-        </p:spPr>
-        <p:txBody>
-          <a:bodyPr wrap="square" lIns="0" tIns="0" rIns="0" bIns="0" rtlCol="0" anchor="ctr"/>
-          <a:lstStyle/>
-          <a:p>
-            <a:pPr indent="0" marL="0">
-              <a:buNone/>
-            </a:pPr>
-            <a:r>
-              <a:rPr lang="en-US" sz="1600" i="1" dirty="0">
+            <a:off x="640080" y="4023360"/>
+            <a:ext cx="10972800" cy="548640"/>
+          </a:xfrm>
+          <a:prstGeom prst="rect">
+            <a:avLst/>
+          </a:prstGeom>
+          <a:noFill/>
+          <a:ln/>
+        </p:spPr>
+        <p:txBody>
+          <a:bodyPr wrap="square" lIns="0" tIns="0" rIns="0" bIns="0" rtlCol="0" anchor="ctr"/>
+          <a:lstStyle/>
+          <a:p>
+            <a:pPr marL="0" indent="0">
+              <a:buNone/>
+            </a:pPr>
+            <a:r>
+              <a:rPr lang="en-US" sz="2200" i="1">
                 <a:solidFill>
                   <a:srgbClr val="E5E7EB"/>
                 </a:solidFill>
@@ -8837,7 +8068,85 @@
                 <a:ea typeface="Calibri" pitchFamily="34" charset="-122"/>
                 <a:cs typeface="Calibri" pitchFamily="34" charset="-120"/>
               </a:rPr>
-              <a:t>Multumim coordonatorilor pentru ghidare si rabdare:</a:t>
+              <a:t>În continuare urmează o demonstrație practică a platformei.</a:t>
+            </a:r>
+            <a:endParaRPr lang="en-US" sz="2200" dirty="0"/>
+          </a:p>
+        </p:txBody>
+      </p:sp>
+      <p:sp>
+        <p:nvSpPr>
+          <p:cNvPr id="9" name="Text 7"/>
+          <p:cNvSpPr/>
+          <p:nvPr/>
+        </p:nvSpPr>
+        <p:spPr>
+          <a:xfrm>
+            <a:off x="640080" y="5349240"/>
+            <a:ext cx="3657600" cy="274320"/>
+          </a:xfrm>
+          <a:prstGeom prst="rect">
+            <a:avLst/>
+          </a:prstGeom>
+          <a:noFill/>
+          <a:ln/>
+        </p:spPr>
+        <p:txBody>
+          <a:bodyPr wrap="square" lIns="0" tIns="0" rIns="0" bIns="0" rtlCol="0" anchor="ctr"/>
+          <a:lstStyle/>
+          <a:p>
+            <a:pPr marL="0" indent="0">
+              <a:buNone/>
+            </a:pPr>
+            <a:r>
+              <a:rPr lang="en-US" sz="1000" b="1" kern="0" spc="400" dirty="0">
+                <a:solidFill>
+                  <a:srgbClr val="06B6D4"/>
+                </a:solidFill>
+                <a:latin typeface="Calibri" pitchFamily="34" charset="0"/>
+                <a:ea typeface="Calibri" pitchFamily="34" charset="-122"/>
+                <a:cs typeface="Calibri" pitchFamily="34" charset="-120"/>
+              </a:rPr>
+              <a:t>ECHIPA</a:t>
+            </a:r>
+            <a:endParaRPr lang="en-US" sz="1000" dirty="0"/>
+          </a:p>
+        </p:txBody>
+      </p:sp>
+      <p:sp>
+        <p:nvSpPr>
+          <p:cNvPr id="10" name="Text 8"/>
+          <p:cNvSpPr/>
+          <p:nvPr/>
+        </p:nvSpPr>
+        <p:spPr>
+          <a:xfrm>
+            <a:off x="640080" y="5669280"/>
+            <a:ext cx="9144000" cy="365760"/>
+          </a:xfrm>
+          <a:prstGeom prst="rect">
+            <a:avLst/>
+          </a:prstGeom>
+          <a:noFill/>
+          <a:ln/>
+        </p:spPr>
+        <p:txBody>
+          <a:bodyPr wrap="square" lIns="0" tIns="0" rIns="0" bIns="0" rtlCol="0" anchor="ctr"/>
+          <a:lstStyle/>
+          <a:p>
+            <a:pPr marL="0" indent="0">
+              <a:buNone/>
+            </a:pPr>
+            <a:r>
+              <a:rPr lang="en-US" sz="1600" b="1">
+                <a:solidFill>
+                  <a:srgbClr val="FFFFFF"/>
+                </a:solidFill>
+                <a:latin typeface="Calibri" pitchFamily="34" charset="0"/>
+                <a:ea typeface="Calibri" pitchFamily="34" charset="-122"/>
+                <a:cs typeface="Calibri" pitchFamily="34" charset="-120"/>
+              </a:rPr>
+              <a:t>Șortan Eduard-Cătălin · Băloi Dorian-Liviu</a:t>
             </a:r>
             <a:endParaRPr lang="en-US" sz="1600" dirty="0"/>
           </a:p>
@@ -8845,130 +8154,13 @@
       </p:sp>
       <p:sp>
         <p:nvSpPr>
-          <p:cNvPr id="9" name="Text 7"/>
-          <p:cNvSpPr/>
-          <p:nvPr/>
-        </p:nvSpPr>
-        <p:spPr>
-          <a:xfrm>
-            <a:off x="640080" y="4023360"/>
-            <a:ext cx="10058400" cy="457200"/>
-          </a:xfrm>
-          <a:prstGeom prst="rect">
-            <a:avLst/>
-          </a:prstGeom>
-          <a:noFill/>
-          <a:ln/>
-        </p:spPr>
-        <p:txBody>
-          <a:bodyPr wrap="square" lIns="0" tIns="0" rIns="0" bIns="0" rtlCol="0" anchor="ctr"/>
-          <a:lstStyle/>
-          <a:p>
-            <a:pPr indent="0" marL="0">
-              <a:buNone/>
-            </a:pPr>
-            <a:r>
-              <a:rPr lang="en-US" sz="2000" b="1" dirty="0">
-                <a:solidFill>
-                  <a:srgbClr val="FFFFFF"/>
-                </a:solidFill>
-                <a:latin typeface="Calibri" pitchFamily="34" charset="0"/>
-                <a:ea typeface="Calibri" pitchFamily="34" charset="-122"/>
-                <a:cs typeface="Calibri" pitchFamily="34" charset="-120"/>
-              </a:rPr>
-              <a:t>Conf. Dr. Muscalagiu Ionel · As. Dr. Ing. Rat Cezara-Liliana</a:t>
-            </a:r>
-            <a:endParaRPr lang="en-US" sz="2000" dirty="0"/>
-          </a:p>
-        </p:txBody>
-      </p:sp>
-      <p:sp>
-        <p:nvSpPr>
-          <p:cNvPr id="10" name="Text 8"/>
-          <p:cNvSpPr/>
-          <p:nvPr/>
-        </p:nvSpPr>
-        <p:spPr>
-          <a:xfrm>
-            <a:off x="640080" y="5212080"/>
-            <a:ext cx="3657600" cy="274320"/>
-          </a:xfrm>
-          <a:prstGeom prst="rect">
-            <a:avLst/>
-          </a:prstGeom>
-          <a:noFill/>
-          <a:ln/>
-        </p:spPr>
-        <p:txBody>
-          <a:bodyPr wrap="square" lIns="0" tIns="0" rIns="0" bIns="0" rtlCol="0" anchor="ctr"/>
-          <a:lstStyle/>
-          <a:p>
-            <a:pPr indent="0" marL="0">
-              <a:buNone/>
-            </a:pPr>
-            <a:r>
-              <a:rPr lang="en-US" sz="1000" b="1" spc="400" kern="0" dirty="0">
-                <a:solidFill>
-                  <a:srgbClr val="06B6D4"/>
-                </a:solidFill>
-                <a:latin typeface="Calibri" pitchFamily="34" charset="0"/>
-                <a:ea typeface="Calibri" pitchFamily="34" charset="-122"/>
-                <a:cs typeface="Calibri" pitchFamily="34" charset="-120"/>
-              </a:rPr>
-              <a:t>ECHIPA</a:t>
-            </a:r>
-            <a:endParaRPr lang="en-US" sz="1000" dirty="0"/>
-          </a:p>
-        </p:txBody>
-      </p:sp>
-      <p:sp>
-        <p:nvSpPr>
           <p:cNvPr id="11" name="Text 9"/>
           <p:cNvSpPr/>
           <p:nvPr/>
         </p:nvSpPr>
         <p:spPr>
           <a:xfrm>
-            <a:off x="640080" y="5532120"/>
-            <a:ext cx="7315200" cy="365760"/>
-          </a:xfrm>
-          <a:prstGeom prst="rect">
-            <a:avLst/>
-          </a:prstGeom>
-          <a:noFill/>
-          <a:ln/>
-        </p:spPr>
-        <p:txBody>
-          <a:bodyPr wrap="square" lIns="0" tIns="0" rIns="0" bIns="0" rtlCol="0" anchor="ctr"/>
-          <a:lstStyle/>
-          <a:p>
-            <a:pPr indent="0" marL="0">
-              <a:buNone/>
-            </a:pPr>
-            <a:r>
-              <a:rPr lang="en-US" sz="1600" b="1" dirty="0">
-                <a:solidFill>
-                  <a:srgbClr val="FFFFFF"/>
-                </a:solidFill>
-                <a:latin typeface="Calibri" pitchFamily="34" charset="0"/>
-                <a:ea typeface="Calibri" pitchFamily="34" charset="-122"/>
-                <a:cs typeface="Calibri" pitchFamily="34" charset="-120"/>
-              </a:rPr>
-              <a:t>Sortan Eduard-Catalin · Baloi Dorian-Liviu</a:t>
-            </a:r>
-            <a:endParaRPr lang="en-US" sz="1600" dirty="0"/>
-          </a:p>
-        </p:txBody>
-      </p:sp>
-      <p:sp>
-        <p:nvSpPr>
-          <p:cNvPr id="12" name="Text 10"/>
-          <p:cNvSpPr/>
-          <p:nvPr/>
-        </p:nvSpPr>
-        <p:spPr>
-          <a:xfrm>
-            <a:off x="640080" y="6035040"/>
+            <a:off x="640080" y="6126480"/>
             <a:ext cx="10972800" cy="365760"/>
           </a:xfrm>
           <a:prstGeom prst="rect">
@@ -8981,11 +8173,11 @@
           <a:bodyPr wrap="square" lIns="0" tIns="0" rIns="0" bIns="0" rtlCol="0" anchor="ctr"/>
           <a:lstStyle/>
           <a:p>
-            <a:pPr indent="0" marL="0">
-              <a:buNone/>
-            </a:pPr>
-            <a:r>
-              <a:rPr lang="en-US" sz="1200" i="1" dirty="0">
+            <a:pPr marL="0" indent="0">
+              <a:buNone/>
+            </a:pPr>
+            <a:r>
+              <a:rPr lang="en-US" sz="1200" i="1">
                 <a:solidFill>
                   <a:srgbClr val="64748B"/>
                 </a:solidFill>
@@ -8993,7 +8185,7 @@
                 <a:ea typeface="Calibri" pitchFamily="34" charset="-122"/>
                 <a:cs typeface="Calibri" pitchFamily="34" charset="-120"/>
               </a:rPr>
-              <a:t>Universitatea Politehnica Timisoara · Facultatea de Inginerie Hunedoara</a:t>
+              <a:t>Coordonatori: Conf. dr. Ionel Muscalagiu · As. dr. ing. Cezara-Liliana Raț</a:t>
             </a:r>
             <a:endParaRPr lang="en-US" sz="1200" dirty="0"/>
           </a:p>
@@ -9300,4 +8492,319 @@
     </a:ext>
   </a:extLst>
 </a:theme>
+</file>
+
+<file path=ppt/theme/theme2.xml><?xml version="1.0" encoding="utf-8"?>
+<a:theme xmlns:a="http://schemas.openxmlformats.org/drawingml/2006/main" name="Office Theme">
+  <a:themeElements>
+    <a:clrScheme name="Office">
+      <a:dk1>
+        <a:sysClr val="windowText" lastClr="000000"/>
+      </a:dk1>
+      <a:lt1>
+        <a:sysClr val="window" lastClr="FFFFFF"/>
+      </a:lt1>
+      <a:dk2>
+        <a:srgbClr val="0E2841"/>
+      </a:dk2>
+      <a:lt2>
+        <a:srgbClr val="E8E8E8"/>
+      </a:lt2>
+      <a:accent1>
+        <a:srgbClr val="156082"/>
+      </a:accent1>
+      <a:accent2>
+        <a:srgbClr val="E97132"/>
+      </a:accent2>
+      <a:accent3>
+        <a:srgbClr val="196B24"/>
+      </a:accent3>
+      <a:accent4>
+        <a:srgbClr val="0F9ED5"/>
+      </a:accent4>
+      <a:accent5>
+        <a:srgbClr val="A02B93"/>
+      </a:accent5>
+      <a:accent6>
+        <a:srgbClr val="4EA72E"/>
+      </a:accent6>
+      <a:hlink>
+        <a:srgbClr val="467886"/>
+      </a:hlink>
+      <a:folHlink>
+        <a:srgbClr val="96607D"/>
+      </a:folHlink>
+    </a:clrScheme>
+    <a:fontScheme name="Office">
+      <a:majorFont>
+        <a:latin typeface="Aptos Display" panose="02110004020202020204"/>
+        <a:ea typeface=""/>
+        <a:cs typeface=""/>
+        <a:font script="Jpan" typeface="游ゴシック Light"/>
+        <a:font script="Hang" typeface="맑은 고딕"/>
+        <a:font script="Hans" typeface="等线 Light"/>
+        <a:font script="Hant" typeface="新細明體"/>
+        <a:font script="Arab" typeface="Times New Roman"/>
+        <a:font script="Hebr" typeface="Times New Roman"/>
+        <a:font script="Thai" typeface="Angsana New"/>
+        <a:font script="Ethi" typeface="Nyala"/>
+        <a:font script="Beng" typeface="Vrinda"/>
+        <a:font script="Gujr" typeface="Shruti"/>
+        <a:font script="Khmr" typeface="MoolBoran"/>
+        <a:font script="Knda" typeface="Tunga"/>
+        <a:font script="Guru" typeface="Raavi"/>
+        <a:font script="Cans" typeface="Euphemia"/>
+        <a:font script="Cher" typeface="Plantagenet Cherokee"/>
+        <a:font script="Yiii" typeface="Microsoft Yi Baiti"/>
+        <a:font script="Tibt" typeface="Microsoft Himalaya"/>
+        <a:font script="Thaa" typeface="MV Boli"/>
+        <a:font script="Deva" typeface="Mangal"/>
+        <a:font script="Telu" typeface="Gautami"/>
+        <a:font script="Taml" typeface="Latha"/>
+        <a:font script="Syrc" typeface="Estrangelo Edessa"/>
+        <a:font script="Orya" typeface="Kalinga"/>
+        <a:font script="Mlym" typeface="Kartika"/>
+        <a:font script="Laoo" typeface="DokChampa"/>
+        <a:font script="Sinh" typeface="Iskoola Pota"/>
+        <a:font script="Mong" typeface="Mongolian Baiti"/>
+        <a:font script="Viet" typeface="Times New Roman"/>
+        <a:font script="Uigh" typeface="Microsoft Uighur"/>
+        <a:font script="Geor" typeface="Sylfaen"/>
+        <a:font script="Armn" typeface="Arial"/>
+        <a:font script="Bugi" typeface="Leelawadee UI"/>
+        <a:font script="Bopo" typeface="Microsoft JhengHei"/>
+        <a:font script="Java" typeface="Javanese Text"/>
+        <a:font script="Lisu" typeface="Segoe UI"/>
+        <a:font script="Mymr" typeface="Myanmar Text"/>
+        <a:font script="Nkoo" typeface="Ebrima"/>
+        <a:font script="Olck" typeface="Nirmala UI"/>
+        <a:font script="Osma" typeface="Ebrima"/>
+        <a:font script="Phag" typeface="Phagspa"/>
+        <a:font script="Syrn" typeface="Estrangelo Edessa"/>
+        <a:font script="Syrj" typeface="Estrangelo Edessa"/>
+        <a:font script="Syre" typeface="Estrangelo Edessa"/>
+        <a:font script="Sora" typeface="Nirmala UI"/>
+        <a:font script="Tale" typeface="Microsoft Tai Le"/>
+        <a:font script="Talu" typeface="Microsoft New Tai Lue"/>
+        <a:font script="Tfng" typeface="Ebrima"/>
+      </a:majorFont>
+      <a:minorFont>
+        <a:latin typeface="Aptos" panose="02110004020202020204"/>
+        <a:ea typeface=""/>
+        <a:cs typeface=""/>
+        <a:font script="Jpan" typeface="游ゴシック"/>
+        <a:font script="Hang" typeface="맑은 고딕"/>
+        <a:font script="Hans" typeface="等线"/>
+        <a:font script="Hant" typeface="新細明體"/>
+        <a:font script="Arab" typeface="Arial"/>
+        <a:font script="Hebr" typeface="Arial"/>
+        <a:font script="Thai" typeface="Cordia New"/>
+        <a:font script="Ethi" typeface="Nyala"/>
+        <a:font script="Beng" typeface="Vrinda"/>
+        <a:font script="Gujr" typeface="Shruti"/>
+        <a:font script="Khmr" typeface="DaunPenh"/>
+        <a:font script="Knda" typeface="Tunga"/>
+        <a:font script="Guru" typeface="Raavi"/>
+        <a:font script="Cans" typeface="Euphemia"/>
+        <a:font script="Cher" typeface="Plantagenet Cherokee"/>
+        <a:font script="Yiii" typeface="Microsoft Yi Baiti"/>
+        <a:font script="Tibt" typeface="Microsoft Himalaya"/>
+        <a:font script="Thaa" typeface="MV Boli"/>
+        <a:font script="Deva" typeface="Mangal"/>
+        <a:font script="Telu" typeface="Gautami"/>
+        <a:font script="Taml" typeface="Latha"/>
+        <a:font script="Syrc" typeface="Estrangelo Edessa"/>
+        <a:font script="Orya" typeface="Kalinga"/>
+        <a:font script="Mlym" typeface="Kartika"/>
+        <a:font script="Laoo" typeface="DokChampa"/>
+        <a:font script="Sinh" typeface="Iskoola Pota"/>
+        <a:font script="Mong" typeface="Mongolian Baiti"/>
+        <a:font script="Viet" typeface="Arial"/>
+        <a:font script="Uigh" typeface="Microsoft Uighur"/>
+        <a:font script="Geor" typeface="Sylfaen"/>
+        <a:font script="Armn" typeface="Arial"/>
+        <a:font script="Bugi" typeface="Leelawadee UI"/>
+        <a:font script="Bopo" typeface="Microsoft JhengHei"/>
+        <a:font script="Java" typeface="Javanese Text"/>
+        <a:font script="Lisu" typeface="Segoe UI"/>
+        <a:font script="Mymr" typeface="Myanmar Text"/>
+        <a:font script="Nkoo" typeface="Ebrima"/>
+        <a:font script="Olck" typeface="Nirmala UI"/>
+        <a:font script="Osma" typeface="Ebrima"/>
+        <a:font script="Phag" typeface="Phagspa"/>
+        <a:font script="Syrn" typeface="Estrangelo Edessa"/>
+        <a:font script="Syrj" typeface="Estrangelo Edessa"/>
+        <a:font script="Syre" typeface="Estrangelo Edessa"/>
+        <a:font script="Sora" typeface="Nirmala UI"/>
+        <a:font script="Tale" typeface="Microsoft Tai Le"/>
+        <a:font script="Talu" typeface="Microsoft New Tai Lue"/>
+        <a:font script="Tfng" typeface="Ebrima"/>
+      </a:minorFont>
+    </a:fontScheme>
+    <a:fmtScheme name="Office">
+      <a:fillStyleLst>
+        <a:solidFill>
+          <a:schemeClr val="phClr"/>
+        </a:solidFill>
+        <a:gradFill rotWithShape="1">
+          <a:gsLst>
+            <a:gs pos="0">
+              <a:schemeClr val="phClr">
+                <a:lumMod val="110000"/>
+                <a:satMod val="105000"/>
+                <a:tint val="67000"/>
+              </a:schemeClr>
+            </a:gs>
+            <a:gs pos="50000">
+              <a:schemeClr val="phClr">
+                <a:lumMod val="105000"/>
+                <a:satMod val="103000"/>
+                <a:tint val="73000"/>
+              </a:schemeClr>
+            </a:gs>
+            <a:gs pos="100000">
+              <a:schemeClr val="phClr">
+                <a:lumMod val="105000"/>
+                <a:satMod val="109000"/>
+                <a:tint val="81000"/>
+              </a:schemeClr>
+            </a:gs>
+          </a:gsLst>
+          <a:lin ang="5400000" scaled="0"/>
+        </a:gradFill>
+        <a:gradFill rotWithShape="1">
+          <a:gsLst>
+            <a:gs pos="0">
+              <a:schemeClr val="phClr">
+                <a:satMod val="103000"/>
+                <a:lumMod val="102000"/>
+                <a:tint val="94000"/>
+              </a:schemeClr>
+            </a:gs>
+            <a:gs pos="50000">
+              <a:schemeClr val="phClr">
+                <a:satMod val="110000"/>
+                <a:lumMod val="100000"/>
+                <a:shade val="100000"/>
+              </a:schemeClr>
+            </a:gs>
+            <a:gs pos="100000">
+              <a:schemeClr val="phClr">
+                <a:lumMod val="99000"/>
+                <a:satMod val="120000"/>
+                <a:shade val="78000"/>
+              </a:schemeClr>
+            </a:gs>
+          </a:gsLst>
+          <a:lin ang="5400000" scaled="0"/>
+        </a:gradFill>
+      </a:fillStyleLst>
+      <a:lnStyleLst>
+        <a:ln w="12700" cap="flat" cmpd="sng" algn="ctr">
+          <a:solidFill>
+            <a:schemeClr val="phClr"/>
+          </a:solidFill>
+          <a:prstDash val="solid"/>
+          <a:miter lim="800000"/>
+        </a:ln>
+        <a:ln w="19050" cap="flat" cmpd="sng" algn="ctr">
+          <a:solidFill>
+            <a:schemeClr val="phClr"/>
+          </a:solidFill>
+          <a:prstDash val="solid"/>
+          <a:miter lim="800000"/>
+        </a:ln>
+        <a:ln w="25400" cap="flat" cmpd="sng" algn="ctr">
+          <a:solidFill>
+            <a:schemeClr val="phClr"/>
+          </a:solidFill>
+          <a:prstDash val="solid"/>
+          <a:miter lim="800000"/>
+        </a:ln>
+      </a:lnStyleLst>
+      <a:effectStyleLst>
+        <a:effectStyle>
+          <a:effectLst/>
+        </a:effectStyle>
+        <a:effectStyle>
+          <a:effectLst/>
+        </a:effectStyle>
+        <a:effectStyle>
+          <a:effectLst>
+            <a:outerShdw blurRad="57150" dist="19050" dir="5400000" algn="ctr" rotWithShape="0">
+              <a:srgbClr val="000000">
+                <a:alpha val="63000"/>
+              </a:srgbClr>
+            </a:outerShdw>
+          </a:effectLst>
+        </a:effectStyle>
+      </a:effectStyleLst>
+      <a:bgFillStyleLst>
+        <a:solidFill>
+          <a:schemeClr val="phClr"/>
+        </a:solidFill>
+        <a:solidFill>
+          <a:schemeClr val="phClr">
+            <a:tint val="95000"/>
+            <a:satMod val="170000"/>
+          </a:schemeClr>
+        </a:solidFill>
+        <a:gradFill rotWithShape="1">
+          <a:gsLst>
+            <a:gs pos="0">
+              <a:schemeClr val="phClr">
+                <a:tint val="93000"/>
+                <a:satMod val="150000"/>
+                <a:shade val="98000"/>
+                <a:lumMod val="102000"/>
+              </a:schemeClr>
+            </a:gs>
+            <a:gs pos="50000">
+              <a:schemeClr val="phClr">
+                <a:tint val="98000"/>
+                <a:satMod val="130000"/>
+                <a:shade val="90000"/>
+                <a:lumMod val="103000"/>
+              </a:schemeClr>
+            </a:gs>
+            <a:gs pos="100000">
+              <a:schemeClr val="phClr">
+                <a:shade val="63000"/>
+                <a:satMod val="120000"/>
+              </a:schemeClr>
+            </a:gs>
+          </a:gsLst>
+          <a:lin ang="5400000" scaled="0"/>
+        </a:gradFill>
+      </a:bgFillStyleLst>
+    </a:fmtScheme>
+  </a:themeElements>
+  <a:objectDefaults>
+    <a:lnDef>
+      <a:spPr/>
+      <a:bodyPr/>
+      <a:lstStyle/>
+      <a:style>
+        <a:lnRef idx="2">
+          <a:schemeClr val="accent1"/>
+        </a:lnRef>
+        <a:fillRef idx="0">
+          <a:schemeClr val="accent1"/>
+        </a:fillRef>
+        <a:effectRef idx="1">
+          <a:schemeClr val="accent1"/>
+        </a:effectRef>
+        <a:fontRef idx="minor">
+          <a:schemeClr val="tx1"/>
+        </a:fontRef>
+      </a:style>
+    </a:lnDef>
+  </a:objectDefaults>
+  <a:extraClrSchemeLst/>
+  <a:extLst>
+    <a:ext uri="{05A4C25C-085E-4340-85A3-A5531E510DB2}">
+      <thm15:themeFamily xmlns:thm15="http://schemas.microsoft.com/office/thememl/2012/main" name="Office Theme" id="{2E142A2C-CD16-42D6-873A-C26D2A0506FA}" vid="{1BDDFF52-6CD6-40A5-AB3C-68EB2F1E4D0A}"/>
+    </a:ext>
+  </a:extLst>
+</a:theme>
 </file>